--- a/LENGUAJES ULTIMA GENERACION/clase_10/Sesion10_SGBD_SQL_POO.pptx
+++ b/LENGUAJES ULTIMA GENERACION/clase_10/Sesion10_SGBD_SQL_POO.pptx
@@ -3605,14 +3605,14 @@
           <a:ln/>
         </p:spPr>
         <p:txBody>
-          <a:bodyPr wrap="square" lIns="0" tIns="0" rIns="0" bIns="0" rtlCol="0" anchor="t"/>
-          <a:lstStyle/>
-          <a:p>
-            <a:pPr marL="0" indent="0">
-              <a:buNone/>
-            </a:pPr>
-            <a:r>
-              <a:rPr lang="en-US" sz="950" dirty="0">
+          <a:bodyPr wrap="square" lIns="0" tIns="0" rIns="0" bIns="0" numCol="2" rtlCol="0" anchor="t"/>
+          <a:lstStyle/>
+          <a:p>
+            <a:pPr marL="0" indent="0">
+              <a:buNone/>
+            </a:pPr>
+            <a:r>
+              <a:rPr lang="en-US" sz="700" dirty="0">
                 <a:solidFill>
                   <a:srgbClr val="56D364"/>
                 </a:solidFill>
@@ -3622,14 +3622,14 @@
               </a:rPr>
               <a:t>&lt;?php</a:t>
             </a:r>
-            <a:endParaRPr lang="en-US" sz="950" dirty="0"/>
-          </a:p>
-          <a:p>
-            <a:pPr marL="0" indent="0">
-              <a:buNone/>
-            </a:pPr>
-            <a:r>
-              <a:rPr lang="en-US" sz="950" dirty="0">
+            <a:endParaRPr lang="en-US" sz="700" dirty="0"/>
+          </a:p>
+          <a:p>
+            <a:pPr marL="0" indent="0">
+              <a:buNone/>
+            </a:pPr>
+            <a:r>
+              <a:rPr lang="en-US" sz="700" dirty="0">
                 <a:solidFill>
                   <a:srgbClr val="56D364"/>
                 </a:solidFill>
@@ -3639,14 +3639,14 @@
               </a:rPr>
               <a:t>// ═══ CONEXIÓN PDO A MARIADB (XAMPP) ═══</a:t>
             </a:r>
-            <a:endParaRPr lang="en-US" sz="950" dirty="0"/>
-          </a:p>
-          <a:p>
-            <a:pPr marL="0" indent="0">
-              <a:buNone/>
-            </a:pPr>
-            <a:r>
-              <a:rPr lang="en-US" sz="950" dirty="0">
+            <a:endParaRPr lang="en-US" sz="700" dirty="0"/>
+          </a:p>
+          <a:p>
+            <a:pPr marL="0" indent="0">
+              <a:buNone/>
+            </a:pPr>
+            <a:r>
+              <a:rPr lang="en-US" sz="700" dirty="0">
                 <a:solidFill>
                   <a:srgbClr val="56D364"/>
                 </a:solidFill>
@@ -3656,14 +3656,14 @@
               </a:rPr>
               <a:t>try {</a:t>
             </a:r>
-            <a:endParaRPr lang="en-US" sz="950" dirty="0"/>
-          </a:p>
-          <a:p>
-            <a:pPr marL="0" indent="0">
-              <a:buNone/>
-            </a:pPr>
-            <a:r>
-              <a:rPr lang="en-US" sz="950" dirty="0">
+            <a:endParaRPr lang="en-US" sz="700" dirty="0"/>
+          </a:p>
+          <a:p>
+            <a:pPr marL="0" indent="0">
+              <a:buNone/>
+            </a:pPr>
+            <a:r>
+              <a:rPr lang="en-US" sz="700" dirty="0">
                 <a:solidFill>
                   <a:srgbClr val="56D364"/>
                 </a:solidFill>
@@ -3673,14 +3673,14 @@
               </a:rPr>
               <a:t>    $dsn = "mysql:host=localhost;dbname=mi_tienda;charset=utf8mb4";</a:t>
             </a:r>
-            <a:endParaRPr lang="en-US" sz="950" dirty="0"/>
-          </a:p>
-          <a:p>
-            <a:pPr marL="0" indent="0">
-              <a:buNone/>
-            </a:pPr>
-            <a:r>
-              <a:rPr lang="en-US" sz="950" dirty="0">
+            <a:endParaRPr lang="en-US" sz="700" dirty="0"/>
+          </a:p>
+          <a:p>
+            <a:pPr marL="0" indent="0">
+              <a:buNone/>
+            </a:pPr>
+            <a:r>
+              <a:rPr lang="en-US" sz="700" dirty="0">
                 <a:solidFill>
                   <a:srgbClr val="56D364"/>
                 </a:solidFill>
@@ -3690,14 +3690,14 @@
               </a:rPr>
               <a:t>    $pdo = new PDO($dsn, 'root', '', [</a:t>
             </a:r>
-            <a:endParaRPr lang="en-US" sz="950" dirty="0"/>
-          </a:p>
-          <a:p>
-            <a:pPr marL="0" indent="0">
-              <a:buNone/>
-            </a:pPr>
-            <a:r>
-              <a:rPr lang="en-US" sz="950" dirty="0">
+            <a:endParaRPr lang="en-US" sz="700" dirty="0"/>
+          </a:p>
+          <a:p>
+            <a:pPr marL="0" indent="0">
+              <a:buNone/>
+            </a:pPr>
+            <a:r>
+              <a:rPr lang="en-US" sz="700" dirty="0">
                 <a:solidFill>
                   <a:srgbClr val="56D364"/>
                 </a:solidFill>
@@ -3707,14 +3707,14 @@
               </a:rPr>
               <a:t>        PDO::ATTR_ERRMODE            =&gt; PDO::ERRMODE_EXCEPTION,</a:t>
             </a:r>
-            <a:endParaRPr lang="en-US" sz="950" dirty="0"/>
-          </a:p>
-          <a:p>
-            <a:pPr marL="0" indent="0">
-              <a:buNone/>
-            </a:pPr>
-            <a:r>
-              <a:rPr lang="en-US" sz="950" dirty="0">
+            <a:endParaRPr lang="en-US" sz="700" dirty="0"/>
+          </a:p>
+          <a:p>
+            <a:pPr marL="0" indent="0">
+              <a:buNone/>
+            </a:pPr>
+            <a:r>
+              <a:rPr lang="en-US" sz="700" dirty="0">
                 <a:solidFill>
                   <a:srgbClr val="56D364"/>
                 </a:solidFill>
@@ -3724,14 +3724,14 @@
               </a:rPr>
               <a:t>        PDO::ATTR_DEFAULT_FETCH_MODE =&gt; PDO::FETCH_ASSOC,</a:t>
             </a:r>
-            <a:endParaRPr lang="en-US" sz="950" dirty="0"/>
-          </a:p>
-          <a:p>
-            <a:pPr marL="0" indent="0">
-              <a:buNone/>
-            </a:pPr>
-            <a:r>
-              <a:rPr lang="en-US" sz="950" dirty="0">
+            <a:endParaRPr lang="en-US" sz="700" dirty="0"/>
+          </a:p>
+          <a:p>
+            <a:pPr marL="0" indent="0">
+              <a:buNone/>
+            </a:pPr>
+            <a:r>
+              <a:rPr lang="en-US" sz="700" dirty="0">
                 <a:solidFill>
                   <a:srgbClr val="56D364"/>
                 </a:solidFill>
@@ -3741,14 +3741,14 @@
               </a:rPr>
               <a:t>        PDO::ATTR_EMULATE_PREPARES   =&gt; false,   // Prepared statements reales</a:t>
             </a:r>
-            <a:endParaRPr lang="en-US" sz="950" dirty="0"/>
-          </a:p>
-          <a:p>
-            <a:pPr marL="0" indent="0">
-              <a:buNone/>
-            </a:pPr>
-            <a:r>
-              <a:rPr lang="en-US" sz="950" dirty="0">
+            <a:endParaRPr lang="en-US" sz="700" dirty="0"/>
+          </a:p>
+          <a:p>
+            <a:pPr marL="0" indent="0">
+              <a:buNone/>
+            </a:pPr>
+            <a:r>
+              <a:rPr lang="en-US" sz="700" dirty="0">
                 <a:solidFill>
                   <a:srgbClr val="56D364"/>
                 </a:solidFill>
@@ -3758,14 +3758,14 @@
               </a:rPr>
               <a:t>    ]);</a:t>
             </a:r>
-            <a:endParaRPr lang="en-US" sz="950" dirty="0"/>
-          </a:p>
-          <a:p>
-            <a:pPr marL="0" indent="0">
-              <a:buNone/>
-            </a:pPr>
-            <a:r>
-              <a:rPr lang="en-US" sz="950" dirty="0">
+            <a:endParaRPr lang="en-US" sz="700" dirty="0"/>
+          </a:p>
+          <a:p>
+            <a:pPr marL="0" indent="0">
+              <a:buNone/>
+            </a:pPr>
+            <a:r>
+              <a:rPr lang="en-US" sz="700" dirty="0">
                 <a:solidFill>
                   <a:srgbClr val="56D364"/>
                 </a:solidFill>
@@ -3775,14 +3775,14 @@
               </a:rPr>
               <a:t>} catch (PDOException $e) {</a:t>
             </a:r>
-            <a:endParaRPr lang="en-US" sz="950" dirty="0"/>
-          </a:p>
-          <a:p>
-            <a:pPr marL="0" indent="0">
-              <a:buNone/>
-            </a:pPr>
-            <a:r>
-              <a:rPr lang="en-US" sz="950" dirty="0">
+            <a:endParaRPr lang="en-US" sz="700" dirty="0"/>
+          </a:p>
+          <a:p>
+            <a:pPr marL="0" indent="0">
+              <a:buNone/>
+            </a:pPr>
+            <a:r>
+              <a:rPr lang="en-US" sz="700" dirty="0">
                 <a:solidFill>
                   <a:srgbClr val="56D364"/>
                 </a:solidFill>
@@ -3792,14 +3792,14 @@
               </a:rPr>
               <a:t>    die("Error de conexión: " . $e-&gt;getMessage());</a:t>
             </a:r>
-            <a:endParaRPr lang="en-US" sz="950" dirty="0"/>
-          </a:p>
-          <a:p>
-            <a:pPr marL="0" indent="0">
-              <a:buNone/>
-            </a:pPr>
-            <a:r>
-              <a:rPr lang="en-US" sz="950" dirty="0">
+            <a:endParaRPr lang="en-US" sz="700" dirty="0"/>
+          </a:p>
+          <a:p>
+            <a:pPr marL="0" indent="0">
+              <a:buNone/>
+            </a:pPr>
+            <a:r>
+              <a:rPr lang="en-US" sz="700" dirty="0">
                 <a:solidFill>
                   <a:srgbClr val="56D364"/>
                 </a:solidFill>
@@ -3809,20 +3809,20 @@
               </a:rPr>
               <a:t>}</a:t>
             </a:r>
-            <a:endParaRPr lang="en-US" sz="950" dirty="0"/>
-          </a:p>
-          <a:p>
-            <a:pPr marL="0" indent="0">
-              <a:buNone/>
-            </a:pPr>
-            <a:endParaRPr lang="en-US" sz="950" dirty="0"/>
-          </a:p>
-          <a:p>
-            <a:pPr marL="0" indent="0">
-              <a:buNone/>
-            </a:pPr>
-            <a:r>
-              <a:rPr lang="en-US" sz="950" dirty="0">
+            <a:endParaRPr lang="en-US" sz="700" dirty="0"/>
+          </a:p>
+          <a:p>
+            <a:pPr marL="0" indent="0">
+              <a:buNone/>
+            </a:pPr>
+            <a:endParaRPr lang="en-US" sz="700" dirty="0"/>
+          </a:p>
+          <a:p>
+            <a:pPr marL="0" indent="0">
+              <a:buNone/>
+            </a:pPr>
+            <a:r>
+              <a:rPr lang="en-US" sz="700" dirty="0">
                 <a:solidFill>
                   <a:srgbClr val="56D364"/>
                 </a:solidFill>
@@ -3832,14 +3832,14 @@
               </a:rPr>
               <a:t>// ═══ SELECT con Prepared Statement (evita SQL Injection) ═══</a:t>
             </a:r>
-            <a:endParaRPr lang="en-US" sz="950" dirty="0"/>
-          </a:p>
-          <a:p>
-            <a:pPr marL="0" indent="0">
-              <a:buNone/>
-            </a:pPr>
-            <a:r>
-              <a:rPr lang="en-US" sz="950" dirty="0">
+            <a:endParaRPr lang="en-US" sz="700" dirty="0"/>
+          </a:p>
+          <a:p>
+            <a:pPr marL="0" indent="0">
+              <a:buNone/>
+            </a:pPr>
+            <a:r>
+              <a:rPr lang="en-US" sz="700" dirty="0">
                 <a:solidFill>
                   <a:srgbClr val="56D364"/>
                 </a:solidFill>
@@ -3849,14 +3849,14 @@
               </a:rPr>
               <a:t>$stmt = $pdo-&gt;prepare("SELECT nombre, precio FROM producto WHERE id_categoria=:cat AND activo=1");</a:t>
             </a:r>
-            <a:endParaRPr lang="en-US" sz="950" dirty="0"/>
-          </a:p>
-          <a:p>
-            <a:pPr marL="0" indent="0">
-              <a:buNone/>
-            </a:pPr>
-            <a:r>
-              <a:rPr lang="en-US" sz="950" dirty="0">
+            <a:endParaRPr lang="en-US" sz="700" dirty="0"/>
+          </a:p>
+          <a:p>
+            <a:pPr marL="0" indent="0">
+              <a:buNone/>
+            </a:pPr>
+            <a:r>
+              <a:rPr lang="en-US" sz="700" dirty="0">
                 <a:solidFill>
                   <a:srgbClr val="56D364"/>
                 </a:solidFill>
@@ -3866,14 +3866,14 @@
               </a:rPr>
               <a:t>$stmt-&gt;execute([':cat' =&gt; $_GET['categoria']]);  // Parámetro del usuario: SEGURO</a:t>
             </a:r>
-            <a:endParaRPr lang="en-US" sz="950" dirty="0"/>
-          </a:p>
-          <a:p>
-            <a:pPr marL="0" indent="0">
-              <a:buNone/>
-            </a:pPr>
-            <a:r>
-              <a:rPr lang="en-US" sz="950" dirty="0">
+            <a:endParaRPr lang="en-US" sz="700" dirty="0"/>
+          </a:p>
+          <a:p>
+            <a:pPr marL="0" indent="0">
+              <a:buNone/>
+            </a:pPr>
+            <a:r>
+              <a:rPr lang="en-US" sz="700" dirty="0">
                 <a:solidFill>
                   <a:srgbClr val="56D364"/>
                 </a:solidFill>
@@ -3883,14 +3883,14 @@
               </a:rPr>
               <a:t>$productos = $stmt-&gt;fetchAll();                  // Array asociativo con todos los resultados</a:t>
             </a:r>
-            <a:endParaRPr lang="en-US" sz="950" dirty="0"/>
-          </a:p>
-          <a:p>
-            <a:pPr marL="0" indent="0">
-              <a:buNone/>
-            </a:pPr>
-            <a:r>
-              <a:rPr lang="en-US" sz="950" dirty="0">
+            <a:endParaRPr lang="en-US" sz="700" dirty="0"/>
+          </a:p>
+          <a:p>
+            <a:pPr marL="0" indent="0">
+              <a:buNone/>
+            </a:pPr>
+            <a:r>
+              <a:rPr lang="en-US" sz="700" dirty="0">
                 <a:solidFill>
                   <a:srgbClr val="56D364"/>
                 </a:solidFill>
@@ -3900,14 +3900,14 @@
               </a:rPr>
               <a:t>foreach ($productos as $p) {</a:t>
             </a:r>
-            <a:endParaRPr lang="en-US" sz="950" dirty="0"/>
-          </a:p>
-          <a:p>
-            <a:pPr marL="0" indent="0">
-              <a:buNone/>
-            </a:pPr>
-            <a:r>
-              <a:rPr lang="en-US" sz="950" dirty="0">
+            <a:endParaRPr lang="en-US" sz="700" dirty="0"/>
+          </a:p>
+          <a:p>
+            <a:pPr marL="0" indent="0">
+              <a:buNone/>
+            </a:pPr>
+            <a:r>
+              <a:rPr lang="en-US" sz="700" dirty="0">
                 <a:solidFill>
                   <a:srgbClr val="56D364"/>
                 </a:solidFill>
@@ -3917,14 +3917,14 @@
               </a:rPr>
               <a:t>    echo "&lt;li&gt;{$p['nombre']}: $" . number_format($p['precio']) . "&lt;/li&gt;";</a:t>
             </a:r>
-            <a:endParaRPr lang="en-US" sz="950" dirty="0"/>
-          </a:p>
-          <a:p>
-            <a:pPr marL="0" indent="0">
-              <a:buNone/>
-            </a:pPr>
-            <a:r>
-              <a:rPr lang="en-US" sz="950" dirty="0">
+            <a:endParaRPr lang="en-US" sz="700" dirty="0"/>
+          </a:p>
+          <a:p>
+            <a:pPr marL="0" indent="0">
+              <a:buNone/>
+            </a:pPr>
+            <a:r>
+              <a:rPr lang="en-US" sz="700" dirty="0">
                 <a:solidFill>
                   <a:srgbClr val="56D364"/>
                 </a:solidFill>
@@ -3934,20 +3934,20 @@
               </a:rPr>
               <a:t>}</a:t>
             </a:r>
-            <a:endParaRPr lang="en-US" sz="950" dirty="0"/>
-          </a:p>
-          <a:p>
-            <a:pPr marL="0" indent="0">
-              <a:buNone/>
-            </a:pPr>
-            <a:endParaRPr lang="en-US" sz="950" dirty="0"/>
-          </a:p>
-          <a:p>
-            <a:pPr marL="0" indent="0">
-              <a:buNone/>
-            </a:pPr>
-            <a:r>
-              <a:rPr lang="en-US" sz="950" dirty="0">
+            <a:endParaRPr lang="en-US" sz="700" dirty="0"/>
+          </a:p>
+          <a:p>
+            <a:pPr marL="0" indent="0">
+              <a:buNone/>
+            </a:pPr>
+            <a:endParaRPr lang="en-US" sz="700" dirty="0"/>
+          </a:p>
+          <a:p>
+            <a:pPr marL="0" indent="0">
+              <a:buNone/>
+            </a:pPr>
+            <a:r>
+              <a:rPr lang="en-US" sz="700" dirty="0">
                 <a:solidFill>
                   <a:srgbClr val="56D364"/>
                 </a:solidFill>
@@ -3957,14 +3957,14 @@
               </a:rPr>
               <a:t>// ═══ INSERT con Prepared Statement ═══</a:t>
             </a:r>
-            <a:endParaRPr lang="en-US" sz="950" dirty="0"/>
-          </a:p>
-          <a:p>
-            <a:pPr marL="0" indent="0">
-              <a:buNone/>
-            </a:pPr>
-            <a:r>
-              <a:rPr lang="en-US" sz="950" dirty="0">
+            <a:endParaRPr lang="en-US" sz="700" dirty="0"/>
+          </a:p>
+          <a:p>
+            <a:pPr marL="0" indent="0">
+              <a:buNone/>
+            </a:pPr>
+            <a:r>
+              <a:rPr lang="en-US" sz="700" dirty="0">
                 <a:solidFill>
                   <a:srgbClr val="56D364"/>
                 </a:solidFill>
@@ -3974,14 +3974,14 @@
               </a:rPr>
               <a:t>$stmt = $pdo-&gt;prepare("INSERT INTO producto (nombre, precio, stock, id_categoria) VALUES (?,?,?,?)");</a:t>
             </a:r>
-            <a:endParaRPr lang="en-US" sz="950" dirty="0"/>
-          </a:p>
-          <a:p>
-            <a:pPr marL="0" indent="0">
-              <a:buNone/>
-            </a:pPr>
-            <a:r>
-              <a:rPr lang="en-US" sz="950" dirty="0">
+            <a:endParaRPr lang="en-US" sz="700" dirty="0"/>
+          </a:p>
+          <a:p>
+            <a:pPr marL="0" indent="0">
+              <a:buNone/>
+            </a:pPr>
+            <a:r>
+              <a:rPr lang="en-US" sz="700" dirty="0">
                 <a:solidFill>
                   <a:srgbClr val="56D364"/>
                 </a:solidFill>
@@ -3991,14 +3991,14 @@
               </a:rPr>
               <a:t>$stmt-&gt;execute([$_POST['nombre'], $_POST['precio'], 100, 1]);</a:t>
             </a:r>
-            <a:endParaRPr lang="en-US" sz="950" dirty="0"/>
-          </a:p>
-          <a:p>
-            <a:pPr marL="0" indent="0">
-              <a:buNone/>
-            </a:pPr>
-            <a:r>
-              <a:rPr lang="en-US" sz="950" dirty="0">
+            <a:endParaRPr lang="en-US" sz="700" dirty="0"/>
+          </a:p>
+          <a:p>
+            <a:pPr marL="0" indent="0">
+              <a:buNone/>
+            </a:pPr>
+            <a:r>
+              <a:rPr lang="en-US" sz="700" dirty="0">
                 <a:solidFill>
                   <a:srgbClr val="56D364"/>
                 </a:solidFill>
@@ -4008,7 +4008,7 @@
               </a:rPr>
               <a:t>echo "Producto creado. ID: " . $pdo-&gt;lastInsertId();</a:t>
             </a:r>
-            <a:endParaRPr lang="en-US" sz="950" dirty="0"/>
+            <a:endParaRPr lang="en-US" sz="700" dirty="0"/>
           </a:p>
         </p:txBody>
       </p:sp>
@@ -6588,14 +6588,14 @@
           <a:ln/>
         </p:spPr>
         <p:txBody>
-          <a:bodyPr wrap="square" lIns="0" tIns="0" rIns="0" bIns="0" rtlCol="0" anchor="t"/>
-          <a:lstStyle/>
-          <a:p>
-            <a:pPr marL="0" indent="0">
-              <a:buNone/>
-            </a:pPr>
-            <a:r>
-              <a:rPr lang="en-US" sz="950" dirty="0">
+          <a:bodyPr wrap="square" lIns="0" tIns="0" rIns="0" bIns="0" numCol="2" rtlCol="0" anchor="t"/>
+          <a:lstStyle/>
+          <a:p>
+            <a:pPr marL="0" indent="0">
+              <a:buNone/>
+            </a:pPr>
+            <a:r>
+              <a:rPr lang="en-US" sz="600" dirty="0">
                 <a:solidFill>
                   <a:srgbClr val="56D364"/>
                 </a:solidFill>
@@ -6605,14 +6605,14 @@
               </a:rPr>
               <a:t>&lt;?php</a:t>
             </a:r>
-            <a:endParaRPr lang="en-US" sz="950" dirty="0"/>
-          </a:p>
-          <a:p>
-            <a:pPr marL="0" indent="0">
-              <a:buNone/>
-            </a:pPr>
-            <a:r>
-              <a:rPr lang="en-US" sz="950" dirty="0">
+            <a:endParaRPr lang="en-US" sz="600" dirty="0"/>
+          </a:p>
+          <a:p>
+            <a:pPr marL="0" indent="0">
+              <a:buNone/>
+            </a:pPr>
+            <a:r>
+              <a:rPr lang="en-US" sz="600" dirty="0">
                 <a:solidFill>
                   <a:srgbClr val="56D364"/>
                 </a:solidFill>
@@ -6622,14 +6622,14 @@
               </a:rPr>
               <a:t>class ProductoRepository {</a:t>
             </a:r>
-            <a:endParaRPr lang="en-US" sz="950" dirty="0"/>
-          </a:p>
-          <a:p>
-            <a:pPr marL="0" indent="0">
-              <a:buNone/>
-            </a:pPr>
-            <a:r>
-              <a:rPr lang="en-US" sz="950" dirty="0">
+            <a:endParaRPr lang="en-US" sz="600" dirty="0"/>
+          </a:p>
+          <a:p>
+            <a:pPr marL="0" indent="0">
+              <a:buNone/>
+            </a:pPr>
+            <a:r>
+              <a:rPr lang="en-US" sz="600" dirty="0">
                 <a:solidFill>
                   <a:srgbClr val="56D364"/>
                 </a:solidFill>
@@ -6639,14 +6639,14 @@
               </a:rPr>
               <a:t>    private PDO $db;</a:t>
             </a:r>
-            <a:endParaRPr lang="en-US" sz="950" dirty="0"/>
-          </a:p>
-          <a:p>
-            <a:pPr marL="0" indent="0">
-              <a:buNone/>
-            </a:pPr>
-            <a:r>
-              <a:rPr lang="en-US" sz="950" dirty="0">
+            <a:endParaRPr lang="en-US" sz="600" dirty="0"/>
+          </a:p>
+          <a:p>
+            <a:pPr marL="0" indent="0">
+              <a:buNone/>
+            </a:pPr>
+            <a:r>
+              <a:rPr lang="en-US" sz="600" dirty="0">
                 <a:solidFill>
                   <a:srgbClr val="56D364"/>
                 </a:solidFill>
@@ -6656,14 +6656,14 @@
               </a:rPr>
               <a:t>    </a:t>
             </a:r>
-            <a:endParaRPr lang="en-US" sz="950" dirty="0"/>
-          </a:p>
-          <a:p>
-            <a:pPr marL="0" indent="0">
-              <a:buNone/>
-            </a:pPr>
-            <a:r>
-              <a:rPr lang="en-US" sz="950" dirty="0">
+            <a:endParaRPr lang="en-US" sz="600" dirty="0"/>
+          </a:p>
+          <a:p>
+            <a:pPr marL="0" indent="0">
+              <a:buNone/>
+            </a:pPr>
+            <a:r>
+              <a:rPr lang="en-US" sz="600" dirty="0">
                 <a:solidFill>
                   <a:srgbClr val="56D364"/>
                 </a:solidFill>
@@ -6673,14 +6673,14 @@
               </a:rPr>
               <a:t>    public function __construct(PDO $connection) {</a:t>
             </a:r>
-            <a:endParaRPr lang="en-US" sz="950" dirty="0"/>
-          </a:p>
-          <a:p>
-            <a:pPr marL="0" indent="0">
-              <a:buNone/>
-            </a:pPr>
-            <a:r>
-              <a:rPr lang="en-US" sz="950" dirty="0">
+            <a:endParaRPr lang="en-US" sz="600" dirty="0"/>
+          </a:p>
+          <a:p>
+            <a:pPr marL="0" indent="0">
+              <a:buNone/>
+            </a:pPr>
+            <a:r>
+              <a:rPr lang="en-US" sz="600" dirty="0">
                 <a:solidFill>
                   <a:srgbClr val="56D364"/>
                 </a:solidFill>
@@ -6690,14 +6690,14 @@
               </a:rPr>
               <a:t>        $this-&gt;db = $connection;  // Inyección de dependencia</a:t>
             </a:r>
-            <a:endParaRPr lang="en-US" sz="950" dirty="0"/>
-          </a:p>
-          <a:p>
-            <a:pPr marL="0" indent="0">
-              <a:buNone/>
-            </a:pPr>
-            <a:r>
-              <a:rPr lang="en-US" sz="950" dirty="0">
+            <a:endParaRPr lang="en-US" sz="600" dirty="0"/>
+          </a:p>
+          <a:p>
+            <a:pPr marL="0" indent="0">
+              <a:buNone/>
+            </a:pPr>
+            <a:r>
+              <a:rPr lang="en-US" sz="600" dirty="0">
                 <a:solidFill>
                   <a:srgbClr val="56D364"/>
                 </a:solidFill>
@@ -6707,14 +6707,14 @@
               </a:rPr>
               <a:t>    }</a:t>
             </a:r>
-            <a:endParaRPr lang="en-US" sz="950" dirty="0"/>
-          </a:p>
-          <a:p>
-            <a:pPr marL="0" indent="0">
-              <a:buNone/>
-            </a:pPr>
-            <a:r>
-              <a:rPr lang="en-US" sz="950" dirty="0">
+            <a:endParaRPr lang="en-US" sz="600" dirty="0"/>
+          </a:p>
+          <a:p>
+            <a:pPr marL="0" indent="0">
+              <a:buNone/>
+            </a:pPr>
+            <a:r>
+              <a:rPr lang="en-US" sz="600" dirty="0">
                 <a:solidFill>
                   <a:srgbClr val="56D364"/>
                 </a:solidFill>
@@ -6724,14 +6724,14 @@
               </a:rPr>
               <a:t>    </a:t>
             </a:r>
-            <a:endParaRPr lang="en-US" sz="950" dirty="0"/>
-          </a:p>
-          <a:p>
-            <a:pPr marL="0" indent="0">
-              <a:buNone/>
-            </a:pPr>
-            <a:r>
-              <a:rPr lang="en-US" sz="950" dirty="0">
+            <a:endParaRPr lang="en-US" sz="600" dirty="0"/>
+          </a:p>
+          <a:p>
+            <a:pPr marL="0" indent="0">
+              <a:buNone/>
+            </a:pPr>
+            <a:r>
+              <a:rPr lang="en-US" sz="600" dirty="0">
                 <a:solidFill>
                   <a:srgbClr val="56D364"/>
                 </a:solidFill>
@@ -6741,14 +6741,14 @@
               </a:rPr>
               <a:t>    // READ – Listar productos con filtro opcional</a:t>
             </a:r>
-            <a:endParaRPr lang="en-US" sz="950" dirty="0"/>
-          </a:p>
-          <a:p>
-            <a:pPr marL="0" indent="0">
-              <a:buNone/>
-            </a:pPr>
-            <a:r>
-              <a:rPr lang="en-US" sz="950" dirty="0">
+            <a:endParaRPr lang="en-US" sz="600" dirty="0"/>
+          </a:p>
+          <a:p>
+            <a:pPr marL="0" indent="0">
+              <a:buNone/>
+            </a:pPr>
+            <a:r>
+              <a:rPr lang="en-US" sz="600" dirty="0">
                 <a:solidFill>
                   <a:srgbClr val="56D364"/>
                 </a:solidFill>
@@ -6758,14 +6758,14 @@
               </a:rPr>
               <a:t>    public function findAll(int $categoriaId = null): array {</a:t>
             </a:r>
-            <a:endParaRPr lang="en-US" sz="950" dirty="0"/>
-          </a:p>
-          <a:p>
-            <a:pPr marL="0" indent="0">
-              <a:buNone/>
-            </a:pPr>
-            <a:r>
-              <a:rPr lang="en-US" sz="950" dirty="0">
+            <a:endParaRPr lang="en-US" sz="600" dirty="0"/>
+          </a:p>
+          <a:p>
+            <a:pPr marL="0" indent="0">
+              <a:buNone/>
+            </a:pPr>
+            <a:r>
+              <a:rPr lang="en-US" sz="600" dirty="0">
                 <a:solidFill>
                   <a:srgbClr val="56D364"/>
                 </a:solidFill>
@@ -6775,14 +6775,14 @@
               </a:rPr>
               <a:t>        $sql = "SELECT p.*, c.nombre AS categoria FROM producto p </a:t>
             </a:r>
-            <a:endParaRPr lang="en-US" sz="950" dirty="0"/>
-          </a:p>
-          <a:p>
-            <a:pPr marL="0" indent="0">
-              <a:buNone/>
-            </a:pPr>
-            <a:r>
-              <a:rPr lang="en-US" sz="950" dirty="0">
+            <a:endParaRPr lang="en-US" sz="600" dirty="0"/>
+          </a:p>
+          <a:p>
+            <a:pPr marL="0" indent="0">
+              <a:buNone/>
+            </a:pPr>
+            <a:r>
+              <a:rPr lang="en-US" sz="600" dirty="0">
                 <a:solidFill>
                   <a:srgbClr val="56D364"/>
                 </a:solidFill>
@@ -6792,14 +6792,14 @@
               </a:rPr>
               <a:t>                JOIN categoria c ON p.id_categoria=c.id_categoria WHERE p.activo=1";</a:t>
             </a:r>
-            <a:endParaRPr lang="en-US" sz="950" dirty="0"/>
-          </a:p>
-          <a:p>
-            <a:pPr marL="0" indent="0">
-              <a:buNone/>
-            </a:pPr>
-            <a:r>
-              <a:rPr lang="en-US" sz="950" dirty="0">
+            <a:endParaRPr lang="en-US" sz="600" dirty="0"/>
+          </a:p>
+          <a:p>
+            <a:pPr marL="0" indent="0">
+              <a:buNone/>
+            </a:pPr>
+            <a:r>
+              <a:rPr lang="en-US" sz="600" dirty="0">
                 <a:solidFill>
                   <a:srgbClr val="56D364"/>
                 </a:solidFill>
@@ -6809,14 +6809,14 @@
               </a:rPr>
               <a:t>        $params = [];</a:t>
             </a:r>
-            <a:endParaRPr lang="en-US" sz="950" dirty="0"/>
-          </a:p>
-          <a:p>
-            <a:pPr marL="0" indent="0">
-              <a:buNone/>
-            </a:pPr>
-            <a:r>
-              <a:rPr lang="en-US" sz="950" dirty="0">
+            <a:endParaRPr lang="en-US" sz="600" dirty="0"/>
+          </a:p>
+          <a:p>
+            <a:pPr marL="0" indent="0">
+              <a:buNone/>
+            </a:pPr>
+            <a:r>
+              <a:rPr lang="en-US" sz="600" dirty="0">
                 <a:solidFill>
                   <a:srgbClr val="56D364"/>
                 </a:solidFill>
@@ -6826,14 +6826,14 @@
               </a:rPr>
               <a:t>        if ($categoriaId !== null) {</a:t>
             </a:r>
-            <a:endParaRPr lang="en-US" sz="950" dirty="0"/>
-          </a:p>
-          <a:p>
-            <a:pPr marL="0" indent="0">
-              <a:buNone/>
-            </a:pPr>
-            <a:r>
-              <a:rPr lang="en-US" sz="950" dirty="0">
+            <a:endParaRPr lang="en-US" sz="600" dirty="0"/>
+          </a:p>
+          <a:p>
+            <a:pPr marL="0" indent="0">
+              <a:buNone/>
+            </a:pPr>
+            <a:r>
+              <a:rPr lang="en-US" sz="600" dirty="0">
                 <a:solidFill>
                   <a:srgbClr val="56D364"/>
                 </a:solidFill>
@@ -6843,14 +6843,14 @@
               </a:rPr>
               <a:t>            $sql .= " AND p.id_categoria = :cat";</a:t>
             </a:r>
-            <a:endParaRPr lang="en-US" sz="950" dirty="0"/>
-          </a:p>
-          <a:p>
-            <a:pPr marL="0" indent="0">
-              <a:buNone/>
-            </a:pPr>
-            <a:r>
-              <a:rPr lang="en-US" sz="950" dirty="0">
+            <a:endParaRPr lang="en-US" sz="600" dirty="0"/>
+          </a:p>
+          <a:p>
+            <a:pPr marL="0" indent="0">
+              <a:buNone/>
+            </a:pPr>
+            <a:r>
+              <a:rPr lang="en-US" sz="600" dirty="0">
                 <a:solidFill>
                   <a:srgbClr val="56D364"/>
                 </a:solidFill>
@@ -6860,14 +6860,14 @@
               </a:rPr>
               <a:t>            $params[':cat'] = $categoriaId;</a:t>
             </a:r>
-            <a:endParaRPr lang="en-US" sz="950" dirty="0"/>
-          </a:p>
-          <a:p>
-            <a:pPr marL="0" indent="0">
-              <a:buNone/>
-            </a:pPr>
-            <a:r>
-              <a:rPr lang="en-US" sz="950" dirty="0">
+            <a:endParaRPr lang="en-US" sz="600" dirty="0"/>
+          </a:p>
+          <a:p>
+            <a:pPr marL="0" indent="0">
+              <a:buNone/>
+            </a:pPr>
+            <a:r>
+              <a:rPr lang="en-US" sz="600" dirty="0">
                 <a:solidFill>
                   <a:srgbClr val="56D364"/>
                 </a:solidFill>
@@ -6877,14 +6877,14 @@
               </a:rPr>
               <a:t>        }</a:t>
             </a:r>
-            <a:endParaRPr lang="en-US" sz="950" dirty="0"/>
-          </a:p>
-          <a:p>
-            <a:pPr marL="0" indent="0">
-              <a:buNone/>
-            </a:pPr>
-            <a:r>
-              <a:rPr lang="en-US" sz="950" dirty="0">
+            <a:endParaRPr lang="en-US" sz="600" dirty="0"/>
+          </a:p>
+          <a:p>
+            <a:pPr marL="0" indent="0">
+              <a:buNone/>
+            </a:pPr>
+            <a:r>
+              <a:rPr lang="en-US" sz="600" dirty="0">
                 <a:solidFill>
                   <a:srgbClr val="56D364"/>
                 </a:solidFill>
@@ -6894,14 +6894,14 @@
               </a:rPr>
               <a:t>        $sql .= " ORDER BY p.nombre";</a:t>
             </a:r>
-            <a:endParaRPr lang="en-US" sz="950" dirty="0"/>
-          </a:p>
-          <a:p>
-            <a:pPr marL="0" indent="0">
-              <a:buNone/>
-            </a:pPr>
-            <a:r>
-              <a:rPr lang="en-US" sz="950" dirty="0">
+            <a:endParaRPr lang="en-US" sz="600" dirty="0"/>
+          </a:p>
+          <a:p>
+            <a:pPr marL="0" indent="0">
+              <a:buNone/>
+            </a:pPr>
+            <a:r>
+              <a:rPr lang="en-US" sz="600" dirty="0">
                 <a:solidFill>
                   <a:srgbClr val="56D364"/>
                 </a:solidFill>
@@ -6911,14 +6911,14 @@
               </a:rPr>
               <a:t>        $stmt = $this-&gt;db-&gt;prepare($sql);</a:t>
             </a:r>
-            <a:endParaRPr lang="en-US" sz="950" dirty="0"/>
-          </a:p>
-          <a:p>
-            <a:pPr marL="0" indent="0">
-              <a:buNone/>
-            </a:pPr>
-            <a:r>
-              <a:rPr lang="en-US" sz="950" dirty="0">
+            <a:endParaRPr lang="en-US" sz="600" dirty="0"/>
+          </a:p>
+          <a:p>
+            <a:pPr marL="0" indent="0">
+              <a:buNone/>
+            </a:pPr>
+            <a:r>
+              <a:rPr lang="en-US" sz="600" dirty="0">
                 <a:solidFill>
                   <a:srgbClr val="56D364"/>
                 </a:solidFill>
@@ -6928,14 +6928,14 @@
               </a:rPr>
               <a:t>        $stmt-&gt;execute($params);</a:t>
             </a:r>
-            <a:endParaRPr lang="en-US" sz="950" dirty="0"/>
-          </a:p>
-          <a:p>
-            <a:pPr marL="0" indent="0">
-              <a:buNone/>
-            </a:pPr>
-            <a:r>
-              <a:rPr lang="en-US" sz="950" dirty="0">
+            <a:endParaRPr lang="en-US" sz="600" dirty="0"/>
+          </a:p>
+          <a:p>
+            <a:pPr marL="0" indent="0">
+              <a:buNone/>
+            </a:pPr>
+            <a:r>
+              <a:rPr lang="en-US" sz="600" dirty="0">
                 <a:solidFill>
                   <a:srgbClr val="56D364"/>
                 </a:solidFill>
@@ -6945,14 +6945,14 @@
               </a:rPr>
               <a:t>        return $stmt-&gt;fetchAll();</a:t>
             </a:r>
-            <a:endParaRPr lang="en-US" sz="950" dirty="0"/>
-          </a:p>
-          <a:p>
-            <a:pPr marL="0" indent="0">
-              <a:buNone/>
-            </a:pPr>
-            <a:r>
-              <a:rPr lang="en-US" sz="950" dirty="0">
+            <a:endParaRPr lang="en-US" sz="600" dirty="0"/>
+          </a:p>
+          <a:p>
+            <a:pPr marL="0" indent="0">
+              <a:buNone/>
+            </a:pPr>
+            <a:r>
+              <a:rPr lang="en-US" sz="600" dirty="0">
                 <a:solidFill>
                   <a:srgbClr val="56D364"/>
                 </a:solidFill>
@@ -6962,14 +6962,14 @@
               </a:rPr>
               <a:t>    }</a:t>
             </a:r>
-            <a:endParaRPr lang="en-US" sz="950" dirty="0"/>
-          </a:p>
-          <a:p>
-            <a:pPr marL="0" indent="0">
-              <a:buNone/>
-            </a:pPr>
-            <a:r>
-              <a:rPr lang="en-US" sz="950" dirty="0">
+            <a:endParaRPr lang="en-US" sz="600" dirty="0"/>
+          </a:p>
+          <a:p>
+            <a:pPr marL="0" indent="0">
+              <a:buNone/>
+            </a:pPr>
+            <a:r>
+              <a:rPr lang="en-US" sz="600" dirty="0">
                 <a:solidFill>
                   <a:srgbClr val="56D364"/>
                 </a:solidFill>
@@ -6979,14 +6979,14 @@
               </a:rPr>
               <a:t>    </a:t>
             </a:r>
-            <a:endParaRPr lang="en-US" sz="950" dirty="0"/>
-          </a:p>
-          <a:p>
-            <a:pPr marL="0" indent="0">
-              <a:buNone/>
-            </a:pPr>
-            <a:r>
-              <a:rPr lang="en-US" sz="950" dirty="0">
+            <a:endParaRPr lang="en-US" sz="600" dirty="0"/>
+          </a:p>
+          <a:p>
+            <a:pPr marL="0" indent="0">
+              <a:buNone/>
+            </a:pPr>
+            <a:r>
+              <a:rPr lang="en-US" sz="600" dirty="0">
                 <a:solidFill>
                   <a:srgbClr val="56D364"/>
                 </a:solidFill>
@@ -6996,14 +6996,14 @@
               </a:rPr>
               <a:t>    // CREATE – Insertar con validación y transacción</a:t>
             </a:r>
-            <a:endParaRPr lang="en-US" sz="950" dirty="0"/>
-          </a:p>
-          <a:p>
-            <a:pPr marL="0" indent="0">
-              <a:buNone/>
-            </a:pPr>
-            <a:r>
-              <a:rPr lang="en-US" sz="950" dirty="0">
+            <a:endParaRPr lang="en-US" sz="600" dirty="0"/>
+          </a:p>
+          <a:p>
+            <a:pPr marL="0" indent="0">
+              <a:buNone/>
+            </a:pPr>
+            <a:r>
+              <a:rPr lang="en-US" sz="600" dirty="0">
                 <a:solidFill>
                   <a:srgbClr val="56D364"/>
                 </a:solidFill>
@@ -7013,14 +7013,14 @@
               </a:rPr>
               <a:t>    public function create(array $data): int {</a:t>
             </a:r>
-            <a:endParaRPr lang="en-US" sz="950" dirty="0"/>
-          </a:p>
-          <a:p>
-            <a:pPr marL="0" indent="0">
-              <a:buNone/>
-            </a:pPr>
-            <a:r>
-              <a:rPr lang="en-US" sz="950" dirty="0">
+            <a:endParaRPr lang="en-US" sz="600" dirty="0"/>
+          </a:p>
+          <a:p>
+            <a:pPr marL="0" indent="0">
+              <a:buNone/>
+            </a:pPr>
+            <a:r>
+              <a:rPr lang="en-US" sz="600" dirty="0">
                 <a:solidFill>
                   <a:srgbClr val="56D364"/>
                 </a:solidFill>
@@ -7030,14 +7030,14 @@
               </a:rPr>
               <a:t>        $this-&gt;db-&gt;beginTransaction();</a:t>
             </a:r>
-            <a:endParaRPr lang="en-US" sz="950" dirty="0"/>
-          </a:p>
-          <a:p>
-            <a:pPr marL="0" indent="0">
-              <a:buNone/>
-            </a:pPr>
-            <a:r>
-              <a:rPr lang="en-US" sz="950" dirty="0">
+            <a:endParaRPr lang="en-US" sz="600" dirty="0"/>
+          </a:p>
+          <a:p>
+            <a:pPr marL="0" indent="0">
+              <a:buNone/>
+            </a:pPr>
+            <a:r>
+              <a:rPr lang="en-US" sz="600" dirty="0">
                 <a:solidFill>
                   <a:srgbClr val="56D364"/>
                 </a:solidFill>
@@ -7047,14 +7047,14 @@
               </a:rPr>
               <a:t>        try {</a:t>
             </a:r>
-            <a:endParaRPr lang="en-US" sz="950" dirty="0"/>
-          </a:p>
-          <a:p>
-            <a:pPr marL="0" indent="0">
-              <a:buNone/>
-            </a:pPr>
-            <a:r>
-              <a:rPr lang="en-US" sz="950" dirty="0">
+            <a:endParaRPr lang="en-US" sz="600" dirty="0"/>
+          </a:p>
+          <a:p>
+            <a:pPr marL="0" indent="0">
+              <a:buNone/>
+            </a:pPr>
+            <a:r>
+              <a:rPr lang="en-US" sz="600" dirty="0">
                 <a:solidFill>
                   <a:srgbClr val="56D364"/>
                 </a:solidFill>
@@ -7064,14 +7064,14 @@
               </a:rPr>
               <a:t>            $stmt = $this-&gt;db-&gt;prepare(</a:t>
             </a:r>
-            <a:endParaRPr lang="en-US" sz="950" dirty="0"/>
-          </a:p>
-          <a:p>
-            <a:pPr marL="0" indent="0">
-              <a:buNone/>
-            </a:pPr>
-            <a:r>
-              <a:rPr lang="en-US" sz="950" dirty="0">
+            <a:endParaRPr lang="en-US" sz="600" dirty="0"/>
+          </a:p>
+          <a:p>
+            <a:pPr marL="0" indent="0">
+              <a:buNone/>
+            </a:pPr>
+            <a:r>
+              <a:rPr lang="en-US" sz="600" dirty="0">
                 <a:solidFill>
                   <a:srgbClr val="56D364"/>
                 </a:solidFill>
@@ -7081,14 +7081,14 @@
               </a:rPr>
               <a:t>                "INSERT INTO producto (nombre, precio, stock, id_categoria) VALUES (:nombre, :precio, :stock, :cat)"</a:t>
             </a:r>
-            <a:endParaRPr lang="en-US" sz="950" dirty="0"/>
-          </a:p>
-          <a:p>
-            <a:pPr marL="0" indent="0">
-              <a:buNone/>
-            </a:pPr>
-            <a:r>
-              <a:rPr lang="en-US" sz="950" dirty="0">
+            <a:endParaRPr lang="en-US" sz="600" dirty="0"/>
+          </a:p>
+          <a:p>
+            <a:pPr marL="0" indent="0">
+              <a:buNone/>
+            </a:pPr>
+            <a:r>
+              <a:rPr lang="en-US" sz="600" dirty="0">
                 <a:solidFill>
                   <a:srgbClr val="56D364"/>
                 </a:solidFill>
@@ -7098,14 +7098,14 @@
               </a:rPr>
               <a:t>            );</a:t>
             </a:r>
-            <a:endParaRPr lang="en-US" sz="950" dirty="0"/>
-          </a:p>
-          <a:p>
-            <a:pPr marL="0" indent="0">
-              <a:buNone/>
-            </a:pPr>
-            <a:r>
-              <a:rPr lang="en-US" sz="950" dirty="0">
+            <a:endParaRPr lang="en-US" sz="600" dirty="0"/>
+          </a:p>
+          <a:p>
+            <a:pPr marL="0" indent="0">
+              <a:buNone/>
+            </a:pPr>
+            <a:r>
+              <a:rPr lang="en-US" sz="600" dirty="0">
                 <a:solidFill>
                   <a:srgbClr val="56D364"/>
                 </a:solidFill>
@@ -7115,14 +7115,14 @@
               </a:rPr>
               <a:t>            $stmt-&gt;execute([</a:t>
             </a:r>
-            <a:endParaRPr lang="en-US" sz="950" dirty="0"/>
-          </a:p>
-          <a:p>
-            <a:pPr marL="0" indent="0">
-              <a:buNone/>
-            </a:pPr>
-            <a:r>
-              <a:rPr lang="en-US" sz="950" dirty="0">
+            <a:endParaRPr lang="en-US" sz="600" dirty="0"/>
+          </a:p>
+          <a:p>
+            <a:pPr marL="0" indent="0">
+              <a:buNone/>
+            </a:pPr>
+            <a:r>
+              <a:rPr lang="en-US" sz="600" dirty="0">
                 <a:solidFill>
                   <a:srgbClr val="56D364"/>
                 </a:solidFill>
@@ -7132,14 +7132,14 @@
               </a:rPr>
               <a:t>                ':nombre' =&gt; trim($data['nombre']),</a:t>
             </a:r>
-            <a:endParaRPr lang="en-US" sz="950" dirty="0"/>
-          </a:p>
-          <a:p>
-            <a:pPr marL="0" indent="0">
-              <a:buNone/>
-            </a:pPr>
-            <a:r>
-              <a:rPr lang="en-US" sz="950" dirty="0">
+            <a:endParaRPr lang="en-US" sz="600" dirty="0"/>
+          </a:p>
+          <a:p>
+            <a:pPr marL="0" indent="0">
+              <a:buNone/>
+            </a:pPr>
+            <a:r>
+              <a:rPr lang="en-US" sz="600" dirty="0">
                 <a:solidFill>
                   <a:srgbClr val="56D364"/>
                 </a:solidFill>
@@ -7149,14 +7149,14 @@
               </a:rPr>
               <a:t>                ':precio' =&gt; floatval($data['precio']),</a:t>
             </a:r>
-            <a:endParaRPr lang="en-US" sz="950" dirty="0"/>
-          </a:p>
-          <a:p>
-            <a:pPr marL="0" indent="0">
-              <a:buNone/>
-            </a:pPr>
-            <a:r>
-              <a:rPr lang="en-US" sz="950" dirty="0">
+            <a:endParaRPr lang="en-US" sz="600" dirty="0"/>
+          </a:p>
+          <a:p>
+            <a:pPr marL="0" indent="0">
+              <a:buNone/>
+            </a:pPr>
+            <a:r>
+              <a:rPr lang="en-US" sz="600" dirty="0">
                 <a:solidFill>
                   <a:srgbClr val="56D364"/>
                 </a:solidFill>
@@ -7166,14 +7166,14 @@
               </a:rPr>
               <a:t>                ':stock'  =&gt; intval($data['stock']),</a:t>
             </a:r>
-            <a:endParaRPr lang="en-US" sz="950" dirty="0"/>
-          </a:p>
-          <a:p>
-            <a:pPr marL="0" indent="0">
-              <a:buNone/>
-            </a:pPr>
-            <a:r>
-              <a:rPr lang="en-US" sz="950" dirty="0">
+            <a:endParaRPr lang="en-US" sz="600" dirty="0"/>
+          </a:p>
+          <a:p>
+            <a:pPr marL="0" indent="0">
+              <a:buNone/>
+            </a:pPr>
+            <a:r>
+              <a:rPr lang="en-US" sz="600" dirty="0">
                 <a:solidFill>
                   <a:srgbClr val="56D364"/>
                 </a:solidFill>
@@ -7183,14 +7183,14 @@
               </a:rPr>
               <a:t>                ':cat'    =&gt; intval($data['id_categoria']),</a:t>
             </a:r>
-            <a:endParaRPr lang="en-US" sz="950" dirty="0"/>
-          </a:p>
-          <a:p>
-            <a:pPr marL="0" indent="0">
-              <a:buNone/>
-            </a:pPr>
-            <a:r>
-              <a:rPr lang="en-US" sz="950" dirty="0">
+            <a:endParaRPr lang="en-US" sz="600" dirty="0"/>
+          </a:p>
+          <a:p>
+            <a:pPr marL="0" indent="0">
+              <a:buNone/>
+            </a:pPr>
+            <a:r>
+              <a:rPr lang="en-US" sz="600" dirty="0">
                 <a:solidFill>
                   <a:srgbClr val="56D364"/>
                 </a:solidFill>
@@ -7200,14 +7200,14 @@
               </a:rPr>
               <a:t>            ]);</a:t>
             </a:r>
-            <a:endParaRPr lang="en-US" sz="950" dirty="0"/>
-          </a:p>
-          <a:p>
-            <a:pPr marL="0" indent="0">
-              <a:buNone/>
-            </a:pPr>
-            <a:r>
-              <a:rPr lang="en-US" sz="950" dirty="0">
+            <a:endParaRPr lang="en-US" sz="600" dirty="0"/>
+          </a:p>
+          <a:p>
+            <a:pPr marL="0" indent="0">
+              <a:buNone/>
+            </a:pPr>
+            <a:r>
+              <a:rPr lang="en-US" sz="600" dirty="0">
                 <a:solidFill>
                   <a:srgbClr val="56D364"/>
                 </a:solidFill>
@@ -7217,14 +7217,14 @@
               </a:rPr>
               <a:t>            $newId = (int)$this-&gt;db-&gt;lastInsertId();</a:t>
             </a:r>
-            <a:endParaRPr lang="en-US" sz="950" dirty="0"/>
-          </a:p>
-          <a:p>
-            <a:pPr marL="0" indent="0">
-              <a:buNone/>
-            </a:pPr>
-            <a:r>
-              <a:rPr lang="en-US" sz="950" dirty="0">
+            <a:endParaRPr lang="en-US" sz="600" dirty="0"/>
+          </a:p>
+          <a:p>
+            <a:pPr marL="0" indent="0">
+              <a:buNone/>
+            </a:pPr>
+            <a:r>
+              <a:rPr lang="en-US" sz="600" dirty="0">
                 <a:solidFill>
                   <a:srgbClr val="56D364"/>
                 </a:solidFill>
@@ -7234,14 +7234,14 @@
               </a:rPr>
               <a:t>            </a:t>
             </a:r>
-            <a:endParaRPr lang="en-US" sz="950" dirty="0"/>
-          </a:p>
-          <a:p>
-            <a:pPr marL="0" indent="0">
-              <a:buNone/>
-            </a:pPr>
-            <a:r>
-              <a:rPr lang="en-US" sz="950" dirty="0">
+            <a:endParaRPr lang="en-US" sz="600" dirty="0"/>
+          </a:p>
+          <a:p>
+            <a:pPr marL="0" indent="0">
+              <a:buNone/>
+            </a:pPr>
+            <a:r>
+              <a:rPr lang="en-US" sz="600" dirty="0">
                 <a:solidFill>
                   <a:srgbClr val="56D364"/>
                 </a:solidFill>
@@ -7251,14 +7251,14 @@
               </a:rPr>
               <a:t>            // Log de auditoría dentro de la misma transacción</a:t>
             </a:r>
-            <a:endParaRPr lang="en-US" sz="950" dirty="0"/>
-          </a:p>
-          <a:p>
-            <a:pPr marL="0" indent="0">
-              <a:buNone/>
-            </a:pPr>
-            <a:r>
-              <a:rPr lang="en-US" sz="950" dirty="0">
+            <a:endParaRPr lang="en-US" sz="600" dirty="0"/>
+          </a:p>
+          <a:p>
+            <a:pPr marL="0" indent="0">
+              <a:buNone/>
+            </a:pPr>
+            <a:r>
+              <a:rPr lang="en-US" sz="600" dirty="0">
                 <a:solidFill>
                   <a:srgbClr val="56D364"/>
                 </a:solidFill>
@@ -7268,14 +7268,14 @@
               </a:rPr>
               <a:t>            $this-&gt;db-&gt;prepare("INSERT INTO log_producto (id_prod, accion, fecha) VALUES (?,?,NOW())")</a:t>
             </a:r>
-            <a:endParaRPr lang="en-US" sz="950" dirty="0"/>
-          </a:p>
-          <a:p>
-            <a:pPr marL="0" indent="0">
-              <a:buNone/>
-            </a:pPr>
-            <a:r>
-              <a:rPr lang="en-US" sz="950" dirty="0">
+            <a:endParaRPr lang="en-US" sz="600" dirty="0"/>
+          </a:p>
+          <a:p>
+            <a:pPr marL="0" indent="0">
+              <a:buNone/>
+            </a:pPr>
+            <a:r>
+              <a:rPr lang="en-US" sz="600" dirty="0">
                 <a:solidFill>
                   <a:srgbClr val="56D364"/>
                 </a:solidFill>
@@ -7285,14 +7285,14 @@
               </a:rPr>
               <a:t>                     -&gt;execute([$newId, 'CREATE']);</a:t>
             </a:r>
-            <a:endParaRPr lang="en-US" sz="950" dirty="0"/>
-          </a:p>
-          <a:p>
-            <a:pPr marL="0" indent="0">
-              <a:buNone/>
-            </a:pPr>
-            <a:r>
-              <a:rPr lang="en-US" sz="950" dirty="0">
+            <a:endParaRPr lang="en-US" sz="600" dirty="0"/>
+          </a:p>
+          <a:p>
+            <a:pPr marL="0" indent="0">
+              <a:buNone/>
+            </a:pPr>
+            <a:r>
+              <a:rPr lang="en-US" sz="600" dirty="0">
                 <a:solidFill>
                   <a:srgbClr val="56D364"/>
                 </a:solidFill>
@@ -7302,14 +7302,14 @@
               </a:rPr>
               <a:t>            </a:t>
             </a:r>
-            <a:endParaRPr lang="en-US" sz="950" dirty="0"/>
-          </a:p>
-          <a:p>
-            <a:pPr marL="0" indent="0">
-              <a:buNone/>
-            </a:pPr>
-            <a:r>
-              <a:rPr lang="en-US" sz="950" dirty="0">
+            <a:endParaRPr lang="en-US" sz="600" dirty="0"/>
+          </a:p>
+          <a:p>
+            <a:pPr marL="0" indent="0">
+              <a:buNone/>
+            </a:pPr>
+            <a:r>
+              <a:rPr lang="en-US" sz="600" dirty="0">
                 <a:solidFill>
                   <a:srgbClr val="56D364"/>
                 </a:solidFill>
@@ -7319,14 +7319,14 @@
               </a:rPr>
               <a:t>            $this-&gt;db-&gt;commit();</a:t>
             </a:r>
-            <a:endParaRPr lang="en-US" sz="950" dirty="0"/>
-          </a:p>
-          <a:p>
-            <a:pPr marL="0" indent="0">
-              <a:buNone/>
-            </a:pPr>
-            <a:r>
-              <a:rPr lang="en-US" sz="950" dirty="0">
+            <a:endParaRPr lang="en-US" sz="600" dirty="0"/>
+          </a:p>
+          <a:p>
+            <a:pPr marL="0" indent="0">
+              <a:buNone/>
+            </a:pPr>
+            <a:r>
+              <a:rPr lang="en-US" sz="600" dirty="0">
                 <a:solidFill>
                   <a:srgbClr val="56D364"/>
                 </a:solidFill>
@@ -7336,14 +7336,14 @@
               </a:rPr>
               <a:t>            return $newId;</a:t>
             </a:r>
-            <a:endParaRPr lang="en-US" sz="950" dirty="0"/>
-          </a:p>
-          <a:p>
-            <a:pPr marL="0" indent="0">
-              <a:buNone/>
-            </a:pPr>
-            <a:r>
-              <a:rPr lang="en-US" sz="950" dirty="0">
+            <a:endParaRPr lang="en-US" sz="600" dirty="0"/>
+          </a:p>
+          <a:p>
+            <a:pPr marL="0" indent="0">
+              <a:buNone/>
+            </a:pPr>
+            <a:r>
+              <a:rPr lang="en-US" sz="600" dirty="0">
                 <a:solidFill>
                   <a:srgbClr val="56D364"/>
                 </a:solidFill>
@@ -7353,14 +7353,14 @@
               </a:rPr>
               <a:t>        } catch (Exception $e) {</a:t>
             </a:r>
-            <a:endParaRPr lang="en-US" sz="950" dirty="0"/>
-          </a:p>
-          <a:p>
-            <a:pPr marL="0" indent="0">
-              <a:buNone/>
-            </a:pPr>
-            <a:r>
-              <a:rPr lang="en-US" sz="950" dirty="0">
+            <a:endParaRPr lang="en-US" sz="600" dirty="0"/>
+          </a:p>
+          <a:p>
+            <a:pPr marL="0" indent="0">
+              <a:buNone/>
+            </a:pPr>
+            <a:r>
+              <a:rPr lang="en-US" sz="600" dirty="0">
                 <a:solidFill>
                   <a:srgbClr val="56D364"/>
                 </a:solidFill>
@@ -7370,14 +7370,14 @@
               </a:rPr>
               <a:t>            $this-&gt;db-&gt;rollBack();</a:t>
             </a:r>
-            <a:endParaRPr lang="en-US" sz="950" dirty="0"/>
-          </a:p>
-          <a:p>
-            <a:pPr marL="0" indent="0">
-              <a:buNone/>
-            </a:pPr>
-            <a:r>
-              <a:rPr lang="en-US" sz="950" dirty="0">
+            <a:endParaRPr lang="en-US" sz="600" dirty="0"/>
+          </a:p>
+          <a:p>
+            <a:pPr marL="0" indent="0">
+              <a:buNone/>
+            </a:pPr>
+            <a:r>
+              <a:rPr lang="en-US" sz="600" dirty="0">
                 <a:solidFill>
                   <a:srgbClr val="56D364"/>
                 </a:solidFill>
@@ -7387,14 +7387,14 @@
               </a:rPr>
               <a:t>            throw $e;  // Reenviar excepción al controlador</a:t>
             </a:r>
-            <a:endParaRPr lang="en-US" sz="950" dirty="0"/>
-          </a:p>
-          <a:p>
-            <a:pPr marL="0" indent="0">
-              <a:buNone/>
-            </a:pPr>
-            <a:r>
-              <a:rPr lang="en-US" sz="950" dirty="0">
+            <a:endParaRPr lang="en-US" sz="600" dirty="0"/>
+          </a:p>
+          <a:p>
+            <a:pPr marL="0" indent="0">
+              <a:buNone/>
+            </a:pPr>
+            <a:r>
+              <a:rPr lang="en-US" sz="600" dirty="0">
                 <a:solidFill>
                   <a:srgbClr val="56D364"/>
                 </a:solidFill>
@@ -7404,14 +7404,14 @@
               </a:rPr>
               <a:t>        }</a:t>
             </a:r>
-            <a:endParaRPr lang="en-US" sz="950" dirty="0"/>
-          </a:p>
-          <a:p>
-            <a:pPr marL="0" indent="0">
-              <a:buNone/>
-            </a:pPr>
-            <a:r>
-              <a:rPr lang="en-US" sz="950" dirty="0">
+            <a:endParaRPr lang="en-US" sz="600" dirty="0"/>
+          </a:p>
+          <a:p>
+            <a:pPr marL="0" indent="0">
+              <a:buNone/>
+            </a:pPr>
+            <a:r>
+              <a:rPr lang="en-US" sz="600" dirty="0">
                 <a:solidFill>
                   <a:srgbClr val="56D364"/>
                 </a:solidFill>
@@ -7421,14 +7421,14 @@
               </a:rPr>
               <a:t>    }</a:t>
             </a:r>
-            <a:endParaRPr lang="en-US" sz="950" dirty="0"/>
-          </a:p>
-          <a:p>
-            <a:pPr marL="0" indent="0">
-              <a:buNone/>
-            </a:pPr>
-            <a:r>
-              <a:rPr lang="en-US" sz="950" dirty="0">
+            <a:endParaRPr lang="en-US" sz="600" dirty="0"/>
+          </a:p>
+          <a:p>
+            <a:pPr marL="0" indent="0">
+              <a:buNone/>
+            </a:pPr>
+            <a:r>
+              <a:rPr lang="en-US" sz="600" dirty="0">
                 <a:solidFill>
                   <a:srgbClr val="56D364"/>
                 </a:solidFill>
@@ -7438,14 +7438,14 @@
               </a:rPr>
               <a:t>    </a:t>
             </a:r>
-            <a:endParaRPr lang="en-US" sz="950" dirty="0"/>
-          </a:p>
-          <a:p>
-            <a:pPr marL="0" indent="0">
-              <a:buNone/>
-            </a:pPr>
-            <a:r>
-              <a:rPr lang="en-US" sz="950" dirty="0">
+            <a:endParaRPr lang="en-US" sz="600" dirty="0"/>
+          </a:p>
+          <a:p>
+            <a:pPr marL="0" indent="0">
+              <a:buNone/>
+            </a:pPr>
+            <a:r>
+              <a:rPr lang="en-US" sz="600" dirty="0">
                 <a:solidFill>
                   <a:srgbClr val="56D364"/>
                 </a:solidFill>
@@ -7455,14 +7455,14 @@
               </a:rPr>
               <a:t>    // UPDATE – Soft delete (marcar inactivo en lugar de eliminar)</a:t>
             </a:r>
-            <a:endParaRPr lang="en-US" sz="950" dirty="0"/>
-          </a:p>
-          <a:p>
-            <a:pPr marL="0" indent="0">
-              <a:buNone/>
-            </a:pPr>
-            <a:r>
-              <a:rPr lang="en-US" sz="950" dirty="0">
+            <a:endParaRPr lang="en-US" sz="600" dirty="0"/>
+          </a:p>
+          <a:p>
+            <a:pPr marL="0" indent="0">
+              <a:buNone/>
+            </a:pPr>
+            <a:r>
+              <a:rPr lang="en-US" sz="600" dirty="0">
                 <a:solidFill>
                   <a:srgbClr val="56D364"/>
                 </a:solidFill>
@@ -7472,14 +7472,14 @@
               </a:rPr>
               <a:t>    public function softDelete(int $id): bool {</a:t>
             </a:r>
-            <a:endParaRPr lang="en-US" sz="950" dirty="0"/>
-          </a:p>
-          <a:p>
-            <a:pPr marL="0" indent="0">
-              <a:buNone/>
-            </a:pPr>
-            <a:r>
-              <a:rPr lang="en-US" sz="950" dirty="0">
+            <a:endParaRPr lang="en-US" sz="600" dirty="0"/>
+          </a:p>
+          <a:p>
+            <a:pPr marL="0" indent="0">
+              <a:buNone/>
+            </a:pPr>
+            <a:r>
+              <a:rPr lang="en-US" sz="600" dirty="0">
                 <a:solidFill>
                   <a:srgbClr val="56D364"/>
                 </a:solidFill>
@@ -7489,14 +7489,14 @@
               </a:rPr>
               <a:t>        return (bool)$this-&gt;db-&gt;prepare("UPDATE producto SET activo=0 WHERE id_producto=:id")</a:t>
             </a:r>
-            <a:endParaRPr lang="en-US" sz="950" dirty="0"/>
-          </a:p>
-          <a:p>
-            <a:pPr marL="0" indent="0">
-              <a:buNone/>
-            </a:pPr>
-            <a:r>
-              <a:rPr lang="en-US" sz="950" dirty="0">
+            <a:endParaRPr lang="en-US" sz="600" dirty="0"/>
+          </a:p>
+          <a:p>
+            <a:pPr marL="0" indent="0">
+              <a:buNone/>
+            </a:pPr>
+            <a:r>
+              <a:rPr lang="en-US" sz="600" dirty="0">
                 <a:solidFill>
                   <a:srgbClr val="56D364"/>
                 </a:solidFill>
@@ -7506,14 +7506,14 @@
               </a:rPr>
               <a:t>                              -&gt;execute([':id' =&gt; $id]);</a:t>
             </a:r>
-            <a:endParaRPr lang="en-US" sz="950" dirty="0"/>
-          </a:p>
-          <a:p>
-            <a:pPr marL="0" indent="0">
-              <a:buNone/>
-            </a:pPr>
-            <a:r>
-              <a:rPr lang="en-US" sz="950" dirty="0">
+            <a:endParaRPr lang="en-US" sz="600" dirty="0"/>
+          </a:p>
+          <a:p>
+            <a:pPr marL="0" indent="0">
+              <a:buNone/>
+            </a:pPr>
+            <a:r>
+              <a:rPr lang="en-US" sz="600" dirty="0">
                 <a:solidFill>
                   <a:srgbClr val="56D364"/>
                 </a:solidFill>
@@ -7523,14 +7523,14 @@
               </a:rPr>
               <a:t>    }</a:t>
             </a:r>
-            <a:endParaRPr lang="en-US" sz="950" dirty="0"/>
-          </a:p>
-          <a:p>
-            <a:pPr marL="0" indent="0">
-              <a:buNone/>
-            </a:pPr>
-            <a:r>
-              <a:rPr lang="en-US" sz="950" dirty="0">
+            <a:endParaRPr lang="en-US" sz="600" dirty="0"/>
+          </a:p>
+          <a:p>
+            <a:pPr marL="0" indent="0">
+              <a:buNone/>
+            </a:pPr>
+            <a:r>
+              <a:rPr lang="en-US" sz="600" dirty="0">
                 <a:solidFill>
                   <a:srgbClr val="56D364"/>
                 </a:solidFill>
@@ -7540,20 +7540,20 @@
               </a:rPr>
               <a:t>}</a:t>
             </a:r>
-            <a:endParaRPr lang="en-US" sz="950" dirty="0"/>
-          </a:p>
-          <a:p>
-            <a:pPr marL="0" indent="0">
-              <a:buNone/>
-            </a:pPr>
-            <a:endParaRPr lang="en-US" sz="950" dirty="0"/>
-          </a:p>
-          <a:p>
-            <a:pPr marL="0" indent="0">
-              <a:buNone/>
-            </a:pPr>
-            <a:r>
-              <a:rPr lang="en-US" sz="950" dirty="0">
+            <a:endParaRPr lang="en-US" sz="600" dirty="0"/>
+          </a:p>
+          <a:p>
+            <a:pPr marL="0" indent="0">
+              <a:buNone/>
+            </a:pPr>
+            <a:endParaRPr lang="en-US" sz="600" dirty="0"/>
+          </a:p>
+          <a:p>
+            <a:pPr marL="0" indent="0">
+              <a:buNone/>
+            </a:pPr>
+            <a:r>
+              <a:rPr lang="en-US" sz="600" dirty="0">
                 <a:solidFill>
                   <a:srgbClr val="56D364"/>
                 </a:solidFill>
@@ -7563,14 +7563,14 @@
               </a:rPr>
               <a:t>// Uso del repositorio:</a:t>
             </a:r>
-            <a:endParaRPr lang="en-US" sz="950" dirty="0"/>
-          </a:p>
-          <a:p>
-            <a:pPr marL="0" indent="0">
-              <a:buNone/>
-            </a:pPr>
-            <a:r>
-              <a:rPr lang="en-US" sz="950" dirty="0">
+            <a:endParaRPr lang="en-US" sz="600" dirty="0"/>
+          </a:p>
+          <a:p>
+            <a:pPr marL="0" indent="0">
+              <a:buNone/>
+            </a:pPr>
+            <a:r>
+              <a:rPr lang="en-US" sz="600" dirty="0">
                 <a:solidFill>
                   <a:srgbClr val="56D364"/>
                 </a:solidFill>
@@ -7580,14 +7580,14 @@
               </a:rPr>
               <a:t>$repo = new ProductoRepository($pdo);</a:t>
             </a:r>
-            <a:endParaRPr lang="en-US" sz="950" dirty="0"/>
-          </a:p>
-          <a:p>
-            <a:pPr marL="0" indent="0">
-              <a:buNone/>
-            </a:pPr>
-            <a:r>
-              <a:rPr lang="en-US" sz="950" dirty="0">
+            <a:endParaRPr lang="en-US" sz="600" dirty="0"/>
+          </a:p>
+          <a:p>
+            <a:pPr marL="0" indent="0">
+              <a:buNone/>
+            </a:pPr>
+            <a:r>
+              <a:rPr lang="en-US" sz="600" dirty="0">
                 <a:solidFill>
                   <a:srgbClr val="56D364"/>
                 </a:solidFill>
@@ -7597,14 +7597,14 @@
               </a:rPr>
               <a:t>$productos = $repo-&gt;findAll(categoriaId: 1);</a:t>
             </a:r>
-            <a:endParaRPr lang="en-US" sz="950" dirty="0"/>
-          </a:p>
-          <a:p>
-            <a:pPr marL="0" indent="0">
-              <a:buNone/>
-            </a:pPr>
-            <a:r>
-              <a:rPr lang="en-US" sz="950" dirty="0">
+            <a:endParaRPr lang="en-US" sz="600" dirty="0"/>
+          </a:p>
+          <a:p>
+            <a:pPr marL="0" indent="0">
+              <a:buNone/>
+            </a:pPr>
+            <a:r>
+              <a:rPr lang="en-US" sz="600" dirty="0">
                 <a:solidFill>
                   <a:srgbClr val="56D364"/>
                 </a:solidFill>
@@ -7614,7 +7614,7 @@
               </a:rPr>
               <a:t>$nuevoId   = $repo-&gt;create(['nombre'=&gt;'Café 500g', 'precio'=&gt;18500, 'stock'=&gt;100, 'id_categoria'=&gt;1]);</a:t>
             </a:r>
-            <a:endParaRPr lang="en-US" sz="950" dirty="0"/>
+            <a:endParaRPr lang="en-US" sz="600" dirty="0"/>
           </a:p>
         </p:txBody>
       </p:sp>
@@ -10295,14 +10295,14 @@
           <a:ln/>
         </p:spPr>
         <p:txBody>
-          <a:bodyPr wrap="square" lIns="0" tIns="0" rIns="0" bIns="0" rtlCol="0" anchor="t"/>
-          <a:lstStyle/>
-          <a:p>
-            <a:pPr marL="0" indent="0">
-              <a:buNone/>
-            </a:pPr>
-            <a:r>
-              <a:rPr lang="en-US" sz="950" dirty="0">
+          <a:bodyPr wrap="square" lIns="0" tIns="0" rIns="0" bIns="0" numCol="2" rtlCol="0" anchor="t"/>
+          <a:lstStyle/>
+          <a:p>
+            <a:pPr marL="0" indent="0">
+              <a:buNone/>
+            </a:pPr>
+            <a:r>
+              <a:rPr lang="en-US" sz="700" dirty="0">
                 <a:solidFill>
                   <a:srgbClr val="56D364"/>
                 </a:solidFill>
@@ -10312,14 +10312,14 @@
               </a:rPr>
               <a:t>DELIMITER //</a:t>
             </a:r>
-            <a:endParaRPr lang="en-US" sz="950" dirty="0"/>
-          </a:p>
-          <a:p>
-            <a:pPr marL="0" indent="0">
-              <a:buNone/>
-            </a:pPr>
-            <a:r>
-              <a:rPr lang="en-US" sz="950" dirty="0">
+            <a:endParaRPr lang="en-US" sz="700" dirty="0"/>
+          </a:p>
+          <a:p>
+            <a:pPr marL="0" indent="0">
+              <a:buNone/>
+            </a:pPr>
+            <a:r>
+              <a:rPr lang="en-US" sz="700" dirty="0">
                 <a:solidFill>
                   <a:srgbClr val="56D364"/>
                 </a:solidFill>
@@ -10329,14 +10329,14 @@
               </a:rPr>
               <a:t>CREATE PROCEDURE sp_procesar_venta(</a:t>
             </a:r>
-            <a:endParaRPr lang="en-US" sz="950" dirty="0"/>
-          </a:p>
-          <a:p>
-            <a:pPr marL="0" indent="0">
-              <a:buNone/>
-            </a:pPr>
-            <a:r>
-              <a:rPr lang="en-US" sz="950" dirty="0">
+            <a:endParaRPr lang="en-US" sz="700" dirty="0"/>
+          </a:p>
+          <a:p>
+            <a:pPr marL="0" indent="0">
+              <a:buNone/>
+            </a:pPr>
+            <a:r>
+              <a:rPr lang="en-US" sz="700" dirty="0">
                 <a:solidFill>
                   <a:srgbClr val="56D364"/>
                 </a:solidFill>
@@ -10346,14 +10346,14 @@
               </a:rPr>
               <a:t>    IN  p_cliente  INT,</a:t>
             </a:r>
-            <a:endParaRPr lang="en-US" sz="950" dirty="0"/>
-          </a:p>
-          <a:p>
-            <a:pPr marL="0" indent="0">
-              <a:buNone/>
-            </a:pPr>
-            <a:r>
-              <a:rPr lang="en-US" sz="950" dirty="0">
+            <a:endParaRPr lang="en-US" sz="700" dirty="0"/>
+          </a:p>
+          <a:p>
+            <a:pPr marL="0" indent="0">
+              <a:buNone/>
+            </a:pPr>
+            <a:r>
+              <a:rPr lang="en-US" sz="700" dirty="0">
                 <a:solidFill>
                   <a:srgbClr val="56D364"/>
                 </a:solidFill>
@@ -10363,14 +10363,14 @@
               </a:rPr>
               <a:t>    IN  p_producto INT,</a:t>
             </a:r>
-            <a:endParaRPr lang="en-US" sz="950" dirty="0"/>
-          </a:p>
-          <a:p>
-            <a:pPr marL="0" indent="0">
-              <a:buNone/>
-            </a:pPr>
-            <a:r>
-              <a:rPr lang="en-US" sz="950" dirty="0">
+            <a:endParaRPr lang="en-US" sz="700" dirty="0"/>
+          </a:p>
+          <a:p>
+            <a:pPr marL="0" indent="0">
+              <a:buNone/>
+            </a:pPr>
+            <a:r>
+              <a:rPr lang="en-US" sz="700" dirty="0">
                 <a:solidFill>
                   <a:srgbClr val="56D364"/>
                 </a:solidFill>
@@ -10380,14 +10380,14 @@
               </a:rPr>
               <a:t>    IN  p_cantidad INT,</a:t>
             </a:r>
-            <a:endParaRPr lang="en-US" sz="950" dirty="0"/>
-          </a:p>
-          <a:p>
-            <a:pPr marL="0" indent="0">
-              <a:buNone/>
-            </a:pPr>
-            <a:r>
-              <a:rPr lang="en-US" sz="950" dirty="0">
+            <a:endParaRPr lang="en-US" sz="700" dirty="0"/>
+          </a:p>
+          <a:p>
+            <a:pPr marL="0" indent="0">
+              <a:buNone/>
+            </a:pPr>
+            <a:r>
+              <a:rPr lang="en-US" sz="700" dirty="0">
                 <a:solidFill>
                   <a:srgbClr val="56D364"/>
                 </a:solidFill>
@@ -10397,14 +10397,14 @@
               </a:rPr>
               <a:t>    OUT p_resultado VARCHAR(100)   -- Parámetro de salida</a:t>
             </a:r>
-            <a:endParaRPr lang="en-US" sz="950" dirty="0"/>
-          </a:p>
-          <a:p>
-            <a:pPr marL="0" indent="0">
-              <a:buNone/>
-            </a:pPr>
-            <a:r>
-              <a:rPr lang="en-US" sz="950" dirty="0">
+            <a:endParaRPr lang="en-US" sz="700" dirty="0"/>
+          </a:p>
+          <a:p>
+            <a:pPr marL="0" indent="0">
+              <a:buNone/>
+            </a:pPr>
+            <a:r>
+              <a:rPr lang="en-US" sz="700" dirty="0">
                 <a:solidFill>
                   <a:srgbClr val="56D364"/>
                 </a:solidFill>
@@ -10414,14 +10414,14 @@
               </a:rPr>
               <a:t>)</a:t>
             </a:r>
-            <a:endParaRPr lang="en-US" sz="950" dirty="0"/>
-          </a:p>
-          <a:p>
-            <a:pPr marL="0" indent="0">
-              <a:buNone/>
-            </a:pPr>
-            <a:r>
-              <a:rPr lang="en-US" sz="950" dirty="0">
+            <a:endParaRPr lang="en-US" sz="700" dirty="0"/>
+          </a:p>
+          <a:p>
+            <a:pPr marL="0" indent="0">
+              <a:buNone/>
+            </a:pPr>
+            <a:r>
+              <a:rPr lang="en-US" sz="700" dirty="0">
                 <a:solidFill>
                   <a:srgbClr val="56D364"/>
                 </a:solidFill>
@@ -10431,14 +10431,14 @@
               </a:rPr>
               <a:t>BEGIN</a:t>
             </a:r>
-            <a:endParaRPr lang="en-US" sz="950" dirty="0"/>
-          </a:p>
-          <a:p>
-            <a:pPr marL="0" indent="0">
-              <a:buNone/>
-            </a:pPr>
-            <a:r>
-              <a:rPr lang="en-US" sz="950" dirty="0">
+            <a:endParaRPr lang="en-US" sz="700" dirty="0"/>
+          </a:p>
+          <a:p>
+            <a:pPr marL="0" indent="0">
+              <a:buNone/>
+            </a:pPr>
+            <a:r>
+              <a:rPr lang="en-US" sz="700" dirty="0">
                 <a:solidFill>
                   <a:srgbClr val="56D364"/>
                 </a:solidFill>
@@ -10448,14 +10448,14 @@
               </a:rPr>
               <a:t>    DECLARE v_stock     INT DEFAULT 0;</a:t>
             </a:r>
-            <a:endParaRPr lang="en-US" sz="950" dirty="0"/>
-          </a:p>
-          <a:p>
-            <a:pPr marL="0" indent="0">
-              <a:buNone/>
-            </a:pPr>
-            <a:r>
-              <a:rPr lang="en-US" sz="950" dirty="0">
+            <a:endParaRPr lang="en-US" sz="700" dirty="0"/>
+          </a:p>
+          <a:p>
+            <a:pPr marL="0" indent="0">
+              <a:buNone/>
+            </a:pPr>
+            <a:r>
+              <a:rPr lang="en-US" sz="700" dirty="0">
                 <a:solidFill>
                   <a:srgbClr val="56D364"/>
                 </a:solidFill>
@@ -10465,14 +10465,14 @@
               </a:rPr>
               <a:t>    DECLARE v_precio    DECIMAL(12,2) DEFAULT 0;</a:t>
             </a:r>
-            <a:endParaRPr lang="en-US" sz="950" dirty="0"/>
-          </a:p>
-          <a:p>
-            <a:pPr marL="0" indent="0">
-              <a:buNone/>
-            </a:pPr>
-            <a:r>
-              <a:rPr lang="en-US" sz="950" dirty="0">
+            <a:endParaRPr lang="en-US" sz="700" dirty="0"/>
+          </a:p>
+          <a:p>
+            <a:pPr marL="0" indent="0">
+              <a:buNone/>
+            </a:pPr>
+            <a:r>
+              <a:rPr lang="en-US" sz="700" dirty="0">
                 <a:solidFill>
                   <a:srgbClr val="56D364"/>
                 </a:solidFill>
@@ -10482,14 +10482,14 @@
               </a:rPr>
               <a:t>    DECLARE v_id_orden  INT DEFAULT 0;</a:t>
             </a:r>
-            <a:endParaRPr lang="en-US" sz="950" dirty="0"/>
-          </a:p>
-          <a:p>
-            <a:pPr marL="0" indent="0">
-              <a:buNone/>
-            </a:pPr>
-            <a:r>
-              <a:rPr lang="en-US" sz="950" dirty="0">
+            <a:endParaRPr lang="en-US" sz="700" dirty="0"/>
+          </a:p>
+          <a:p>
+            <a:pPr marL="0" indent="0">
+              <a:buNone/>
+            </a:pPr>
+            <a:r>
+              <a:rPr lang="en-US" sz="700" dirty="0">
                 <a:solidFill>
                   <a:srgbClr val="56D364"/>
                 </a:solidFill>
@@ -10499,14 +10499,14 @@
               </a:rPr>
               <a:t>    </a:t>
             </a:r>
-            <a:endParaRPr lang="en-US" sz="950" dirty="0"/>
-          </a:p>
-          <a:p>
-            <a:pPr marL="0" indent="0">
-              <a:buNone/>
-            </a:pPr>
-            <a:r>
-              <a:rPr lang="en-US" sz="950" dirty="0">
+            <a:endParaRPr lang="en-US" sz="700" dirty="0"/>
+          </a:p>
+          <a:p>
+            <a:pPr marL="0" indent="0">
+              <a:buNone/>
+            </a:pPr>
+            <a:r>
+              <a:rPr lang="en-US" sz="700" dirty="0">
                 <a:solidFill>
                   <a:srgbClr val="56D364"/>
                 </a:solidFill>
@@ -10516,14 +10516,14 @@
               </a:rPr>
               <a:t>    -- Manejador de errores: ROLLBACK automático ante excepción</a:t>
             </a:r>
-            <a:endParaRPr lang="en-US" sz="950" dirty="0"/>
-          </a:p>
-          <a:p>
-            <a:pPr marL="0" indent="0">
-              <a:buNone/>
-            </a:pPr>
-            <a:r>
-              <a:rPr lang="en-US" sz="950" dirty="0">
+            <a:endParaRPr lang="en-US" sz="700" dirty="0"/>
+          </a:p>
+          <a:p>
+            <a:pPr marL="0" indent="0">
+              <a:buNone/>
+            </a:pPr>
+            <a:r>
+              <a:rPr lang="en-US" sz="700" dirty="0">
                 <a:solidFill>
                   <a:srgbClr val="56D364"/>
                 </a:solidFill>
@@ -10533,14 +10533,14 @@
               </a:rPr>
               <a:t>    DECLARE EXIT HANDLER FOR SQLEXCEPTION</a:t>
             </a:r>
-            <a:endParaRPr lang="en-US" sz="950" dirty="0"/>
-          </a:p>
-          <a:p>
-            <a:pPr marL="0" indent="0">
-              <a:buNone/>
-            </a:pPr>
-            <a:r>
-              <a:rPr lang="en-US" sz="950" dirty="0">
+            <a:endParaRPr lang="en-US" sz="700" dirty="0"/>
+          </a:p>
+          <a:p>
+            <a:pPr marL="0" indent="0">
+              <a:buNone/>
+            </a:pPr>
+            <a:r>
+              <a:rPr lang="en-US" sz="700" dirty="0">
                 <a:solidFill>
                   <a:srgbClr val="56D364"/>
                 </a:solidFill>
@@ -10550,14 +10550,14 @@
               </a:rPr>
               <a:t>    BEGIN</a:t>
             </a:r>
-            <a:endParaRPr lang="en-US" sz="950" dirty="0"/>
-          </a:p>
-          <a:p>
-            <a:pPr marL="0" indent="0">
-              <a:buNone/>
-            </a:pPr>
-            <a:r>
-              <a:rPr lang="en-US" sz="950" dirty="0">
+            <a:endParaRPr lang="en-US" sz="700" dirty="0"/>
+          </a:p>
+          <a:p>
+            <a:pPr marL="0" indent="0">
+              <a:buNone/>
+            </a:pPr>
+            <a:r>
+              <a:rPr lang="en-US" sz="700" dirty="0">
                 <a:solidFill>
                   <a:srgbClr val="56D364"/>
                 </a:solidFill>
@@ -10567,14 +10567,14 @@
               </a:rPr>
               <a:t>        ROLLBACK;</a:t>
             </a:r>
-            <a:endParaRPr lang="en-US" sz="950" dirty="0"/>
-          </a:p>
-          <a:p>
-            <a:pPr marL="0" indent="0">
-              <a:buNone/>
-            </a:pPr>
-            <a:r>
-              <a:rPr lang="en-US" sz="950" dirty="0">
+            <a:endParaRPr lang="en-US" sz="700" dirty="0"/>
+          </a:p>
+          <a:p>
+            <a:pPr marL="0" indent="0">
+              <a:buNone/>
+            </a:pPr>
+            <a:r>
+              <a:rPr lang="en-US" sz="700" dirty="0">
                 <a:solidFill>
                   <a:srgbClr val="56D364"/>
                 </a:solidFill>
@@ -10584,14 +10584,14 @@
               </a:rPr>
               <a:t>        SET p_resultado = 'ERROR: Transacción revertida';</a:t>
             </a:r>
-            <a:endParaRPr lang="en-US" sz="950" dirty="0"/>
-          </a:p>
-          <a:p>
-            <a:pPr marL="0" indent="0">
-              <a:buNone/>
-            </a:pPr>
-            <a:r>
-              <a:rPr lang="en-US" sz="950" dirty="0">
+            <a:endParaRPr lang="en-US" sz="700" dirty="0"/>
+          </a:p>
+          <a:p>
+            <a:pPr marL="0" indent="0">
+              <a:buNone/>
+            </a:pPr>
+            <a:r>
+              <a:rPr lang="en-US" sz="700" dirty="0">
                 <a:solidFill>
                   <a:srgbClr val="56D364"/>
                 </a:solidFill>
@@ -10601,14 +10601,14 @@
               </a:rPr>
               <a:t>    END;</a:t>
             </a:r>
-            <a:endParaRPr lang="en-US" sz="950" dirty="0"/>
-          </a:p>
-          <a:p>
-            <a:pPr marL="0" indent="0">
-              <a:buNone/>
-            </a:pPr>
-            <a:r>
-              <a:rPr lang="en-US" sz="950" dirty="0">
+            <a:endParaRPr lang="en-US" sz="700" dirty="0"/>
+          </a:p>
+          <a:p>
+            <a:pPr marL="0" indent="0">
+              <a:buNone/>
+            </a:pPr>
+            <a:r>
+              <a:rPr lang="en-US" sz="700" dirty="0">
                 <a:solidFill>
                   <a:srgbClr val="56D364"/>
                 </a:solidFill>
@@ -10618,14 +10618,14 @@
               </a:rPr>
               <a:t>    </a:t>
             </a:r>
-            <a:endParaRPr lang="en-US" sz="950" dirty="0"/>
-          </a:p>
-          <a:p>
-            <a:pPr marL="0" indent="0">
-              <a:buNone/>
-            </a:pPr>
-            <a:r>
-              <a:rPr lang="en-US" sz="950" dirty="0">
+            <a:endParaRPr lang="en-US" sz="700" dirty="0"/>
+          </a:p>
+          <a:p>
+            <a:pPr marL="0" indent="0">
+              <a:buNone/>
+            </a:pPr>
+            <a:r>
+              <a:rPr lang="en-US" sz="700" dirty="0">
                 <a:solidFill>
                   <a:srgbClr val="56D364"/>
                 </a:solidFill>
@@ -10635,14 +10635,14 @@
               </a:rPr>
               <a:t>    -- Encapsulamiento: toda la lógica de negocio dentro del SP</a:t>
             </a:r>
-            <a:endParaRPr lang="en-US" sz="950" dirty="0"/>
-          </a:p>
-          <a:p>
-            <a:pPr marL="0" indent="0">
-              <a:buNone/>
-            </a:pPr>
-            <a:r>
-              <a:rPr lang="en-US" sz="950" dirty="0">
+            <a:endParaRPr lang="en-US" sz="700" dirty="0"/>
+          </a:p>
+          <a:p>
+            <a:pPr marL="0" indent="0">
+              <a:buNone/>
+            </a:pPr>
+            <a:r>
+              <a:rPr lang="en-US" sz="700" dirty="0">
                 <a:solidFill>
                   <a:srgbClr val="56D364"/>
                 </a:solidFill>
@@ -10652,14 +10652,14 @@
               </a:rPr>
               <a:t>    START TRANSACTION;</a:t>
             </a:r>
-            <a:endParaRPr lang="en-US" sz="950" dirty="0"/>
-          </a:p>
-          <a:p>
-            <a:pPr marL="0" indent="0">
-              <a:buNone/>
-            </a:pPr>
-            <a:r>
-              <a:rPr lang="en-US" sz="950" dirty="0">
+            <a:endParaRPr lang="en-US" sz="700" dirty="0"/>
+          </a:p>
+          <a:p>
+            <a:pPr marL="0" indent="0">
+              <a:buNone/>
+            </a:pPr>
+            <a:r>
+              <a:rPr lang="en-US" sz="700" dirty="0">
                 <a:solidFill>
                   <a:srgbClr val="56D364"/>
                 </a:solidFill>
@@ -10669,14 +10669,14 @@
               </a:rPr>
               <a:t>    </a:t>
             </a:r>
-            <a:endParaRPr lang="en-US" sz="950" dirty="0"/>
-          </a:p>
-          <a:p>
-            <a:pPr marL="0" indent="0">
-              <a:buNone/>
-            </a:pPr>
-            <a:r>
-              <a:rPr lang="en-US" sz="950" dirty="0">
+            <a:endParaRPr lang="en-US" sz="700" dirty="0"/>
+          </a:p>
+          <a:p>
+            <a:pPr marL="0" indent="0">
+              <a:buNone/>
+            </a:pPr>
+            <a:r>
+              <a:rPr lang="en-US" sz="700" dirty="0">
                 <a:solidFill>
                   <a:srgbClr val="56D364"/>
                 </a:solidFill>
@@ -10686,14 +10686,14 @@
               </a:rPr>
               <a:t>    -- 1. Verificar stock disponible</a:t>
             </a:r>
-            <a:endParaRPr lang="en-US" sz="950" dirty="0"/>
-          </a:p>
-          <a:p>
-            <a:pPr marL="0" indent="0">
-              <a:buNone/>
-            </a:pPr>
-            <a:r>
-              <a:rPr lang="en-US" sz="950" dirty="0">
+            <a:endParaRPr lang="en-US" sz="700" dirty="0"/>
+          </a:p>
+          <a:p>
+            <a:pPr marL="0" indent="0">
+              <a:buNone/>
+            </a:pPr>
+            <a:r>
+              <a:rPr lang="en-US" sz="700" dirty="0">
                 <a:solidFill>
                   <a:srgbClr val="56D364"/>
                 </a:solidFill>
@@ -10703,14 +10703,14 @@
               </a:rPr>
               <a:t>    SELECT stock, precio INTO v_stock, v_precio</a:t>
             </a:r>
-            <a:endParaRPr lang="en-US" sz="950" dirty="0"/>
-          </a:p>
-          <a:p>
-            <a:pPr marL="0" indent="0">
-              <a:buNone/>
-            </a:pPr>
-            <a:r>
-              <a:rPr lang="en-US" sz="950" dirty="0">
+            <a:endParaRPr lang="en-US" sz="700" dirty="0"/>
+          </a:p>
+          <a:p>
+            <a:pPr marL="0" indent="0">
+              <a:buNone/>
+            </a:pPr>
+            <a:r>
+              <a:rPr lang="en-US" sz="700" dirty="0">
                 <a:solidFill>
                   <a:srgbClr val="56D364"/>
                 </a:solidFill>
@@ -10720,14 +10720,14 @@
               </a:rPr>
               <a:t>    FROM producto WHERE id_producto = p_producto FOR UPDATE;</a:t>
             </a:r>
-            <a:endParaRPr lang="en-US" sz="950" dirty="0"/>
-          </a:p>
-          <a:p>
-            <a:pPr marL="0" indent="0">
-              <a:buNone/>
-            </a:pPr>
-            <a:r>
-              <a:rPr lang="en-US" sz="950" dirty="0">
+            <a:endParaRPr lang="en-US" sz="700" dirty="0"/>
+          </a:p>
+          <a:p>
+            <a:pPr marL="0" indent="0">
+              <a:buNone/>
+            </a:pPr>
+            <a:r>
+              <a:rPr lang="en-US" sz="700" dirty="0">
                 <a:solidFill>
                   <a:srgbClr val="56D364"/>
                 </a:solidFill>
@@ -10737,14 +10737,14 @@
               </a:rPr>
               <a:t>    </a:t>
             </a:r>
-            <a:endParaRPr lang="en-US" sz="950" dirty="0"/>
-          </a:p>
-          <a:p>
-            <a:pPr marL="0" indent="0">
-              <a:buNone/>
-            </a:pPr>
-            <a:r>
-              <a:rPr lang="en-US" sz="950" dirty="0">
+            <a:endParaRPr lang="en-US" sz="700" dirty="0"/>
+          </a:p>
+          <a:p>
+            <a:pPr marL="0" indent="0">
+              <a:buNone/>
+            </a:pPr>
+            <a:r>
+              <a:rPr lang="en-US" sz="700" dirty="0">
                 <a:solidFill>
                   <a:srgbClr val="56D364"/>
                 </a:solidFill>
@@ -10754,14 +10754,14 @@
               </a:rPr>
               <a:t>    IF v_stock &lt; p_cantidad THEN</a:t>
             </a:r>
-            <a:endParaRPr lang="en-US" sz="950" dirty="0"/>
-          </a:p>
-          <a:p>
-            <a:pPr marL="0" indent="0">
-              <a:buNone/>
-            </a:pPr>
-            <a:r>
-              <a:rPr lang="en-US" sz="950" dirty="0">
+            <a:endParaRPr lang="en-US" sz="700" dirty="0"/>
+          </a:p>
+          <a:p>
+            <a:pPr marL="0" indent="0">
+              <a:buNone/>
+            </a:pPr>
+            <a:r>
+              <a:rPr lang="en-US" sz="700" dirty="0">
                 <a:solidFill>
                   <a:srgbClr val="56D364"/>
                 </a:solidFill>
@@ -10771,14 +10771,14 @@
               </a:rPr>
               <a:t>        SIGNAL SQLSTATE '45000' SET MESSAGE_TEXT = 'Stock insuficiente';</a:t>
             </a:r>
-            <a:endParaRPr lang="en-US" sz="950" dirty="0"/>
-          </a:p>
-          <a:p>
-            <a:pPr marL="0" indent="0">
-              <a:buNone/>
-            </a:pPr>
-            <a:r>
-              <a:rPr lang="en-US" sz="950" dirty="0">
+            <a:endParaRPr lang="en-US" sz="700" dirty="0"/>
+          </a:p>
+          <a:p>
+            <a:pPr marL="0" indent="0">
+              <a:buNone/>
+            </a:pPr>
+            <a:r>
+              <a:rPr lang="en-US" sz="700" dirty="0">
                 <a:solidFill>
                   <a:srgbClr val="56D364"/>
                 </a:solidFill>
@@ -10788,14 +10788,14 @@
               </a:rPr>
               <a:t>    END IF;</a:t>
             </a:r>
-            <a:endParaRPr lang="en-US" sz="950" dirty="0"/>
-          </a:p>
-          <a:p>
-            <a:pPr marL="0" indent="0">
-              <a:buNone/>
-            </a:pPr>
-            <a:r>
-              <a:rPr lang="en-US" sz="950" dirty="0">
+            <a:endParaRPr lang="en-US" sz="700" dirty="0"/>
+          </a:p>
+          <a:p>
+            <a:pPr marL="0" indent="0">
+              <a:buNone/>
+            </a:pPr>
+            <a:r>
+              <a:rPr lang="en-US" sz="700" dirty="0">
                 <a:solidFill>
                   <a:srgbClr val="56D364"/>
                 </a:solidFill>
@@ -10805,14 +10805,14 @@
               </a:rPr>
               <a:t>    </a:t>
             </a:r>
-            <a:endParaRPr lang="en-US" sz="950" dirty="0"/>
-          </a:p>
-          <a:p>
-            <a:pPr marL="0" indent="0">
-              <a:buNone/>
-            </a:pPr>
-            <a:r>
-              <a:rPr lang="en-US" sz="950" dirty="0">
+            <a:endParaRPr lang="en-US" sz="700" dirty="0"/>
+          </a:p>
+          <a:p>
+            <a:pPr marL="0" indent="0">
+              <a:buNone/>
+            </a:pPr>
+            <a:r>
+              <a:rPr lang="en-US" sz="700" dirty="0">
                 <a:solidFill>
                   <a:srgbClr val="56D364"/>
                 </a:solidFill>
@@ -10822,14 +10822,14 @@
               </a:rPr>
               <a:t>    -- 2. Crear la orden</a:t>
             </a:r>
-            <a:endParaRPr lang="en-US" sz="950" dirty="0"/>
-          </a:p>
-          <a:p>
-            <a:pPr marL="0" indent="0">
-              <a:buNone/>
-            </a:pPr>
-            <a:r>
-              <a:rPr lang="en-US" sz="950" dirty="0">
+            <a:endParaRPr lang="en-US" sz="700" dirty="0"/>
+          </a:p>
+          <a:p>
+            <a:pPr marL="0" indent="0">
+              <a:buNone/>
+            </a:pPr>
+            <a:r>
+              <a:rPr lang="en-US" sz="700" dirty="0">
                 <a:solidFill>
                   <a:srgbClr val="56D364"/>
                 </a:solidFill>
@@ -10839,14 +10839,14 @@
               </a:rPr>
               <a:t>    INSERT INTO orden (fecha, estado, id_cliente) VALUES (NOW(), 'pendiente', p_cliente);</a:t>
             </a:r>
-            <a:endParaRPr lang="en-US" sz="950" dirty="0"/>
-          </a:p>
-          <a:p>
-            <a:pPr marL="0" indent="0">
-              <a:buNone/>
-            </a:pPr>
-            <a:r>
-              <a:rPr lang="en-US" sz="950" dirty="0">
+            <a:endParaRPr lang="en-US" sz="700" dirty="0"/>
+          </a:p>
+          <a:p>
+            <a:pPr marL="0" indent="0">
+              <a:buNone/>
+            </a:pPr>
+            <a:r>
+              <a:rPr lang="en-US" sz="700" dirty="0">
                 <a:solidFill>
                   <a:srgbClr val="56D364"/>
                 </a:solidFill>
@@ -10856,14 +10856,14 @@
               </a:rPr>
               <a:t>    SET v_id_orden = LAST_INSERT_ID();</a:t>
             </a:r>
-            <a:endParaRPr lang="en-US" sz="950" dirty="0"/>
-          </a:p>
-          <a:p>
-            <a:pPr marL="0" indent="0">
-              <a:buNone/>
-            </a:pPr>
-            <a:r>
-              <a:rPr lang="en-US" sz="950" dirty="0">
+            <a:endParaRPr lang="en-US" sz="700" dirty="0"/>
+          </a:p>
+          <a:p>
+            <a:pPr marL="0" indent="0">
+              <a:buNone/>
+            </a:pPr>
+            <a:r>
+              <a:rPr lang="en-US" sz="700" dirty="0">
                 <a:solidFill>
                   <a:srgbClr val="56D364"/>
                 </a:solidFill>
@@ -10873,14 +10873,14 @@
               </a:rPr>
               <a:t>    </a:t>
             </a:r>
-            <a:endParaRPr lang="en-US" sz="950" dirty="0"/>
-          </a:p>
-          <a:p>
-            <a:pPr marL="0" indent="0">
-              <a:buNone/>
-            </a:pPr>
-            <a:r>
-              <a:rPr lang="en-US" sz="950" dirty="0">
+            <a:endParaRPr lang="en-US" sz="700" dirty="0"/>
+          </a:p>
+          <a:p>
+            <a:pPr marL="0" indent="0">
+              <a:buNone/>
+            </a:pPr>
+            <a:r>
+              <a:rPr lang="en-US" sz="700" dirty="0">
                 <a:solidFill>
                   <a:srgbClr val="56D364"/>
                 </a:solidFill>
@@ -10890,14 +10890,14 @@
               </a:rPr>
               <a:t>    -- 3. Registrar el detalle</a:t>
             </a:r>
-            <a:endParaRPr lang="en-US" sz="950" dirty="0"/>
-          </a:p>
-          <a:p>
-            <a:pPr marL="0" indent="0">
-              <a:buNone/>
-            </a:pPr>
-            <a:r>
-              <a:rPr lang="en-US" sz="950" dirty="0">
+            <a:endParaRPr lang="en-US" sz="700" dirty="0"/>
+          </a:p>
+          <a:p>
+            <a:pPr marL="0" indent="0">
+              <a:buNone/>
+            </a:pPr>
+            <a:r>
+              <a:rPr lang="en-US" sz="700" dirty="0">
                 <a:solidFill>
                   <a:srgbClr val="56D364"/>
                 </a:solidFill>
@@ -10907,14 +10907,14 @@
               </a:rPr>
               <a:t>    INSERT INTO detalle_orden (id_orden, id_producto, cantidad, precio_unit)</a:t>
             </a:r>
-            <a:endParaRPr lang="en-US" sz="950" dirty="0"/>
-          </a:p>
-          <a:p>
-            <a:pPr marL="0" indent="0">
-              <a:buNone/>
-            </a:pPr>
-            <a:r>
-              <a:rPr lang="en-US" sz="950" dirty="0">
+            <a:endParaRPr lang="en-US" sz="700" dirty="0"/>
+          </a:p>
+          <a:p>
+            <a:pPr marL="0" indent="0">
+              <a:buNone/>
+            </a:pPr>
+            <a:r>
+              <a:rPr lang="en-US" sz="700" dirty="0">
                 <a:solidFill>
                   <a:srgbClr val="56D364"/>
                 </a:solidFill>
@@ -10924,14 +10924,14 @@
               </a:rPr>
               <a:t>    VALUES (v_id_orden, p_producto, p_cantidad, v_precio);</a:t>
             </a:r>
-            <a:endParaRPr lang="en-US" sz="950" dirty="0"/>
-          </a:p>
-          <a:p>
-            <a:pPr marL="0" indent="0">
-              <a:buNone/>
-            </a:pPr>
-            <a:r>
-              <a:rPr lang="en-US" sz="950" dirty="0">
+            <a:endParaRPr lang="en-US" sz="700" dirty="0"/>
+          </a:p>
+          <a:p>
+            <a:pPr marL="0" indent="0">
+              <a:buNone/>
+            </a:pPr>
+            <a:r>
+              <a:rPr lang="en-US" sz="700" dirty="0">
                 <a:solidFill>
                   <a:srgbClr val="56D364"/>
                 </a:solidFill>
@@ -10941,14 +10941,14 @@
               </a:rPr>
               <a:t>    </a:t>
             </a:r>
-            <a:endParaRPr lang="en-US" sz="950" dirty="0"/>
-          </a:p>
-          <a:p>
-            <a:pPr marL="0" indent="0">
-              <a:buNone/>
-            </a:pPr>
-            <a:r>
-              <a:rPr lang="en-US" sz="950" dirty="0">
+            <a:endParaRPr lang="en-US" sz="700" dirty="0"/>
+          </a:p>
+          <a:p>
+            <a:pPr marL="0" indent="0">
+              <a:buNone/>
+            </a:pPr>
+            <a:r>
+              <a:rPr lang="en-US" sz="700" dirty="0">
                 <a:solidFill>
                   <a:srgbClr val="56D364"/>
                 </a:solidFill>
@@ -10958,14 +10958,14 @@
               </a:rPr>
               <a:t>    -- 4. Actualizar stock</a:t>
             </a:r>
-            <a:endParaRPr lang="en-US" sz="950" dirty="0"/>
-          </a:p>
-          <a:p>
-            <a:pPr marL="0" indent="0">
-              <a:buNone/>
-            </a:pPr>
-            <a:r>
-              <a:rPr lang="en-US" sz="950" dirty="0">
+            <a:endParaRPr lang="en-US" sz="700" dirty="0"/>
+          </a:p>
+          <a:p>
+            <a:pPr marL="0" indent="0">
+              <a:buNone/>
+            </a:pPr>
+            <a:r>
+              <a:rPr lang="en-US" sz="700" dirty="0">
                 <a:solidFill>
                   <a:srgbClr val="56D364"/>
                 </a:solidFill>
@@ -10975,14 +10975,14 @@
               </a:rPr>
               <a:t>    UPDATE producto SET stock = stock - p_cantidad WHERE id_producto = p_producto;</a:t>
             </a:r>
-            <a:endParaRPr lang="en-US" sz="950" dirty="0"/>
-          </a:p>
-          <a:p>
-            <a:pPr marL="0" indent="0">
-              <a:buNone/>
-            </a:pPr>
-            <a:r>
-              <a:rPr lang="en-US" sz="950" dirty="0">
+            <a:endParaRPr lang="en-US" sz="700" dirty="0"/>
+          </a:p>
+          <a:p>
+            <a:pPr marL="0" indent="0">
+              <a:buNone/>
+            </a:pPr>
+            <a:r>
+              <a:rPr lang="en-US" sz="700" dirty="0">
                 <a:solidFill>
                   <a:srgbClr val="56D364"/>
                 </a:solidFill>
@@ -10992,14 +10992,14 @@
               </a:rPr>
               <a:t>    </a:t>
             </a:r>
-            <a:endParaRPr lang="en-US" sz="950" dirty="0"/>
-          </a:p>
-          <a:p>
-            <a:pPr marL="0" indent="0">
-              <a:buNone/>
-            </a:pPr>
-            <a:r>
-              <a:rPr lang="en-US" sz="950" dirty="0">
+            <a:endParaRPr lang="en-US" sz="700" dirty="0"/>
+          </a:p>
+          <a:p>
+            <a:pPr marL="0" indent="0">
+              <a:buNone/>
+            </a:pPr>
+            <a:r>
+              <a:rPr lang="en-US" sz="700" dirty="0">
                 <a:solidFill>
                   <a:srgbClr val="56D364"/>
                 </a:solidFill>
@@ -11009,14 +11009,14 @@
               </a:rPr>
               <a:t>    COMMIT;</a:t>
             </a:r>
-            <a:endParaRPr lang="en-US" sz="950" dirty="0"/>
-          </a:p>
-          <a:p>
-            <a:pPr marL="0" indent="0">
-              <a:buNone/>
-            </a:pPr>
-            <a:r>
-              <a:rPr lang="en-US" sz="950" dirty="0">
+            <a:endParaRPr lang="en-US" sz="700" dirty="0"/>
+          </a:p>
+          <a:p>
+            <a:pPr marL="0" indent="0">
+              <a:buNone/>
+            </a:pPr>
+            <a:r>
+              <a:rPr lang="en-US" sz="700" dirty="0">
                 <a:solidFill>
                   <a:srgbClr val="56D364"/>
                 </a:solidFill>
@@ -11026,14 +11026,14 @@
               </a:rPr>
               <a:t>    SET p_resultado = CONCAT('OK: Orden #', v_id_orden, ' creada exitosamente');</a:t>
             </a:r>
-            <a:endParaRPr lang="en-US" sz="950" dirty="0"/>
-          </a:p>
-          <a:p>
-            <a:pPr marL="0" indent="0">
-              <a:buNone/>
-            </a:pPr>
-            <a:r>
-              <a:rPr lang="en-US" sz="950" dirty="0">
+            <a:endParaRPr lang="en-US" sz="700" dirty="0"/>
+          </a:p>
+          <a:p>
+            <a:pPr marL="0" indent="0">
+              <a:buNone/>
+            </a:pPr>
+            <a:r>
+              <a:rPr lang="en-US" sz="700" dirty="0">
                 <a:solidFill>
                   <a:srgbClr val="56D364"/>
                 </a:solidFill>
@@ -11043,14 +11043,14 @@
               </a:rPr>
               <a:t>END //</a:t>
             </a:r>
-            <a:endParaRPr lang="en-US" sz="950" dirty="0"/>
-          </a:p>
-          <a:p>
-            <a:pPr marL="0" indent="0">
-              <a:buNone/>
-            </a:pPr>
-            <a:r>
-              <a:rPr lang="en-US" sz="950" dirty="0">
+            <a:endParaRPr lang="en-US" sz="700" dirty="0"/>
+          </a:p>
+          <a:p>
+            <a:pPr marL="0" indent="0">
+              <a:buNone/>
+            </a:pPr>
+            <a:r>
+              <a:rPr lang="en-US" sz="700" dirty="0">
                 <a:solidFill>
                   <a:srgbClr val="56D364"/>
                 </a:solidFill>
@@ -11060,20 +11060,20 @@
               </a:rPr>
               <a:t>DELIMITER ;</a:t>
             </a:r>
-            <a:endParaRPr lang="en-US" sz="950" dirty="0"/>
-          </a:p>
-          <a:p>
-            <a:pPr marL="0" indent="0">
-              <a:buNone/>
-            </a:pPr>
-            <a:endParaRPr lang="en-US" sz="950" dirty="0"/>
-          </a:p>
-          <a:p>
-            <a:pPr marL="0" indent="0">
-              <a:buNone/>
-            </a:pPr>
-            <a:r>
-              <a:rPr lang="en-US" sz="950" dirty="0">
+            <a:endParaRPr lang="en-US" sz="700" dirty="0"/>
+          </a:p>
+          <a:p>
+            <a:pPr marL="0" indent="0">
+              <a:buNone/>
+            </a:pPr>
+            <a:endParaRPr lang="en-US" sz="700" dirty="0"/>
+          </a:p>
+          <a:p>
+            <a:pPr marL="0" indent="0">
+              <a:buNone/>
+            </a:pPr>
+            <a:r>
+              <a:rPr lang="en-US" sz="700" dirty="0">
                 <a:solidFill>
                   <a:srgbClr val="56D364"/>
                 </a:solidFill>
@@ -11083,14 +11083,14 @@
               </a:rPr>
               <a:t>-- Invocación desde SQL interactivo:</a:t>
             </a:r>
-            <a:endParaRPr lang="en-US" sz="950" dirty="0"/>
-          </a:p>
-          <a:p>
-            <a:pPr marL="0" indent="0">
-              <a:buNone/>
-            </a:pPr>
-            <a:r>
-              <a:rPr lang="en-US" sz="950" dirty="0">
+            <a:endParaRPr lang="en-US" sz="700" dirty="0"/>
+          </a:p>
+          <a:p>
+            <a:pPr marL="0" indent="0">
+              <a:buNone/>
+            </a:pPr>
+            <a:r>
+              <a:rPr lang="en-US" sz="700" dirty="0">
                 <a:solidFill>
                   <a:srgbClr val="56D364"/>
                 </a:solidFill>
@@ -11100,14 +11100,14 @@
               </a:rPr>
               <a:t>CALL sp_procesar_venta(1, 5, 3, @resultado);</a:t>
             </a:r>
-            <a:endParaRPr lang="en-US" sz="950" dirty="0"/>
-          </a:p>
-          <a:p>
-            <a:pPr marL="0" indent="0">
-              <a:buNone/>
-            </a:pPr>
-            <a:r>
-              <a:rPr lang="en-US" sz="950" dirty="0">
+            <a:endParaRPr lang="en-US" sz="700" dirty="0"/>
+          </a:p>
+          <a:p>
+            <a:pPr marL="0" indent="0">
+              <a:buNone/>
+            </a:pPr>
+            <a:r>
+              <a:rPr lang="en-US" sz="700" dirty="0">
                 <a:solidFill>
                   <a:srgbClr val="56D364"/>
                 </a:solidFill>
@@ -11117,20 +11117,20 @@
               </a:rPr>
               <a:t>SELECT @resultado;</a:t>
             </a:r>
-            <a:endParaRPr lang="en-US" sz="950" dirty="0"/>
-          </a:p>
-          <a:p>
-            <a:pPr marL="0" indent="0">
-              <a:buNone/>
-            </a:pPr>
-            <a:endParaRPr lang="en-US" sz="950" dirty="0"/>
-          </a:p>
-          <a:p>
-            <a:pPr marL="0" indent="0">
-              <a:buNone/>
-            </a:pPr>
-            <a:r>
-              <a:rPr lang="en-US" sz="950" dirty="0">
+            <a:endParaRPr lang="en-US" sz="700" dirty="0"/>
+          </a:p>
+          <a:p>
+            <a:pPr marL="0" indent="0">
+              <a:buNone/>
+            </a:pPr>
+            <a:endParaRPr lang="en-US" sz="700" dirty="0"/>
+          </a:p>
+          <a:p>
+            <a:pPr marL="0" indent="0">
+              <a:buNone/>
+            </a:pPr>
+            <a:r>
+              <a:rPr lang="en-US" sz="700" dirty="0">
                 <a:solidFill>
                   <a:srgbClr val="56D364"/>
                 </a:solidFill>
@@ -11140,14 +11140,14 @@
               </a:rPr>
               <a:t>-- Invocación desde PHP (SQL inmerso):</a:t>
             </a:r>
-            <a:endParaRPr lang="en-US" sz="950" dirty="0"/>
-          </a:p>
-          <a:p>
-            <a:pPr marL="0" indent="0">
-              <a:buNone/>
-            </a:pPr>
-            <a:r>
-              <a:rPr lang="en-US" sz="950" dirty="0">
+            <a:endParaRPr lang="en-US" sz="700" dirty="0"/>
+          </a:p>
+          <a:p>
+            <a:pPr marL="0" indent="0">
+              <a:buNone/>
+            </a:pPr>
+            <a:r>
+              <a:rPr lang="en-US" sz="700" dirty="0">
                 <a:solidFill>
                   <a:srgbClr val="56D364"/>
                 </a:solidFill>
@@ -11157,14 +11157,14 @@
               </a:rPr>
               <a:t>-- $stmt = $pdo-&gt;prepare("CALL sp_procesar_venta(?,?,?,@res)");</a:t>
             </a:r>
-            <a:endParaRPr lang="en-US" sz="950" dirty="0"/>
-          </a:p>
-          <a:p>
-            <a:pPr marL="0" indent="0">
-              <a:buNone/>
-            </a:pPr>
-            <a:r>
-              <a:rPr lang="en-US" sz="950" dirty="0">
+            <a:endParaRPr lang="en-US" sz="700" dirty="0"/>
+          </a:p>
+          <a:p>
+            <a:pPr marL="0" indent="0">
+              <a:buNone/>
+            </a:pPr>
+            <a:r>
+              <a:rPr lang="en-US" sz="700" dirty="0">
                 <a:solidFill>
                   <a:srgbClr val="56D364"/>
                 </a:solidFill>
@@ -11174,7 +11174,7 @@
               </a:rPr>
               <a:t>-- $stmt-&gt;execute([$clienteId, $prodId, $cant]);</a:t>
             </a:r>
-            <a:endParaRPr lang="en-US" sz="950" dirty="0"/>
+            <a:endParaRPr lang="en-US" sz="700" dirty="0"/>
           </a:p>
         </p:txBody>
       </p:sp>
@@ -12672,8 +12672,8 @@
         </p:nvSpPr>
         <p:spPr>
           <a:xfrm>
-            <a:off x="274320" y="1298448"/>
-            <a:ext cx="4206240" cy="2340864"/>
+            <a:off x="274320" y="1298446"/>
+            <a:ext cx="4096512" cy="3575304"/>
           </a:xfrm>
           <a:prstGeom prst="rect">
             <a:avLst/>
@@ -12750,24 +12750,24 @@
         </p:nvSpPr>
         <p:spPr>
           <a:xfrm>
-            <a:off x="384048" y="1572768"/>
-            <a:ext cx="3986784" cy="1975104"/>
-          </a:xfrm>
-          <a:prstGeom prst="rect">
-            <a:avLst/>
-          </a:prstGeom>
-          <a:noFill/>
-          <a:ln/>
-        </p:spPr>
-        <p:txBody>
-          <a:bodyPr wrap="square" lIns="0" tIns="0" rIns="0" bIns="0" rtlCol="0" anchor="t"/>
-          <a:lstStyle/>
-          <a:p>
-            <a:pPr marL="0" indent="0">
-              <a:buNone/>
-            </a:pPr>
-            <a:r>
-              <a:rPr lang="en-US" sz="950" dirty="0">
+            <a:off x="384048" y="1572767"/>
+            <a:ext cx="3986784" cy="3248003"/>
+          </a:xfrm>
+          <a:prstGeom prst="rect">
+            <a:avLst/>
+          </a:prstGeom>
+          <a:noFill/>
+          <a:ln/>
+        </p:spPr>
+        <p:txBody>
+          <a:bodyPr wrap="square" lIns="0" tIns="0" rIns="0" bIns="0" numCol="1" rtlCol="0" anchor="t"/>
+          <a:lstStyle/>
+          <a:p>
+            <a:pPr marL="0" indent="0">
+              <a:buNone/>
+            </a:pPr>
+            <a:r>
+              <a:rPr lang="en-US" sz="500" dirty="0">
                 <a:solidFill>
                   <a:srgbClr val="56D364"/>
                 </a:solidFill>
@@ -12777,14 +12777,14 @@
               </a:rPr>
               <a:t>-- TRIGGER polimórfico: mismo propósito,</a:t>
             </a:r>
-            <a:endParaRPr lang="en-US" sz="950" dirty="0"/>
-          </a:p>
-          <a:p>
-            <a:pPr marL="0" indent="0">
-              <a:buNone/>
-            </a:pPr>
-            <a:r>
-              <a:rPr lang="en-US" sz="950" dirty="0">
+            <a:endParaRPr lang="en-US" sz="500" dirty="0"/>
+          </a:p>
+          <a:p>
+            <a:pPr marL="0" indent="0">
+              <a:buNone/>
+            </a:pPr>
+            <a:r>
+              <a:rPr lang="en-US" sz="500" dirty="0">
                 <a:solidFill>
                   <a:srgbClr val="56D364"/>
                 </a:solidFill>
@@ -12794,14 +12794,14 @@
               </a:rPr>
               <a:t>-- comportamiento diferente por evento</a:t>
             </a:r>
-            <a:endParaRPr lang="en-US" sz="950" dirty="0"/>
-          </a:p>
-          <a:p>
-            <a:pPr marL="0" indent="0">
-              <a:buNone/>
-            </a:pPr>
-            <a:r>
-              <a:rPr lang="en-US" sz="950" dirty="0">
+            <a:endParaRPr lang="en-US" sz="500" dirty="0"/>
+          </a:p>
+          <a:p>
+            <a:pPr marL="0" indent="0">
+              <a:buNone/>
+            </a:pPr>
+            <a:r>
+              <a:rPr lang="en-US" sz="500" dirty="0">
                 <a:solidFill>
                   <a:srgbClr val="56D364"/>
                 </a:solidFill>
@@ -12811,20 +12811,20 @@
               </a:rPr>
               <a:t>DELIMITER //</a:t>
             </a:r>
-            <a:endParaRPr lang="en-US" sz="950" dirty="0"/>
-          </a:p>
-          <a:p>
-            <a:pPr marL="0" indent="0">
-              <a:buNone/>
-            </a:pPr>
-            <a:endParaRPr lang="en-US" sz="950" dirty="0"/>
-          </a:p>
-          <a:p>
-            <a:pPr marL="0" indent="0">
-              <a:buNone/>
-            </a:pPr>
-            <a:r>
-              <a:rPr lang="en-US" sz="950" dirty="0">
+            <a:endParaRPr lang="en-US" sz="500" dirty="0"/>
+          </a:p>
+          <a:p>
+            <a:pPr marL="0" indent="0">
+              <a:buNone/>
+            </a:pPr>
+            <a:endParaRPr lang="en-US" sz="500" dirty="0"/>
+          </a:p>
+          <a:p>
+            <a:pPr marL="0" indent="0">
+              <a:buNone/>
+            </a:pPr>
+            <a:r>
+              <a:rPr lang="en-US" sz="500" dirty="0">
                 <a:solidFill>
                   <a:srgbClr val="56D364"/>
                 </a:solidFill>
@@ -12834,14 +12834,14 @@
               </a:rPr>
               <a:t>-- Trigger AFTER INSERT</a:t>
             </a:r>
-            <a:endParaRPr lang="en-US" sz="950" dirty="0"/>
-          </a:p>
-          <a:p>
-            <a:pPr marL="0" indent="0">
-              <a:buNone/>
-            </a:pPr>
-            <a:r>
-              <a:rPr lang="en-US" sz="950" dirty="0">
+            <a:endParaRPr lang="en-US" sz="500" dirty="0"/>
+          </a:p>
+          <a:p>
+            <a:pPr marL="0" indent="0">
+              <a:buNone/>
+            </a:pPr>
+            <a:r>
+              <a:rPr lang="en-US" sz="500" dirty="0">
                 <a:solidFill>
                   <a:srgbClr val="56D364"/>
                 </a:solidFill>
@@ -12851,14 +12851,14 @@
               </a:rPr>
               <a:t>CREATE TRIGGER tg_after_insert_prod</a:t>
             </a:r>
-            <a:endParaRPr lang="en-US" sz="950" dirty="0"/>
-          </a:p>
-          <a:p>
-            <a:pPr marL="0" indent="0">
-              <a:buNone/>
-            </a:pPr>
-            <a:r>
-              <a:rPr lang="en-US" sz="950" dirty="0">
+            <a:endParaRPr lang="en-US" sz="500" dirty="0"/>
+          </a:p>
+          <a:p>
+            <a:pPr marL="0" indent="0">
+              <a:buNone/>
+            </a:pPr>
+            <a:r>
+              <a:rPr lang="en-US" sz="500" dirty="0">
                 <a:solidFill>
                   <a:srgbClr val="56D364"/>
                 </a:solidFill>
@@ -12868,14 +12868,14 @@
               </a:rPr>
               <a:t>AFTER INSERT ON producto FOR EACH ROW</a:t>
             </a:r>
-            <a:endParaRPr lang="en-US" sz="950" dirty="0"/>
-          </a:p>
-          <a:p>
-            <a:pPr marL="0" indent="0">
-              <a:buNone/>
-            </a:pPr>
-            <a:r>
-              <a:rPr lang="en-US" sz="950" dirty="0">
+            <a:endParaRPr lang="en-US" sz="500" dirty="0"/>
+          </a:p>
+          <a:p>
+            <a:pPr marL="0" indent="0">
+              <a:buNone/>
+            </a:pPr>
+            <a:r>
+              <a:rPr lang="en-US" sz="500" dirty="0">
                 <a:solidFill>
                   <a:srgbClr val="56D364"/>
                 </a:solidFill>
@@ -12885,14 +12885,14 @@
               </a:rPr>
               <a:t>BEGIN</a:t>
             </a:r>
-            <a:endParaRPr lang="en-US" sz="950" dirty="0"/>
-          </a:p>
-          <a:p>
-            <a:pPr marL="0" indent="0">
-              <a:buNone/>
-            </a:pPr>
-            <a:r>
-              <a:rPr lang="en-US" sz="950" dirty="0">
+            <a:endParaRPr lang="en-US" sz="500" dirty="0"/>
+          </a:p>
+          <a:p>
+            <a:pPr marL="0" indent="0">
+              <a:buNone/>
+            </a:pPr>
+            <a:r>
+              <a:rPr lang="en-US" sz="500" dirty="0">
                 <a:solidFill>
                   <a:srgbClr val="56D364"/>
                 </a:solidFill>
@@ -12902,14 +12902,14 @@
               </a:rPr>
               <a:t>    INSERT INTO audit_producto (accion,id_prod,datos,usuario,fecha)</a:t>
             </a:r>
-            <a:endParaRPr lang="en-US" sz="950" dirty="0"/>
-          </a:p>
-          <a:p>
-            <a:pPr marL="0" indent="0">
-              <a:buNone/>
-            </a:pPr>
-            <a:r>
-              <a:rPr lang="en-US" sz="950" dirty="0">
+            <a:endParaRPr lang="en-US" sz="500" dirty="0"/>
+          </a:p>
+          <a:p>
+            <a:pPr marL="0" indent="0">
+              <a:buNone/>
+            </a:pPr>
+            <a:r>
+              <a:rPr lang="en-US" sz="500" dirty="0">
                 <a:solidFill>
                   <a:srgbClr val="56D364"/>
                 </a:solidFill>
@@ -12919,14 +12919,14 @@
               </a:rPr>
               <a:t>    VALUES ('INSERT', NEW.id_producto,</a:t>
             </a:r>
-            <a:endParaRPr lang="en-US" sz="950" dirty="0"/>
-          </a:p>
-          <a:p>
-            <a:pPr marL="0" indent="0">
-              <a:buNone/>
-            </a:pPr>
-            <a:r>
-              <a:rPr lang="en-US" sz="950" dirty="0">
+            <a:endParaRPr lang="en-US" sz="500" dirty="0"/>
+          </a:p>
+          <a:p>
+            <a:pPr marL="0" indent="0">
+              <a:buNone/>
+            </a:pPr>
+            <a:r>
+              <a:rPr lang="en-US" sz="500" dirty="0">
                 <a:solidFill>
                   <a:srgbClr val="56D364"/>
                 </a:solidFill>
@@ -12936,14 +12936,14 @@
               </a:rPr>
               <a:t>      JSON_OBJECT('nombre',NEW.nombre,'precio',NEW.precio),</a:t>
             </a:r>
-            <a:endParaRPr lang="en-US" sz="950" dirty="0"/>
-          </a:p>
-          <a:p>
-            <a:pPr marL="0" indent="0">
-              <a:buNone/>
-            </a:pPr>
-            <a:r>
-              <a:rPr lang="en-US" sz="950" dirty="0">
+            <a:endParaRPr lang="en-US" sz="500" dirty="0"/>
+          </a:p>
+          <a:p>
+            <a:pPr marL="0" indent="0">
+              <a:buNone/>
+            </a:pPr>
+            <a:r>
+              <a:rPr lang="en-US" sz="500" dirty="0">
                 <a:solidFill>
                   <a:srgbClr val="56D364"/>
                 </a:solidFill>
@@ -12953,14 +12953,14 @@
               </a:rPr>
               <a:t>      USER(), NOW());</a:t>
             </a:r>
-            <a:endParaRPr lang="en-US" sz="950" dirty="0"/>
-          </a:p>
-          <a:p>
-            <a:pPr marL="0" indent="0">
-              <a:buNone/>
-            </a:pPr>
-            <a:r>
-              <a:rPr lang="en-US" sz="950" dirty="0">
+            <a:endParaRPr lang="en-US" sz="500" dirty="0"/>
+          </a:p>
+          <a:p>
+            <a:pPr marL="0" indent="0">
+              <a:buNone/>
+            </a:pPr>
+            <a:r>
+              <a:rPr lang="en-US" sz="500" dirty="0">
                 <a:solidFill>
                   <a:srgbClr val="56D364"/>
                 </a:solidFill>
@@ -12970,20 +12970,20 @@
               </a:rPr>
               <a:t>END //</a:t>
             </a:r>
-            <a:endParaRPr lang="en-US" sz="950" dirty="0"/>
-          </a:p>
-          <a:p>
-            <a:pPr marL="0" indent="0">
-              <a:buNone/>
-            </a:pPr>
-            <a:endParaRPr lang="en-US" sz="950" dirty="0"/>
-          </a:p>
-          <a:p>
-            <a:pPr marL="0" indent="0">
-              <a:buNone/>
-            </a:pPr>
-            <a:r>
-              <a:rPr lang="en-US" sz="950" dirty="0">
+            <a:endParaRPr lang="en-US" sz="500" dirty="0"/>
+          </a:p>
+          <a:p>
+            <a:pPr marL="0" indent="0">
+              <a:buNone/>
+            </a:pPr>
+            <a:endParaRPr lang="en-US" sz="500" dirty="0"/>
+          </a:p>
+          <a:p>
+            <a:pPr marL="0" indent="0">
+              <a:buNone/>
+            </a:pPr>
+            <a:r>
+              <a:rPr lang="en-US" sz="500" dirty="0">
                 <a:solidFill>
                   <a:srgbClr val="56D364"/>
                 </a:solidFill>
@@ -12993,14 +12993,14 @@
               </a:rPr>
               <a:t>-- Trigger AFTER UPDATE (mismo objetivo, distinto comportamiento)</a:t>
             </a:r>
-            <a:endParaRPr lang="en-US" sz="950" dirty="0"/>
-          </a:p>
-          <a:p>
-            <a:pPr marL="0" indent="0">
-              <a:buNone/>
-            </a:pPr>
-            <a:r>
-              <a:rPr lang="en-US" sz="950" dirty="0">
+            <a:endParaRPr lang="en-US" sz="500" dirty="0"/>
+          </a:p>
+          <a:p>
+            <a:pPr marL="0" indent="0">
+              <a:buNone/>
+            </a:pPr>
+            <a:r>
+              <a:rPr lang="en-US" sz="500" dirty="0">
                 <a:solidFill>
                   <a:srgbClr val="56D364"/>
                 </a:solidFill>
@@ -13010,14 +13010,14 @@
               </a:rPr>
               <a:t>CREATE TRIGGER tg_after_update_prod</a:t>
             </a:r>
-            <a:endParaRPr lang="en-US" sz="950" dirty="0"/>
-          </a:p>
-          <a:p>
-            <a:pPr marL="0" indent="0">
-              <a:buNone/>
-            </a:pPr>
-            <a:r>
-              <a:rPr lang="en-US" sz="950" dirty="0">
+            <a:endParaRPr lang="en-US" sz="500" dirty="0"/>
+          </a:p>
+          <a:p>
+            <a:pPr marL="0" indent="0">
+              <a:buNone/>
+            </a:pPr>
+            <a:r>
+              <a:rPr lang="en-US" sz="500" dirty="0">
                 <a:solidFill>
                   <a:srgbClr val="56D364"/>
                 </a:solidFill>
@@ -13027,14 +13027,14 @@
               </a:rPr>
               <a:t>AFTER UPDATE ON producto FOR EACH ROW</a:t>
             </a:r>
-            <a:endParaRPr lang="en-US" sz="950" dirty="0"/>
-          </a:p>
-          <a:p>
-            <a:pPr marL="0" indent="0">
-              <a:buNone/>
-            </a:pPr>
-            <a:r>
-              <a:rPr lang="en-US" sz="950" dirty="0">
+            <a:endParaRPr lang="en-US" sz="500" dirty="0"/>
+          </a:p>
+          <a:p>
+            <a:pPr marL="0" indent="0">
+              <a:buNone/>
+            </a:pPr>
+            <a:r>
+              <a:rPr lang="en-US" sz="500" dirty="0">
                 <a:solidFill>
                   <a:srgbClr val="56D364"/>
                 </a:solidFill>
@@ -13044,14 +13044,14 @@
               </a:rPr>
               <a:t>BEGIN</a:t>
             </a:r>
-            <a:endParaRPr lang="en-US" sz="950" dirty="0"/>
-          </a:p>
-          <a:p>
-            <a:pPr marL="0" indent="0">
-              <a:buNone/>
-            </a:pPr>
-            <a:r>
-              <a:rPr lang="en-US" sz="950" dirty="0">
+            <a:endParaRPr lang="en-US" sz="500" dirty="0"/>
+          </a:p>
+          <a:p>
+            <a:pPr marL="0" indent="0">
+              <a:buNone/>
+            </a:pPr>
+            <a:r>
+              <a:rPr lang="en-US" sz="500" dirty="0">
                 <a:solidFill>
                   <a:srgbClr val="56D364"/>
                 </a:solidFill>
@@ -13061,14 +13061,14 @@
               </a:rPr>
               <a:t>    INSERT INTO audit_producto (accion,id_prod,datos,usuario,fecha)</a:t>
             </a:r>
-            <a:endParaRPr lang="en-US" sz="950" dirty="0"/>
-          </a:p>
-          <a:p>
-            <a:pPr marL="0" indent="0">
-              <a:buNone/>
-            </a:pPr>
-            <a:r>
-              <a:rPr lang="en-US" sz="950" dirty="0">
+            <a:endParaRPr lang="en-US" sz="500" dirty="0"/>
+          </a:p>
+          <a:p>
+            <a:pPr marL="0" indent="0">
+              <a:buNone/>
+            </a:pPr>
+            <a:r>
+              <a:rPr lang="en-US" sz="500" dirty="0">
                 <a:solidFill>
                   <a:srgbClr val="56D364"/>
                 </a:solidFill>
@@ -13078,14 +13078,14 @@
               </a:rPr>
               <a:t>    VALUES ('UPDATE', NEW.id_producto,</a:t>
             </a:r>
-            <a:endParaRPr lang="en-US" sz="950" dirty="0"/>
-          </a:p>
-          <a:p>
-            <a:pPr marL="0" indent="0">
-              <a:buNone/>
-            </a:pPr>
-            <a:r>
-              <a:rPr lang="en-US" sz="950" dirty="0">
+            <a:endParaRPr lang="en-US" sz="500" dirty="0"/>
+          </a:p>
+          <a:p>
+            <a:pPr marL="0" indent="0">
+              <a:buNone/>
+            </a:pPr>
+            <a:r>
+              <a:rPr lang="en-US" sz="500" dirty="0">
                 <a:solidFill>
                   <a:srgbClr val="56D364"/>
                 </a:solidFill>
@@ -13095,14 +13095,14 @@
               </a:rPr>
               <a:t>      JSON_OBJECT(</a:t>
             </a:r>
-            <a:endParaRPr lang="en-US" sz="950" dirty="0"/>
-          </a:p>
-          <a:p>
-            <a:pPr marL="0" indent="0">
-              <a:buNone/>
-            </a:pPr>
-            <a:r>
-              <a:rPr lang="en-US" sz="950" dirty="0">
+            <a:endParaRPr lang="en-US" sz="500" dirty="0"/>
+          </a:p>
+          <a:p>
+            <a:pPr marL="0" indent="0">
+              <a:buNone/>
+            </a:pPr>
+            <a:r>
+              <a:rPr lang="en-US" sz="500" dirty="0">
                 <a:solidFill>
                   <a:srgbClr val="56D364"/>
                 </a:solidFill>
@@ -13112,14 +13112,14 @@
               </a:rPr>
               <a:t>        'precio_antes',OLD.precio,</a:t>
             </a:r>
-            <a:endParaRPr lang="en-US" sz="950" dirty="0"/>
-          </a:p>
-          <a:p>
-            <a:pPr marL="0" indent="0">
-              <a:buNone/>
-            </a:pPr>
-            <a:r>
-              <a:rPr lang="en-US" sz="950" dirty="0">
+            <a:endParaRPr lang="en-US" sz="500" dirty="0"/>
+          </a:p>
+          <a:p>
+            <a:pPr marL="0" indent="0">
+              <a:buNone/>
+            </a:pPr>
+            <a:r>
+              <a:rPr lang="en-US" sz="500" dirty="0">
                 <a:solidFill>
                   <a:srgbClr val="56D364"/>
                 </a:solidFill>
@@ -13129,14 +13129,14 @@
               </a:rPr>
               <a:t>        'precio_ahora',NEW.precio,</a:t>
             </a:r>
-            <a:endParaRPr lang="en-US" sz="950" dirty="0"/>
-          </a:p>
-          <a:p>
-            <a:pPr marL="0" indent="0">
-              <a:buNone/>
-            </a:pPr>
-            <a:r>
-              <a:rPr lang="en-US" sz="950" dirty="0">
+            <a:endParaRPr lang="en-US" sz="500" dirty="0"/>
+          </a:p>
+          <a:p>
+            <a:pPr marL="0" indent="0">
+              <a:buNone/>
+            </a:pPr>
+            <a:r>
+              <a:rPr lang="en-US" sz="500" dirty="0">
                 <a:solidFill>
                   <a:srgbClr val="56D364"/>
                 </a:solidFill>
@@ -13146,14 +13146,14 @@
               </a:rPr>
               <a:t>        'nombre_antes',OLD.nombre</a:t>
             </a:r>
-            <a:endParaRPr lang="en-US" sz="950" dirty="0"/>
-          </a:p>
-          <a:p>
-            <a:pPr marL="0" indent="0">
-              <a:buNone/>
-            </a:pPr>
-            <a:r>
-              <a:rPr lang="en-US" sz="950" dirty="0">
+            <a:endParaRPr lang="en-US" sz="500" dirty="0"/>
+          </a:p>
+          <a:p>
+            <a:pPr marL="0" indent="0">
+              <a:buNone/>
+            </a:pPr>
+            <a:r>
+              <a:rPr lang="en-US" sz="500" dirty="0">
                 <a:solidFill>
                   <a:srgbClr val="56D364"/>
                 </a:solidFill>
@@ -13163,14 +13163,14 @@
               </a:rPr>
               <a:t>      ), USER(), NOW());</a:t>
             </a:r>
-            <a:endParaRPr lang="en-US" sz="950" dirty="0"/>
-          </a:p>
-          <a:p>
-            <a:pPr marL="0" indent="0">
-              <a:buNone/>
-            </a:pPr>
-            <a:r>
-              <a:rPr lang="en-US" sz="950" dirty="0">
+            <a:endParaRPr lang="en-US" sz="500" dirty="0"/>
+          </a:p>
+          <a:p>
+            <a:pPr marL="0" indent="0">
+              <a:buNone/>
+            </a:pPr>
+            <a:r>
+              <a:rPr lang="en-US" sz="500" dirty="0">
                 <a:solidFill>
                   <a:srgbClr val="56D364"/>
                 </a:solidFill>
@@ -13180,20 +13180,20 @@
               </a:rPr>
               <a:t>END //</a:t>
             </a:r>
-            <a:endParaRPr lang="en-US" sz="950" dirty="0"/>
-          </a:p>
-          <a:p>
-            <a:pPr marL="0" indent="0">
-              <a:buNone/>
-            </a:pPr>
-            <a:endParaRPr lang="en-US" sz="950" dirty="0"/>
-          </a:p>
-          <a:p>
-            <a:pPr marL="0" indent="0">
-              <a:buNone/>
-            </a:pPr>
-            <a:r>
-              <a:rPr lang="en-US" sz="950" dirty="0">
+            <a:endParaRPr lang="en-US" sz="500" dirty="0"/>
+          </a:p>
+          <a:p>
+            <a:pPr marL="0" indent="0">
+              <a:buNone/>
+            </a:pPr>
+            <a:endParaRPr lang="en-US" sz="500" dirty="0"/>
+          </a:p>
+          <a:p>
+            <a:pPr marL="0" indent="0">
+              <a:buNone/>
+            </a:pPr>
+            <a:r>
+              <a:rPr lang="en-US" sz="500" dirty="0">
                 <a:solidFill>
                   <a:srgbClr val="56D364"/>
                 </a:solidFill>
@@ -13203,14 +13203,14 @@
               </a:rPr>
               <a:t>-- Trigger BEFORE DELETE</a:t>
             </a:r>
-            <a:endParaRPr lang="en-US" sz="950" dirty="0"/>
-          </a:p>
-          <a:p>
-            <a:pPr marL="0" indent="0">
-              <a:buNone/>
-            </a:pPr>
-            <a:r>
-              <a:rPr lang="en-US" sz="950" dirty="0">
+            <a:endParaRPr lang="en-US" sz="500" dirty="0"/>
+          </a:p>
+          <a:p>
+            <a:pPr marL="0" indent="0">
+              <a:buNone/>
+            </a:pPr>
+            <a:r>
+              <a:rPr lang="en-US" sz="500" dirty="0">
                 <a:solidFill>
                   <a:srgbClr val="56D364"/>
                 </a:solidFill>
@@ -13220,14 +13220,14 @@
               </a:rPr>
               <a:t>CREATE TRIGGER tg_before_delete_prod</a:t>
             </a:r>
-            <a:endParaRPr lang="en-US" sz="950" dirty="0"/>
-          </a:p>
-          <a:p>
-            <a:pPr marL="0" indent="0">
-              <a:buNone/>
-            </a:pPr>
-            <a:r>
-              <a:rPr lang="en-US" sz="950" dirty="0">
+            <a:endParaRPr lang="en-US" sz="500" dirty="0"/>
+          </a:p>
+          <a:p>
+            <a:pPr marL="0" indent="0">
+              <a:buNone/>
+            </a:pPr>
+            <a:r>
+              <a:rPr lang="en-US" sz="500" dirty="0">
                 <a:solidFill>
                   <a:srgbClr val="56D364"/>
                 </a:solidFill>
@@ -13237,14 +13237,14 @@
               </a:rPr>
               <a:t>BEFORE DELETE ON producto FOR EACH ROW</a:t>
             </a:r>
-            <a:endParaRPr lang="en-US" sz="950" dirty="0"/>
-          </a:p>
-          <a:p>
-            <a:pPr marL="0" indent="0">
-              <a:buNone/>
-            </a:pPr>
-            <a:r>
-              <a:rPr lang="en-US" sz="950" dirty="0">
+            <a:endParaRPr lang="en-US" sz="500" dirty="0"/>
+          </a:p>
+          <a:p>
+            <a:pPr marL="0" indent="0">
+              <a:buNone/>
+            </a:pPr>
+            <a:r>
+              <a:rPr lang="en-US" sz="500" dirty="0">
                 <a:solidFill>
                   <a:srgbClr val="56D364"/>
                 </a:solidFill>
@@ -13254,14 +13254,14 @@
               </a:rPr>
               <a:t>BEGIN</a:t>
             </a:r>
-            <a:endParaRPr lang="en-US" sz="950" dirty="0"/>
-          </a:p>
-          <a:p>
-            <a:pPr marL="0" indent="0">
-              <a:buNone/>
-            </a:pPr>
-            <a:r>
-              <a:rPr lang="en-US" sz="950" dirty="0">
+            <a:endParaRPr lang="en-US" sz="500" dirty="0"/>
+          </a:p>
+          <a:p>
+            <a:pPr marL="0" indent="0">
+              <a:buNone/>
+            </a:pPr>
+            <a:r>
+              <a:rPr lang="en-US" sz="500" dirty="0">
                 <a:solidFill>
                   <a:srgbClr val="56D364"/>
                 </a:solidFill>
@@ -13271,14 +13271,14 @@
               </a:rPr>
               <a:t>    IF OLD.activo = 1 THEN</a:t>
             </a:r>
-            <a:endParaRPr lang="en-US" sz="950" dirty="0"/>
-          </a:p>
-          <a:p>
-            <a:pPr marL="0" indent="0">
-              <a:buNone/>
-            </a:pPr>
-            <a:r>
-              <a:rPr lang="en-US" sz="950" dirty="0">
+            <a:endParaRPr lang="en-US" sz="500" dirty="0"/>
+          </a:p>
+          <a:p>
+            <a:pPr marL="0" indent="0">
+              <a:buNone/>
+            </a:pPr>
+            <a:r>
+              <a:rPr lang="en-US" sz="500" dirty="0">
                 <a:solidFill>
                   <a:srgbClr val="56D364"/>
                 </a:solidFill>
@@ -13288,14 +13288,14 @@
               </a:rPr>
               <a:t>      SIGNAL SQLSTATE '45000'</a:t>
             </a:r>
-            <a:endParaRPr lang="en-US" sz="950" dirty="0"/>
-          </a:p>
-          <a:p>
-            <a:pPr marL="0" indent="0">
-              <a:buNone/>
-            </a:pPr>
-            <a:r>
-              <a:rPr lang="en-US" sz="950" dirty="0">
+            <a:endParaRPr lang="en-US" sz="500" dirty="0"/>
+          </a:p>
+          <a:p>
+            <a:pPr marL="0" indent="0">
+              <a:buNone/>
+            </a:pPr>
+            <a:r>
+              <a:rPr lang="en-US" sz="500" dirty="0">
                 <a:solidFill>
                   <a:srgbClr val="56D364"/>
                 </a:solidFill>
@@ -13305,14 +13305,14 @@
               </a:rPr>
               <a:t>      SET MESSAGE_TEXT='No eliminar prod. activo';</a:t>
             </a:r>
-            <a:endParaRPr lang="en-US" sz="950" dirty="0"/>
-          </a:p>
-          <a:p>
-            <a:pPr marL="0" indent="0">
-              <a:buNone/>
-            </a:pPr>
-            <a:r>
-              <a:rPr lang="en-US" sz="950" dirty="0">
+            <a:endParaRPr lang="en-US" sz="500" dirty="0"/>
+          </a:p>
+          <a:p>
+            <a:pPr marL="0" indent="0">
+              <a:buNone/>
+            </a:pPr>
+            <a:r>
+              <a:rPr lang="en-US" sz="500" dirty="0">
                 <a:solidFill>
                   <a:srgbClr val="56D364"/>
                 </a:solidFill>
@@ -13322,14 +13322,14 @@
               </a:rPr>
               <a:t>    END IF;</a:t>
             </a:r>
-            <a:endParaRPr lang="en-US" sz="950" dirty="0"/>
-          </a:p>
-          <a:p>
-            <a:pPr marL="0" indent="0">
-              <a:buNone/>
-            </a:pPr>
-            <a:r>
-              <a:rPr lang="en-US" sz="950" dirty="0">
+            <a:endParaRPr lang="en-US" sz="500" dirty="0"/>
+          </a:p>
+          <a:p>
+            <a:pPr marL="0" indent="0">
+              <a:buNone/>
+            </a:pPr>
+            <a:r>
+              <a:rPr lang="en-US" sz="500" dirty="0">
                 <a:solidFill>
                   <a:srgbClr val="56D364"/>
                 </a:solidFill>
@@ -13339,14 +13339,14 @@
               </a:rPr>
               <a:t>END //</a:t>
             </a:r>
-            <a:endParaRPr lang="en-US" sz="950" dirty="0"/>
-          </a:p>
-          <a:p>
-            <a:pPr marL="0" indent="0">
-              <a:buNone/>
-            </a:pPr>
-            <a:r>
-              <a:rPr lang="en-US" sz="950" dirty="0">
+            <a:endParaRPr lang="en-US" sz="500" dirty="0"/>
+          </a:p>
+          <a:p>
+            <a:pPr marL="0" indent="0">
+              <a:buNone/>
+            </a:pPr>
+            <a:r>
+              <a:rPr lang="en-US" sz="500" dirty="0">
                 <a:solidFill>
                   <a:srgbClr val="56D364"/>
                 </a:solidFill>
@@ -13356,7 +13356,7 @@
               </a:rPr>
               <a:t>DELIMITER ;</a:t>
             </a:r>
-            <a:endParaRPr lang="en-US" sz="950" dirty="0"/>
+            <a:endParaRPr lang="en-US" sz="500" dirty="0"/>
           </a:p>
         </p:txBody>
       </p:sp>
@@ -13368,8 +13368,8 @@
         </p:nvSpPr>
         <p:spPr>
           <a:xfrm>
-            <a:off x="4663440" y="1298448"/>
-            <a:ext cx="4206240" cy="2340864"/>
+            <a:off x="4663440" y="1298447"/>
+            <a:ext cx="4206240" cy="3575303"/>
           </a:xfrm>
           <a:prstGeom prst="rect">
             <a:avLst/>
@@ -13447,7 +13447,7 @@
         <p:spPr>
           <a:xfrm>
             <a:off x="4773168" y="1572768"/>
-            <a:ext cx="3986784" cy="1975104"/>
+            <a:ext cx="4005072" cy="3300984"/>
           </a:xfrm>
           <a:prstGeom prst="rect">
             <a:avLst/>
@@ -13463,7 +13463,7 @@
               <a:buNone/>
             </a:pPr>
             <a:r>
-              <a:rPr lang="en-US" sz="950" dirty="0">
+              <a:rPr lang="en-US" sz="600" dirty="0">
                 <a:solidFill>
                   <a:srgbClr val="56D364"/>
                 </a:solidFill>
@@ -13473,14 +13473,14 @@
               </a:rPr>
               <a:t>-- FUNCIONES con comportamiento "polimórfico"</a:t>
             </a:r>
-            <a:endParaRPr lang="en-US" sz="950" dirty="0"/>
-          </a:p>
-          <a:p>
-            <a:pPr marL="0" indent="0">
-              <a:buNone/>
-            </a:pPr>
-            <a:r>
-              <a:rPr lang="en-US" sz="950" dirty="0">
+            <a:endParaRPr lang="en-US" sz="600" dirty="0"/>
+          </a:p>
+          <a:p>
+            <a:pPr marL="0" indent="0">
+              <a:buNone/>
+            </a:pPr>
+            <a:r>
+              <a:rPr lang="en-US" sz="600" dirty="0">
                 <a:solidFill>
                   <a:srgbClr val="56D364"/>
                 </a:solidFill>
@@ -13490,14 +13490,14 @@
               </a:rPr>
               <a:t>-- misma firma, diferentes tipos de entrada</a:t>
             </a:r>
-            <a:endParaRPr lang="en-US" sz="950" dirty="0"/>
-          </a:p>
-          <a:p>
-            <a:pPr marL="0" indent="0">
-              <a:buNone/>
-            </a:pPr>
-            <a:r>
-              <a:rPr lang="en-US" sz="950" dirty="0">
+            <a:endParaRPr lang="en-US" sz="600" dirty="0"/>
+          </a:p>
+          <a:p>
+            <a:pPr marL="0" indent="0">
+              <a:buNone/>
+            </a:pPr>
+            <a:r>
+              <a:rPr lang="en-US" sz="600" dirty="0">
                 <a:solidFill>
                   <a:srgbClr val="56D364"/>
                 </a:solidFill>
@@ -13507,20 +13507,20 @@
               </a:rPr>
               <a:t>DELIMITER //</a:t>
             </a:r>
-            <a:endParaRPr lang="en-US" sz="950" dirty="0"/>
-          </a:p>
-          <a:p>
-            <a:pPr marL="0" indent="0">
-              <a:buNone/>
-            </a:pPr>
-            <a:endParaRPr lang="en-US" sz="950" dirty="0"/>
-          </a:p>
-          <a:p>
-            <a:pPr marL="0" indent="0">
-              <a:buNone/>
-            </a:pPr>
-            <a:r>
-              <a:rPr lang="en-US" sz="950" dirty="0">
+            <a:endParaRPr lang="en-US" sz="600" dirty="0"/>
+          </a:p>
+          <a:p>
+            <a:pPr marL="0" indent="0">
+              <a:buNone/>
+            </a:pPr>
+            <a:endParaRPr lang="en-US" sz="600" dirty="0"/>
+          </a:p>
+          <a:p>
+            <a:pPr marL="0" indent="0">
+              <a:buNone/>
+            </a:pPr>
+            <a:r>
+              <a:rPr lang="en-US" sz="600" dirty="0">
                 <a:solidFill>
                   <a:srgbClr val="56D364"/>
                 </a:solidFill>
@@ -13530,14 +13530,14 @@
               </a:rPr>
               <a:t>-- Función para calcular descuento por tipo</a:t>
             </a:r>
-            <a:endParaRPr lang="en-US" sz="950" dirty="0"/>
-          </a:p>
-          <a:p>
-            <a:pPr marL="0" indent="0">
-              <a:buNone/>
-            </a:pPr>
-            <a:r>
-              <a:rPr lang="en-US" sz="950" dirty="0">
+            <a:endParaRPr lang="en-US" sz="600" dirty="0"/>
+          </a:p>
+          <a:p>
+            <a:pPr marL="0" indent="0">
+              <a:buNone/>
+            </a:pPr>
+            <a:r>
+              <a:rPr lang="en-US" sz="600" dirty="0">
                 <a:solidFill>
                   <a:srgbClr val="56D364"/>
                 </a:solidFill>
@@ -13547,14 +13547,14 @@
               </a:rPr>
               <a:t>CREATE FUNCTION fn_calcular_descuento(</a:t>
             </a:r>
-            <a:endParaRPr lang="en-US" sz="950" dirty="0"/>
-          </a:p>
-          <a:p>
-            <a:pPr marL="0" indent="0">
-              <a:buNone/>
-            </a:pPr>
-            <a:r>
-              <a:rPr lang="en-US" sz="950" dirty="0">
+            <a:endParaRPr lang="en-US" sz="600" dirty="0"/>
+          </a:p>
+          <a:p>
+            <a:pPr marL="0" indent="0">
+              <a:buNone/>
+            </a:pPr>
+            <a:r>
+              <a:rPr lang="en-US" sz="600" dirty="0">
                 <a:solidFill>
                   <a:srgbClr val="56D364"/>
                 </a:solidFill>
@@ -13564,14 +13564,14 @@
               </a:rPr>
               <a:t>    precio      DECIMAL(12,2),</a:t>
             </a:r>
-            <a:endParaRPr lang="en-US" sz="950" dirty="0"/>
-          </a:p>
-          <a:p>
-            <a:pPr marL="0" indent="0">
-              <a:buNone/>
-            </a:pPr>
-            <a:r>
-              <a:rPr lang="en-US" sz="950" dirty="0">
+            <a:endParaRPr lang="en-US" sz="600" dirty="0"/>
+          </a:p>
+          <a:p>
+            <a:pPr marL="0" indent="0">
+              <a:buNone/>
+            </a:pPr>
+            <a:r>
+              <a:rPr lang="en-US" sz="600" dirty="0">
                 <a:solidFill>
                   <a:srgbClr val="56D364"/>
                 </a:solidFill>
@@ -13581,14 +13581,14 @@
               </a:rPr>
               <a:t>    tipo_cliente ENUM('regular','premium','vip')</a:t>
             </a:r>
-            <a:endParaRPr lang="en-US" sz="950" dirty="0"/>
-          </a:p>
-          <a:p>
-            <a:pPr marL="0" indent="0">
-              <a:buNone/>
-            </a:pPr>
-            <a:r>
-              <a:rPr lang="en-US" sz="950" dirty="0">
+            <a:endParaRPr lang="en-US" sz="600" dirty="0"/>
+          </a:p>
+          <a:p>
+            <a:pPr marL="0" indent="0">
+              <a:buNone/>
+            </a:pPr>
+            <a:r>
+              <a:rPr lang="en-US" sz="600" dirty="0">
                 <a:solidFill>
                   <a:srgbClr val="56D364"/>
                 </a:solidFill>
@@ -13598,14 +13598,14 @@
               </a:rPr>
               <a:t>) RETURNS DECIMAL(12,2) DETERMINISTIC</a:t>
             </a:r>
-            <a:endParaRPr lang="en-US" sz="950" dirty="0"/>
-          </a:p>
-          <a:p>
-            <a:pPr marL="0" indent="0">
-              <a:buNone/>
-            </a:pPr>
-            <a:r>
-              <a:rPr lang="en-US" sz="950" dirty="0">
+            <a:endParaRPr lang="en-US" sz="600" dirty="0"/>
+          </a:p>
+          <a:p>
+            <a:pPr marL="0" indent="0">
+              <a:buNone/>
+            </a:pPr>
+            <a:r>
+              <a:rPr lang="en-US" sz="600" dirty="0">
                 <a:solidFill>
                   <a:srgbClr val="56D364"/>
                 </a:solidFill>
@@ -13615,14 +13615,14 @@
               </a:rPr>
               <a:t>BEGIN</a:t>
             </a:r>
-            <a:endParaRPr lang="en-US" sz="950" dirty="0"/>
-          </a:p>
-          <a:p>
-            <a:pPr marL="0" indent="0">
-              <a:buNone/>
-            </a:pPr>
-            <a:r>
-              <a:rPr lang="en-US" sz="950" dirty="0">
+            <a:endParaRPr lang="en-US" sz="600" dirty="0"/>
+          </a:p>
+          <a:p>
+            <a:pPr marL="0" indent="0">
+              <a:buNone/>
+            </a:pPr>
+            <a:r>
+              <a:rPr lang="en-US" sz="600" dirty="0">
                 <a:solidFill>
                   <a:srgbClr val="56D364"/>
                 </a:solidFill>
@@ -13632,14 +13632,14 @@
               </a:rPr>
               <a:t>    DECLARE v_pct DECIMAL(5,2);</a:t>
             </a:r>
-            <a:endParaRPr lang="en-US" sz="950" dirty="0"/>
-          </a:p>
-          <a:p>
-            <a:pPr marL="0" indent="0">
-              <a:buNone/>
-            </a:pPr>
-            <a:r>
-              <a:rPr lang="en-US" sz="950" dirty="0">
+            <a:endParaRPr lang="en-US" sz="600" dirty="0"/>
+          </a:p>
+          <a:p>
+            <a:pPr marL="0" indent="0">
+              <a:buNone/>
+            </a:pPr>
+            <a:r>
+              <a:rPr lang="en-US" sz="600" dirty="0">
                 <a:solidFill>
                   <a:srgbClr val="56D364"/>
                 </a:solidFill>
@@ -13649,14 +13649,14 @@
               </a:rPr>
               <a:t>    -- Polimorfismo: comportamiento según tipo</a:t>
             </a:r>
-            <a:endParaRPr lang="en-US" sz="950" dirty="0"/>
-          </a:p>
-          <a:p>
-            <a:pPr marL="0" indent="0">
-              <a:buNone/>
-            </a:pPr>
-            <a:r>
-              <a:rPr lang="en-US" sz="950" dirty="0">
+            <a:endParaRPr lang="en-US" sz="600" dirty="0"/>
+          </a:p>
+          <a:p>
+            <a:pPr marL="0" indent="0">
+              <a:buNone/>
+            </a:pPr>
+            <a:r>
+              <a:rPr lang="en-US" sz="600" dirty="0">
                 <a:solidFill>
                   <a:srgbClr val="56D364"/>
                 </a:solidFill>
@@ -13666,14 +13666,14 @@
               </a:rPr>
               <a:t>    SET v_pct = CASE tipo_cliente</a:t>
             </a:r>
-            <a:endParaRPr lang="en-US" sz="950" dirty="0"/>
-          </a:p>
-          <a:p>
-            <a:pPr marL="0" indent="0">
-              <a:buNone/>
-            </a:pPr>
-            <a:r>
-              <a:rPr lang="en-US" sz="950" dirty="0">
+            <a:endParaRPr lang="en-US" sz="600" dirty="0"/>
+          </a:p>
+          <a:p>
+            <a:pPr marL="0" indent="0">
+              <a:buNone/>
+            </a:pPr>
+            <a:r>
+              <a:rPr lang="en-US" sz="600" dirty="0">
                 <a:solidFill>
                   <a:srgbClr val="56D364"/>
                 </a:solidFill>
@@ -13683,14 +13683,14 @@
               </a:rPr>
               <a:t>        WHEN 'regular' THEN 0.00</a:t>
             </a:r>
-            <a:endParaRPr lang="en-US" sz="950" dirty="0"/>
-          </a:p>
-          <a:p>
-            <a:pPr marL="0" indent="0">
-              <a:buNone/>
-            </a:pPr>
-            <a:r>
-              <a:rPr lang="en-US" sz="950" dirty="0">
+            <a:endParaRPr lang="en-US" sz="600" dirty="0"/>
+          </a:p>
+          <a:p>
+            <a:pPr marL="0" indent="0">
+              <a:buNone/>
+            </a:pPr>
+            <a:r>
+              <a:rPr lang="en-US" sz="600" dirty="0">
                 <a:solidFill>
                   <a:srgbClr val="56D364"/>
                 </a:solidFill>
@@ -13700,14 +13700,14 @@
               </a:rPr>
               <a:t>        WHEN 'premium' THEN 5.00</a:t>
             </a:r>
-            <a:endParaRPr lang="en-US" sz="950" dirty="0"/>
-          </a:p>
-          <a:p>
-            <a:pPr marL="0" indent="0">
-              <a:buNone/>
-            </a:pPr>
-            <a:r>
-              <a:rPr lang="en-US" sz="950" dirty="0">
+            <a:endParaRPr lang="en-US" sz="600" dirty="0"/>
+          </a:p>
+          <a:p>
+            <a:pPr marL="0" indent="0">
+              <a:buNone/>
+            </a:pPr>
+            <a:r>
+              <a:rPr lang="en-US" sz="600" dirty="0">
                 <a:solidFill>
                   <a:srgbClr val="56D364"/>
                 </a:solidFill>
@@ -13717,14 +13717,14 @@
               </a:rPr>
               <a:t>        WHEN 'vip'     THEN 15.00</a:t>
             </a:r>
-            <a:endParaRPr lang="en-US" sz="950" dirty="0"/>
-          </a:p>
-          <a:p>
-            <a:pPr marL="0" indent="0">
-              <a:buNone/>
-            </a:pPr>
-            <a:r>
-              <a:rPr lang="en-US" sz="950" dirty="0">
+            <a:endParaRPr lang="en-US" sz="600" dirty="0"/>
+          </a:p>
+          <a:p>
+            <a:pPr marL="0" indent="0">
+              <a:buNone/>
+            </a:pPr>
+            <a:r>
+              <a:rPr lang="en-US" sz="600" dirty="0">
                 <a:solidFill>
                   <a:srgbClr val="56D364"/>
                 </a:solidFill>
@@ -13734,14 +13734,14 @@
               </a:rPr>
               <a:t>        ELSE 0.00</a:t>
             </a:r>
-            <a:endParaRPr lang="en-US" sz="950" dirty="0"/>
-          </a:p>
-          <a:p>
-            <a:pPr marL="0" indent="0">
-              <a:buNone/>
-            </a:pPr>
-            <a:r>
-              <a:rPr lang="en-US" sz="950" dirty="0">
+            <a:endParaRPr lang="en-US" sz="600" dirty="0"/>
+          </a:p>
+          <a:p>
+            <a:pPr marL="0" indent="0">
+              <a:buNone/>
+            </a:pPr>
+            <a:r>
+              <a:rPr lang="en-US" sz="600" dirty="0">
                 <a:solidFill>
                   <a:srgbClr val="56D364"/>
                 </a:solidFill>
@@ -13751,14 +13751,14 @@
               </a:rPr>
               <a:t>    END;</a:t>
             </a:r>
-            <a:endParaRPr lang="en-US" sz="950" dirty="0"/>
-          </a:p>
-          <a:p>
-            <a:pPr marL="0" indent="0">
-              <a:buNone/>
-            </a:pPr>
-            <a:r>
-              <a:rPr lang="en-US" sz="950" dirty="0">
+            <a:endParaRPr lang="en-US" sz="600" dirty="0"/>
+          </a:p>
+          <a:p>
+            <a:pPr marL="0" indent="0">
+              <a:buNone/>
+            </a:pPr>
+            <a:r>
+              <a:rPr lang="en-US" sz="600" dirty="0">
                 <a:solidFill>
                   <a:srgbClr val="56D364"/>
                 </a:solidFill>
@@ -13768,14 +13768,14 @@
               </a:rPr>
               <a:t>    RETURN ROUND(precio * (1 - v_pct/100), 2);</a:t>
             </a:r>
-            <a:endParaRPr lang="en-US" sz="950" dirty="0"/>
-          </a:p>
-          <a:p>
-            <a:pPr marL="0" indent="0">
-              <a:buNone/>
-            </a:pPr>
-            <a:r>
-              <a:rPr lang="en-US" sz="950" dirty="0">
+            <a:endParaRPr lang="en-US" sz="600" dirty="0"/>
+          </a:p>
+          <a:p>
+            <a:pPr marL="0" indent="0">
+              <a:buNone/>
+            </a:pPr>
+            <a:r>
+              <a:rPr lang="en-US" sz="600" dirty="0">
                 <a:solidFill>
                   <a:srgbClr val="56D364"/>
                 </a:solidFill>
@@ -13785,20 +13785,20 @@
               </a:rPr>
               <a:t>END //</a:t>
             </a:r>
-            <a:endParaRPr lang="en-US" sz="950" dirty="0"/>
-          </a:p>
-          <a:p>
-            <a:pPr marL="0" indent="0">
-              <a:buNone/>
-            </a:pPr>
-            <a:endParaRPr lang="en-US" sz="950" dirty="0"/>
-          </a:p>
-          <a:p>
-            <a:pPr marL="0" indent="0">
-              <a:buNone/>
-            </a:pPr>
-            <a:r>
-              <a:rPr lang="en-US" sz="950" dirty="0">
+            <a:endParaRPr lang="en-US" sz="600" dirty="0"/>
+          </a:p>
+          <a:p>
+            <a:pPr marL="0" indent="0">
+              <a:buNone/>
+            </a:pPr>
+            <a:endParaRPr lang="en-US" sz="600" dirty="0"/>
+          </a:p>
+          <a:p>
+            <a:pPr marL="0" indent="0">
+              <a:buNone/>
+            </a:pPr>
+            <a:r>
+              <a:rPr lang="en-US" sz="600" dirty="0">
                 <a:solidFill>
                   <a:srgbClr val="56D364"/>
                 </a:solidFill>
@@ -13808,14 +13808,14 @@
               </a:rPr>
               <a:t>-- Resultado según tipo de cliente:</a:t>
             </a:r>
-            <a:endParaRPr lang="en-US" sz="950" dirty="0"/>
-          </a:p>
-          <a:p>
-            <a:pPr marL="0" indent="0">
-              <a:buNone/>
-            </a:pPr>
-            <a:r>
-              <a:rPr lang="en-US" sz="950" dirty="0">
+            <a:endParaRPr lang="en-US" sz="600" dirty="0"/>
+          </a:p>
+          <a:p>
+            <a:pPr marL="0" indent="0">
+              <a:buNone/>
+            </a:pPr>
+            <a:r>
+              <a:rPr lang="en-US" sz="600" dirty="0">
                 <a:solidFill>
                   <a:srgbClr val="56D364"/>
                 </a:solidFill>
@@ -13825,14 +13825,14 @@
               </a:rPr>
               <a:t>-- fn_calcular_descuento(100000, 'regular') → 100000</a:t>
             </a:r>
-            <a:endParaRPr lang="en-US" sz="950" dirty="0"/>
-          </a:p>
-          <a:p>
-            <a:pPr marL="0" indent="0">
-              <a:buNone/>
-            </a:pPr>
-            <a:r>
-              <a:rPr lang="en-US" sz="950" dirty="0">
+            <a:endParaRPr lang="en-US" sz="600" dirty="0"/>
+          </a:p>
+          <a:p>
+            <a:pPr marL="0" indent="0">
+              <a:buNone/>
+            </a:pPr>
+            <a:r>
+              <a:rPr lang="en-US" sz="600" dirty="0">
                 <a:solidFill>
                   <a:srgbClr val="56D364"/>
                 </a:solidFill>
@@ -13842,14 +13842,14 @@
               </a:rPr>
               <a:t>-- fn_calcular_descuento(100000, 'premium') → 95000</a:t>
             </a:r>
-            <a:endParaRPr lang="en-US" sz="950" dirty="0"/>
-          </a:p>
-          <a:p>
-            <a:pPr marL="0" indent="0">
-              <a:buNone/>
-            </a:pPr>
-            <a:r>
-              <a:rPr lang="en-US" sz="950" dirty="0">
+            <a:endParaRPr lang="en-US" sz="600" dirty="0"/>
+          </a:p>
+          <a:p>
+            <a:pPr marL="0" indent="0">
+              <a:buNone/>
+            </a:pPr>
+            <a:r>
+              <a:rPr lang="en-US" sz="600" dirty="0">
                 <a:solidFill>
                   <a:srgbClr val="56D364"/>
                 </a:solidFill>
@@ -13859,14 +13859,14 @@
               </a:rPr>
               <a:t>-- fn_calcular_descuento(100000, 'vip')     → 85000</a:t>
             </a:r>
-            <a:endParaRPr lang="en-US" sz="950" dirty="0"/>
-          </a:p>
-          <a:p>
-            <a:pPr marL="0" indent="0">
-              <a:buNone/>
-            </a:pPr>
-            <a:r>
-              <a:rPr lang="en-US" sz="950" dirty="0">
+            <a:endParaRPr lang="en-US" sz="600" dirty="0"/>
+          </a:p>
+          <a:p>
+            <a:pPr marL="0" indent="0">
+              <a:buNone/>
+            </a:pPr>
+            <a:r>
+              <a:rPr lang="en-US" sz="600" dirty="0">
                 <a:solidFill>
                   <a:srgbClr val="56D364"/>
                 </a:solidFill>
@@ -13876,20 +13876,20 @@
               </a:rPr>
               <a:t>DELIMITER ;</a:t>
             </a:r>
-            <a:endParaRPr lang="en-US" sz="950" dirty="0"/>
-          </a:p>
-          <a:p>
-            <a:pPr marL="0" indent="0">
-              <a:buNone/>
-            </a:pPr>
-            <a:endParaRPr lang="en-US" sz="950" dirty="0"/>
-          </a:p>
-          <a:p>
-            <a:pPr marL="0" indent="0">
-              <a:buNone/>
-            </a:pPr>
-            <a:r>
-              <a:rPr lang="en-US" sz="950" dirty="0">
+            <a:endParaRPr lang="en-US" sz="600" dirty="0"/>
+          </a:p>
+          <a:p>
+            <a:pPr marL="0" indent="0">
+              <a:buNone/>
+            </a:pPr>
+            <a:endParaRPr lang="en-US" sz="600" dirty="0"/>
+          </a:p>
+          <a:p>
+            <a:pPr marL="0" indent="0">
+              <a:buNone/>
+            </a:pPr>
+            <a:r>
+              <a:rPr lang="en-US" sz="600" dirty="0">
                 <a:solidFill>
                   <a:srgbClr val="56D364"/>
                 </a:solidFill>
@@ -13899,14 +13899,14 @@
               </a:rPr>
               <a:t>SELECT nombre, precio,</a:t>
             </a:r>
-            <a:endParaRPr lang="en-US" sz="950" dirty="0"/>
-          </a:p>
-          <a:p>
-            <a:pPr marL="0" indent="0">
-              <a:buNone/>
-            </a:pPr>
-            <a:r>
-              <a:rPr lang="en-US" sz="950" dirty="0">
+            <a:endParaRPr lang="en-US" sz="600" dirty="0"/>
+          </a:p>
+          <a:p>
+            <a:pPr marL="0" indent="0">
+              <a:buNone/>
+            </a:pPr>
+            <a:r>
+              <a:rPr lang="en-US" sz="600" dirty="0">
                 <a:solidFill>
                   <a:srgbClr val="56D364"/>
                 </a:solidFill>
@@ -13916,14 +13916,14 @@
               </a:rPr>
               <a:t>  fn_calcular_descuento(precio, tipo_cliente) AS precio_final</a:t>
             </a:r>
-            <a:endParaRPr lang="en-US" sz="950" dirty="0"/>
-          </a:p>
-          <a:p>
-            <a:pPr marL="0" indent="0">
-              <a:buNone/>
-            </a:pPr>
-            <a:r>
-              <a:rPr lang="en-US" sz="950" dirty="0">
+            <a:endParaRPr lang="en-US" sz="600" dirty="0"/>
+          </a:p>
+          <a:p>
+            <a:pPr marL="0" indent="0">
+              <a:buNone/>
+            </a:pPr>
+            <a:r>
+              <a:rPr lang="en-US" sz="600" dirty="0">
                 <a:solidFill>
                   <a:srgbClr val="56D364"/>
                 </a:solidFill>
@@ -13933,14 +13933,14 @@
               </a:rPr>
               <a:t>FROM producto p JOIN cliente c ON c.tipo_cliente = c.tipo_cliente</a:t>
             </a:r>
-            <a:endParaRPr lang="en-US" sz="950" dirty="0"/>
-          </a:p>
-          <a:p>
-            <a:pPr marL="0" indent="0">
-              <a:buNone/>
-            </a:pPr>
-            <a:r>
-              <a:rPr lang="en-US" sz="950" dirty="0">
+            <a:endParaRPr lang="en-US" sz="600" dirty="0"/>
+          </a:p>
+          <a:p>
+            <a:pPr marL="0" indent="0">
+              <a:buNone/>
+            </a:pPr>
+            <a:r>
+              <a:rPr lang="en-US" sz="600" dirty="0">
                 <a:solidFill>
                   <a:srgbClr val="56D364"/>
                 </a:solidFill>
@@ -13950,7 +13950,7 @@
               </a:rPr>
               <a:t>WHERE c.id_cliente = 1;</a:t>
             </a:r>
-            <a:endParaRPr lang="en-US" sz="950" dirty="0"/>
+            <a:endParaRPr lang="en-US" sz="600" dirty="0"/>
           </a:p>
         </p:txBody>
       </p:sp>
@@ -14367,14 +14367,14 @@
           <a:ln/>
         </p:spPr>
         <p:txBody>
-          <a:bodyPr wrap="square" lIns="0" tIns="0" rIns="0" bIns="0" rtlCol="0" anchor="t"/>
-          <a:lstStyle/>
-          <a:p>
-            <a:pPr marL="0" indent="0">
-              <a:buNone/>
-            </a:pPr>
-            <a:r>
-              <a:rPr lang="en-US" sz="950" dirty="0">
+          <a:bodyPr wrap="square" lIns="0" tIns="0" rIns="0" bIns="0" numCol="2" rtlCol="0" anchor="t"/>
+          <a:lstStyle/>
+          <a:p>
+            <a:pPr marL="0" indent="0">
+              <a:buNone/>
+            </a:pPr>
+            <a:r>
+              <a:rPr lang="en-US" sz="700" dirty="0">
                 <a:solidFill>
                   <a:srgbClr val="56D364"/>
                 </a:solidFill>
@@ -14384,14 +14384,14 @@
               </a:rPr>
               <a:t>-- ══ HERENCIA: Tabla jerarquía de cuentas ══</a:t>
             </a:r>
-            <a:endParaRPr lang="en-US" sz="950" dirty="0"/>
-          </a:p>
-          <a:p>
-            <a:pPr marL="0" indent="0">
-              <a:buNone/>
-            </a:pPr>
-            <a:r>
-              <a:rPr lang="en-US" sz="950" dirty="0">
+            <a:endParaRPr lang="en-US" sz="700" dirty="0"/>
+          </a:p>
+          <a:p>
+            <a:pPr marL="0" indent="0">
+              <a:buNone/>
+            </a:pPr>
+            <a:r>
+              <a:rPr lang="en-US" sz="700" dirty="0">
                 <a:solidFill>
                   <a:srgbClr val="56D364"/>
                 </a:solidFill>
@@ -14401,14 +14401,14 @@
               </a:rPr>
               <a:t>CREATE TABLE cuenta_base (id_cuenta INT AUTO_INCREMENT PRIMARY KEY,</a:t>
             </a:r>
-            <a:endParaRPr lang="en-US" sz="950" dirty="0"/>
-          </a:p>
-          <a:p>
-            <a:pPr marL="0" indent="0">
-              <a:buNone/>
-            </a:pPr>
-            <a:r>
-              <a:rPr lang="en-US" sz="950" dirty="0">
+            <a:endParaRPr lang="en-US" sz="700" dirty="0"/>
+          </a:p>
+          <a:p>
+            <a:pPr marL="0" indent="0">
+              <a:buNone/>
+            </a:pPr>
+            <a:r>
+              <a:rPr lang="en-US" sz="700" dirty="0">
                 <a:solidFill>
                   <a:srgbClr val="56D364"/>
                 </a:solidFill>
@@ -14418,14 +14418,14 @@
               </a:rPr>
               <a:t>  numero_cuenta VARCHAR(20) UNIQUE, saldo DECIMAL(15,2) DEFAULT 0,</a:t>
             </a:r>
-            <a:endParaRPr lang="en-US" sz="950" dirty="0"/>
-          </a:p>
-          <a:p>
-            <a:pPr marL="0" indent="0">
-              <a:buNone/>
-            </a:pPr>
-            <a:r>
-              <a:rPr lang="en-US" sz="950" dirty="0">
+            <a:endParaRPr lang="en-US" sz="700" dirty="0"/>
+          </a:p>
+          <a:p>
+            <a:pPr marL="0" indent="0">
+              <a:buNone/>
+            </a:pPr>
+            <a:r>
+              <a:rPr lang="en-US" sz="700" dirty="0">
                 <a:solidFill>
                   <a:srgbClr val="56D364"/>
                 </a:solidFill>
@@ -14435,14 +14435,14 @@
               </a:rPr>
               <a:t>  tipo ENUM('corriente','ahorro','plazo') NOT NULL, id_cliente INT NOT NULL,</a:t>
             </a:r>
-            <a:endParaRPr lang="en-US" sz="950" dirty="0"/>
-          </a:p>
-          <a:p>
-            <a:pPr marL="0" indent="0">
-              <a:buNone/>
-            </a:pPr>
-            <a:r>
-              <a:rPr lang="en-US" sz="950" dirty="0">
+            <a:endParaRPr lang="en-US" sz="700" dirty="0"/>
+          </a:p>
+          <a:p>
+            <a:pPr marL="0" indent="0">
+              <a:buNone/>
+            </a:pPr>
+            <a:r>
+              <a:rPr lang="en-US" sz="700" dirty="0">
                 <a:solidFill>
                   <a:srgbClr val="56D364"/>
                 </a:solidFill>
@@ -14452,20 +14452,20 @@
               </a:rPr>
               <a:t>  FOREIGN KEY(id_cliente) REFERENCES cliente(id_cliente)) ENGINE=InnoDB;</a:t>
             </a:r>
-            <a:endParaRPr lang="en-US" sz="950" dirty="0"/>
-          </a:p>
-          <a:p>
-            <a:pPr marL="0" indent="0">
-              <a:buNone/>
-            </a:pPr>
-            <a:endParaRPr lang="en-US" sz="950" dirty="0"/>
-          </a:p>
-          <a:p>
-            <a:pPr marL="0" indent="0">
-              <a:buNone/>
-            </a:pPr>
-            <a:r>
-              <a:rPr lang="en-US" sz="950" dirty="0">
+            <a:endParaRPr lang="en-US" sz="700" dirty="0"/>
+          </a:p>
+          <a:p>
+            <a:pPr marL="0" indent="0">
+              <a:buNone/>
+            </a:pPr>
+            <a:endParaRPr lang="en-US" sz="700" dirty="0"/>
+          </a:p>
+          <a:p>
+            <a:pPr marL="0" indent="0">
+              <a:buNone/>
+            </a:pPr>
+            <a:r>
+              <a:rPr lang="en-US" sz="700" dirty="0">
                 <a:solidFill>
                   <a:srgbClr val="56D364"/>
                 </a:solidFill>
@@ -14475,14 +14475,14 @@
               </a:rPr>
               <a:t>CREATE TABLE cuenta_corriente (id_cuenta INT PRIMARY KEY, limite_sobregiro DECIMAL(12,2),</a:t>
             </a:r>
-            <a:endParaRPr lang="en-US" sz="950" dirty="0"/>
-          </a:p>
-          <a:p>
-            <a:pPr marL="0" indent="0">
-              <a:buNone/>
-            </a:pPr>
-            <a:r>
-              <a:rPr lang="en-US" sz="950" dirty="0">
+            <a:endParaRPr lang="en-US" sz="700" dirty="0"/>
+          </a:p>
+          <a:p>
+            <a:pPr marL="0" indent="0">
+              <a:buNone/>
+            </a:pPr>
+            <a:r>
+              <a:rPr lang="en-US" sz="700" dirty="0">
                 <a:solidFill>
                   <a:srgbClr val="56D364"/>
                 </a:solidFill>
@@ -14492,14 +14492,14 @@
               </a:rPr>
               <a:t>  FOREIGN KEY(id_cuenta) REFERENCES cuenta_base(id_cuenta) ON DELETE CASCADE) ENGINE=InnoDB;</a:t>
             </a:r>
-            <a:endParaRPr lang="en-US" sz="950" dirty="0"/>
-          </a:p>
-          <a:p>
-            <a:pPr marL="0" indent="0">
-              <a:buNone/>
-            </a:pPr>
-            <a:r>
-              <a:rPr lang="en-US" sz="950" dirty="0">
+            <a:endParaRPr lang="en-US" sz="700" dirty="0"/>
+          </a:p>
+          <a:p>
+            <a:pPr marL="0" indent="0">
+              <a:buNone/>
+            </a:pPr>
+            <a:r>
+              <a:rPr lang="en-US" sz="700" dirty="0">
                 <a:solidFill>
                   <a:srgbClr val="56D364"/>
                 </a:solidFill>
@@ -14509,14 +14509,14 @@
               </a:rPr>
               <a:t>CREATE TABLE cuenta_ahorro   (id_cuenta INT PRIMARY KEY, tasa_interes DECIMAL(5,4),</a:t>
             </a:r>
-            <a:endParaRPr lang="en-US" sz="950" dirty="0"/>
-          </a:p>
-          <a:p>
-            <a:pPr marL="0" indent="0">
-              <a:buNone/>
-            </a:pPr>
-            <a:r>
-              <a:rPr lang="en-US" sz="950" dirty="0">
+            <a:endParaRPr lang="en-US" sz="700" dirty="0"/>
+          </a:p>
+          <a:p>
+            <a:pPr marL="0" indent="0">
+              <a:buNone/>
+            </a:pPr>
+            <a:r>
+              <a:rPr lang="en-US" sz="700" dirty="0">
                 <a:solidFill>
                   <a:srgbClr val="56D364"/>
                 </a:solidFill>
@@ -14526,20 +14526,20 @@
               </a:rPr>
               <a:t>  FOREIGN KEY(id_cuenta) REFERENCES cuenta_base(id_cuenta) ON DELETE CASCADE) ENGINE=InnoDB;</a:t>
             </a:r>
-            <a:endParaRPr lang="en-US" sz="950" dirty="0"/>
-          </a:p>
-          <a:p>
-            <a:pPr marL="0" indent="0">
-              <a:buNone/>
-            </a:pPr>
-            <a:endParaRPr lang="en-US" sz="950" dirty="0"/>
-          </a:p>
-          <a:p>
-            <a:pPr marL="0" indent="0">
-              <a:buNone/>
-            </a:pPr>
-            <a:r>
-              <a:rPr lang="en-US" sz="950" dirty="0">
+            <a:endParaRPr lang="en-US" sz="700" dirty="0"/>
+          </a:p>
+          <a:p>
+            <a:pPr marL="0" indent="0">
+              <a:buNone/>
+            </a:pPr>
+            <a:endParaRPr lang="en-US" sz="700" dirty="0"/>
+          </a:p>
+          <a:p>
+            <a:pPr marL="0" indent="0">
+              <a:buNone/>
+            </a:pPr>
+            <a:r>
+              <a:rPr lang="en-US" sz="700" dirty="0">
                 <a:solidFill>
                   <a:srgbClr val="56D364"/>
                 </a:solidFill>
@@ -14549,14 +14549,14 @@
               </a:rPr>
               <a:t>-- ══ ABSTRACCIÓN: Vista que une la jerarquía ══</a:t>
             </a:r>
-            <a:endParaRPr lang="en-US" sz="950" dirty="0"/>
-          </a:p>
-          <a:p>
-            <a:pPr marL="0" indent="0">
-              <a:buNone/>
-            </a:pPr>
-            <a:r>
-              <a:rPr lang="en-US" sz="950" dirty="0">
+            <a:endParaRPr lang="en-US" sz="700" dirty="0"/>
+          </a:p>
+          <a:p>
+            <a:pPr marL="0" indent="0">
+              <a:buNone/>
+            </a:pPr>
+            <a:r>
+              <a:rPr lang="en-US" sz="700" dirty="0">
                 <a:solidFill>
                   <a:srgbClr val="56D364"/>
                 </a:solidFill>
@@ -14566,14 +14566,14 @@
               </a:rPr>
               <a:t>CREATE VIEW v_cuentas AS</a:t>
             </a:r>
-            <a:endParaRPr lang="en-US" sz="950" dirty="0"/>
-          </a:p>
-          <a:p>
-            <a:pPr marL="0" indent="0">
-              <a:buNone/>
-            </a:pPr>
-            <a:r>
-              <a:rPr lang="en-US" sz="950" dirty="0">
+            <a:endParaRPr lang="en-US" sz="700" dirty="0"/>
+          </a:p>
+          <a:p>
+            <a:pPr marL="0" indent="0">
+              <a:buNone/>
+            </a:pPr>
+            <a:r>
+              <a:rPr lang="en-US" sz="700" dirty="0">
                 <a:solidFill>
                   <a:srgbClr val="56D364"/>
                 </a:solidFill>
@@ -14583,14 +14583,14 @@
               </a:rPr>
               <a:t>  SELECT cb.*, 'Corriente' as tipo_detalle, cc.limite_sobregiro, NULL as tasa</a:t>
             </a:r>
-            <a:endParaRPr lang="en-US" sz="950" dirty="0"/>
-          </a:p>
-          <a:p>
-            <a:pPr marL="0" indent="0">
-              <a:buNone/>
-            </a:pPr>
-            <a:r>
-              <a:rPr lang="en-US" sz="950" dirty="0">
+            <a:endParaRPr lang="en-US" sz="700" dirty="0"/>
+          </a:p>
+          <a:p>
+            <a:pPr marL="0" indent="0">
+              <a:buNone/>
+            </a:pPr>
+            <a:r>
+              <a:rPr lang="en-US" sz="700" dirty="0">
                 <a:solidFill>
                   <a:srgbClr val="56D364"/>
                 </a:solidFill>
@@ -14600,14 +14600,14 @@
               </a:rPr>
               <a:t>  FROM cuenta_base cb JOIN cuenta_corriente cc USING(id_cuenta)</a:t>
             </a:r>
-            <a:endParaRPr lang="en-US" sz="950" dirty="0"/>
-          </a:p>
-          <a:p>
-            <a:pPr marL="0" indent="0">
-              <a:buNone/>
-            </a:pPr>
-            <a:r>
-              <a:rPr lang="en-US" sz="950" dirty="0">
+            <a:endParaRPr lang="en-US" sz="700" dirty="0"/>
+          </a:p>
+          <a:p>
+            <a:pPr marL="0" indent="0">
+              <a:buNone/>
+            </a:pPr>
+            <a:r>
+              <a:rPr lang="en-US" sz="700" dirty="0">
                 <a:solidFill>
                   <a:srgbClr val="56D364"/>
                 </a:solidFill>
@@ -14617,14 +14617,14 @@
               </a:rPr>
               <a:t>  UNION ALL</a:t>
             </a:r>
-            <a:endParaRPr lang="en-US" sz="950" dirty="0"/>
-          </a:p>
-          <a:p>
-            <a:pPr marL="0" indent="0">
-              <a:buNone/>
-            </a:pPr>
-            <a:r>
-              <a:rPr lang="en-US" sz="950" dirty="0">
+            <a:endParaRPr lang="en-US" sz="700" dirty="0"/>
+          </a:p>
+          <a:p>
+            <a:pPr marL="0" indent="0">
+              <a:buNone/>
+            </a:pPr>
+            <a:r>
+              <a:rPr lang="en-US" sz="700" dirty="0">
                 <a:solidFill>
                   <a:srgbClr val="56D364"/>
                 </a:solidFill>
@@ -14634,14 +14634,14 @@
               </a:rPr>
               <a:t>  SELECT cb.*, 'Ahorro', NULL, ca.tasa_interes</a:t>
             </a:r>
-            <a:endParaRPr lang="en-US" sz="950" dirty="0"/>
-          </a:p>
-          <a:p>
-            <a:pPr marL="0" indent="0">
-              <a:buNone/>
-            </a:pPr>
-            <a:r>
-              <a:rPr lang="en-US" sz="950" dirty="0">
+            <a:endParaRPr lang="en-US" sz="700" dirty="0"/>
+          </a:p>
+          <a:p>
+            <a:pPr marL="0" indent="0">
+              <a:buNone/>
+            </a:pPr>
+            <a:r>
+              <a:rPr lang="en-US" sz="700" dirty="0">
                 <a:solidFill>
                   <a:srgbClr val="56D364"/>
                 </a:solidFill>
@@ -14651,20 +14651,20 @@
               </a:rPr>
               <a:t>  FROM cuenta_base cb JOIN cuenta_ahorro ca USING(id_cuenta);</a:t>
             </a:r>
-            <a:endParaRPr lang="en-US" sz="950" dirty="0"/>
-          </a:p>
-          <a:p>
-            <a:pPr marL="0" indent="0">
-              <a:buNone/>
-            </a:pPr>
-            <a:endParaRPr lang="en-US" sz="950" dirty="0"/>
-          </a:p>
-          <a:p>
-            <a:pPr marL="0" indent="0">
-              <a:buNone/>
-            </a:pPr>
-            <a:r>
-              <a:rPr lang="en-US" sz="950" dirty="0">
+            <a:endParaRPr lang="en-US" sz="700" dirty="0"/>
+          </a:p>
+          <a:p>
+            <a:pPr marL="0" indent="0">
+              <a:buNone/>
+            </a:pPr>
+            <a:endParaRPr lang="en-US" sz="700" dirty="0"/>
+          </a:p>
+          <a:p>
+            <a:pPr marL="0" indent="0">
+              <a:buNone/>
+            </a:pPr>
+            <a:r>
+              <a:rPr lang="en-US" sz="700" dirty="0">
                 <a:solidFill>
                   <a:srgbClr val="56D364"/>
                 </a:solidFill>
@@ -14674,14 +14674,14 @@
               </a:rPr>
               <a:t>-- ══ ENCAPSULAMIENTO: SP para transferencia ══</a:t>
             </a:r>
-            <a:endParaRPr lang="en-US" sz="950" dirty="0"/>
-          </a:p>
-          <a:p>
-            <a:pPr marL="0" indent="0">
-              <a:buNone/>
-            </a:pPr>
-            <a:r>
-              <a:rPr lang="en-US" sz="950" dirty="0">
+            <a:endParaRPr lang="en-US" sz="700" dirty="0"/>
+          </a:p>
+          <a:p>
+            <a:pPr marL="0" indent="0">
+              <a:buNone/>
+            </a:pPr>
+            <a:r>
+              <a:rPr lang="en-US" sz="700" dirty="0">
                 <a:solidFill>
                   <a:srgbClr val="56D364"/>
                 </a:solidFill>
@@ -14691,14 +14691,14 @@
               </a:rPr>
               <a:t>DELIMITER //</a:t>
             </a:r>
-            <a:endParaRPr lang="en-US" sz="950" dirty="0"/>
-          </a:p>
-          <a:p>
-            <a:pPr marL="0" indent="0">
-              <a:buNone/>
-            </a:pPr>
-            <a:r>
-              <a:rPr lang="en-US" sz="950" dirty="0">
+            <a:endParaRPr lang="en-US" sz="700" dirty="0"/>
+          </a:p>
+          <a:p>
+            <a:pPr marL="0" indent="0">
+              <a:buNone/>
+            </a:pPr>
+            <a:r>
+              <a:rPr lang="en-US" sz="700" dirty="0">
                 <a:solidFill>
                   <a:srgbClr val="56D364"/>
                 </a:solidFill>
@@ -14708,14 +14708,14 @@
               </a:rPr>
               <a:t>CREATE PROCEDURE sp_transferir(</a:t>
             </a:r>
-            <a:endParaRPr lang="en-US" sz="950" dirty="0"/>
-          </a:p>
-          <a:p>
-            <a:pPr marL="0" indent="0">
-              <a:buNone/>
-            </a:pPr>
-            <a:r>
-              <a:rPr lang="en-US" sz="950" dirty="0">
+            <a:endParaRPr lang="en-US" sz="700" dirty="0"/>
+          </a:p>
+          <a:p>
+            <a:pPr marL="0" indent="0">
+              <a:buNone/>
+            </a:pPr>
+            <a:r>
+              <a:rPr lang="en-US" sz="700" dirty="0">
                 <a:solidFill>
                   <a:srgbClr val="56D364"/>
                 </a:solidFill>
@@ -14725,14 +14725,14 @@
               </a:rPr>
               <a:t>  IN origen INT, IN destino INT, IN monto DECIMAL(15,2),</a:t>
             </a:r>
-            <a:endParaRPr lang="en-US" sz="950" dirty="0"/>
-          </a:p>
-          <a:p>
-            <a:pPr marL="0" indent="0">
-              <a:buNone/>
-            </a:pPr>
-            <a:r>
-              <a:rPr lang="en-US" sz="950" dirty="0">
+            <a:endParaRPr lang="en-US" sz="700" dirty="0"/>
+          </a:p>
+          <a:p>
+            <a:pPr marL="0" indent="0">
+              <a:buNone/>
+            </a:pPr>
+            <a:r>
+              <a:rPr lang="en-US" sz="700" dirty="0">
                 <a:solidFill>
                   <a:srgbClr val="56D364"/>
                 </a:solidFill>
@@ -14742,14 +14742,14 @@
               </a:rPr>
               <a:t>  OUT resultado VARCHAR(100))</a:t>
             </a:r>
-            <a:endParaRPr lang="en-US" sz="950" dirty="0"/>
-          </a:p>
-          <a:p>
-            <a:pPr marL="0" indent="0">
-              <a:buNone/>
-            </a:pPr>
-            <a:r>
-              <a:rPr lang="en-US" sz="950" dirty="0">
+            <a:endParaRPr lang="en-US" sz="700" dirty="0"/>
+          </a:p>
+          <a:p>
+            <a:pPr marL="0" indent="0">
+              <a:buNone/>
+            </a:pPr>
+            <a:r>
+              <a:rPr lang="en-US" sz="700" dirty="0">
                 <a:solidFill>
                   <a:srgbClr val="56D364"/>
                 </a:solidFill>
@@ -14759,14 +14759,14 @@
               </a:rPr>
               <a:t>BEGIN</a:t>
             </a:r>
-            <a:endParaRPr lang="en-US" sz="950" dirty="0"/>
-          </a:p>
-          <a:p>
-            <a:pPr marL="0" indent="0">
-              <a:buNone/>
-            </a:pPr>
-            <a:r>
-              <a:rPr lang="en-US" sz="950" dirty="0">
+            <a:endParaRPr lang="en-US" sz="700" dirty="0"/>
+          </a:p>
+          <a:p>
+            <a:pPr marL="0" indent="0">
+              <a:buNone/>
+            </a:pPr>
+            <a:r>
+              <a:rPr lang="en-US" sz="700" dirty="0">
                 <a:solidFill>
                   <a:srgbClr val="56D364"/>
                 </a:solidFill>
@@ -14776,14 +14776,14 @@
               </a:rPr>
               <a:t>  DECLARE v_saldo_origen DECIMAL(15,2);</a:t>
             </a:r>
-            <a:endParaRPr lang="en-US" sz="950" dirty="0"/>
-          </a:p>
-          <a:p>
-            <a:pPr marL="0" indent="0">
-              <a:buNone/>
-            </a:pPr>
-            <a:r>
-              <a:rPr lang="en-US" sz="950" dirty="0">
+            <a:endParaRPr lang="en-US" sz="700" dirty="0"/>
+          </a:p>
+          <a:p>
+            <a:pPr marL="0" indent="0">
+              <a:buNone/>
+            </a:pPr>
+            <a:r>
+              <a:rPr lang="en-US" sz="700" dirty="0">
                 <a:solidFill>
                   <a:srgbClr val="56D364"/>
                 </a:solidFill>
@@ -14793,14 +14793,14 @@
               </a:rPr>
               <a:t>  DECLARE EXIT HANDLER FOR SQLEXCEPTION BEGIN ROLLBACK; SET resultado='ERROR'; END;</a:t>
             </a:r>
-            <a:endParaRPr lang="en-US" sz="950" dirty="0"/>
-          </a:p>
-          <a:p>
-            <a:pPr marL="0" indent="0">
-              <a:buNone/>
-            </a:pPr>
-            <a:r>
-              <a:rPr lang="en-US" sz="950" dirty="0">
+            <a:endParaRPr lang="en-US" sz="700" dirty="0"/>
+          </a:p>
+          <a:p>
+            <a:pPr marL="0" indent="0">
+              <a:buNone/>
+            </a:pPr>
+            <a:r>
+              <a:rPr lang="en-US" sz="700" dirty="0">
                 <a:solidFill>
                   <a:srgbClr val="56D364"/>
                 </a:solidFill>
@@ -14810,14 +14810,14 @@
               </a:rPr>
               <a:t>  START TRANSACTION;</a:t>
             </a:r>
-            <a:endParaRPr lang="en-US" sz="950" dirty="0"/>
-          </a:p>
-          <a:p>
-            <a:pPr marL="0" indent="0">
-              <a:buNone/>
-            </a:pPr>
-            <a:r>
-              <a:rPr lang="en-US" sz="950" dirty="0">
+            <a:endParaRPr lang="en-US" sz="700" dirty="0"/>
+          </a:p>
+          <a:p>
+            <a:pPr marL="0" indent="0">
+              <a:buNone/>
+            </a:pPr>
+            <a:r>
+              <a:rPr lang="en-US" sz="700" dirty="0">
                 <a:solidFill>
                   <a:srgbClr val="56D364"/>
                 </a:solidFill>
@@ -14827,14 +14827,14 @@
               </a:rPr>
               <a:t>  SELECT saldo INTO v_saldo_origen FROM cuenta_base WHERE id_cuenta=origen FOR UPDATE;</a:t>
             </a:r>
-            <a:endParaRPr lang="en-US" sz="950" dirty="0"/>
-          </a:p>
-          <a:p>
-            <a:pPr marL="0" indent="0">
-              <a:buNone/>
-            </a:pPr>
-            <a:r>
-              <a:rPr lang="en-US" sz="950" dirty="0">
+            <a:endParaRPr lang="en-US" sz="700" dirty="0"/>
+          </a:p>
+          <a:p>
+            <a:pPr marL="0" indent="0">
+              <a:buNone/>
+            </a:pPr>
+            <a:r>
+              <a:rPr lang="en-US" sz="700" dirty="0">
                 <a:solidFill>
                   <a:srgbClr val="56D364"/>
                 </a:solidFill>
@@ -14844,14 +14844,14 @@
               </a:rPr>
               <a:t>  IF v_saldo_origen &lt; monto THEN</a:t>
             </a:r>
-            <a:endParaRPr lang="en-US" sz="950" dirty="0"/>
-          </a:p>
-          <a:p>
-            <a:pPr marL="0" indent="0">
-              <a:buNone/>
-            </a:pPr>
-            <a:r>
-              <a:rPr lang="en-US" sz="950" dirty="0">
+            <a:endParaRPr lang="en-US" sz="700" dirty="0"/>
+          </a:p>
+          <a:p>
+            <a:pPr marL="0" indent="0">
+              <a:buNone/>
+            </a:pPr>
+            <a:r>
+              <a:rPr lang="en-US" sz="700" dirty="0">
                 <a:solidFill>
                   <a:srgbClr val="56D364"/>
                 </a:solidFill>
@@ -14861,14 +14861,14 @@
               </a:rPr>
               <a:t>    SIGNAL SQLSTATE '45000' SET MESSAGE_TEXT='Saldo insuficiente';</a:t>
             </a:r>
-            <a:endParaRPr lang="en-US" sz="950" dirty="0"/>
-          </a:p>
-          <a:p>
-            <a:pPr marL="0" indent="0">
-              <a:buNone/>
-            </a:pPr>
-            <a:r>
-              <a:rPr lang="en-US" sz="950" dirty="0">
+            <a:endParaRPr lang="en-US" sz="700" dirty="0"/>
+          </a:p>
+          <a:p>
+            <a:pPr marL="0" indent="0">
+              <a:buNone/>
+            </a:pPr>
+            <a:r>
+              <a:rPr lang="en-US" sz="700" dirty="0">
                 <a:solidFill>
                   <a:srgbClr val="56D364"/>
                 </a:solidFill>
@@ -14878,14 +14878,14 @@
               </a:rPr>
               <a:t>  END IF;</a:t>
             </a:r>
-            <a:endParaRPr lang="en-US" sz="950" dirty="0"/>
-          </a:p>
-          <a:p>
-            <a:pPr marL="0" indent="0">
-              <a:buNone/>
-            </a:pPr>
-            <a:r>
-              <a:rPr lang="en-US" sz="950" dirty="0">
+            <a:endParaRPr lang="en-US" sz="700" dirty="0"/>
+          </a:p>
+          <a:p>
+            <a:pPr marL="0" indent="0">
+              <a:buNone/>
+            </a:pPr>
+            <a:r>
+              <a:rPr lang="en-US" sz="700" dirty="0">
                 <a:solidFill>
                   <a:srgbClr val="56D364"/>
                 </a:solidFill>
@@ -14895,14 +14895,14 @@
               </a:rPr>
               <a:t>  UPDATE cuenta_base SET saldo=saldo-monto WHERE id_cuenta=origen;</a:t>
             </a:r>
-            <a:endParaRPr lang="en-US" sz="950" dirty="0"/>
-          </a:p>
-          <a:p>
-            <a:pPr marL="0" indent="0">
-              <a:buNone/>
-            </a:pPr>
-            <a:r>
-              <a:rPr lang="en-US" sz="950" dirty="0">
+            <a:endParaRPr lang="en-US" sz="700" dirty="0"/>
+          </a:p>
+          <a:p>
+            <a:pPr marL="0" indent="0">
+              <a:buNone/>
+            </a:pPr>
+            <a:r>
+              <a:rPr lang="en-US" sz="700" dirty="0">
                 <a:solidFill>
                   <a:srgbClr val="56D364"/>
                 </a:solidFill>
@@ -14912,14 +14912,14 @@
               </a:rPr>
               <a:t>  UPDATE cuenta_base SET saldo=saldo+monto WHERE id_cuenta=destino;</a:t>
             </a:r>
-            <a:endParaRPr lang="en-US" sz="950" dirty="0"/>
-          </a:p>
-          <a:p>
-            <a:pPr marL="0" indent="0">
-              <a:buNone/>
-            </a:pPr>
-            <a:r>
-              <a:rPr lang="en-US" sz="950" dirty="0">
+            <a:endParaRPr lang="en-US" sz="700" dirty="0"/>
+          </a:p>
+          <a:p>
+            <a:pPr marL="0" indent="0">
+              <a:buNone/>
+            </a:pPr>
+            <a:r>
+              <a:rPr lang="en-US" sz="700" dirty="0">
                 <a:solidFill>
                   <a:srgbClr val="56D364"/>
                 </a:solidFill>
@@ -14929,14 +14929,14 @@
               </a:rPr>
               <a:t>  INSERT INTO movimiento(tipo,monto,id_origen,id_destino,fecha) VALUES('transferencia',monto,origen,destino,NOW());</a:t>
             </a:r>
-            <a:endParaRPr lang="en-US" sz="950" dirty="0"/>
-          </a:p>
-          <a:p>
-            <a:pPr marL="0" indent="0">
-              <a:buNone/>
-            </a:pPr>
-            <a:r>
-              <a:rPr lang="en-US" sz="950" dirty="0">
+            <a:endParaRPr lang="en-US" sz="700" dirty="0"/>
+          </a:p>
+          <a:p>
+            <a:pPr marL="0" indent="0">
+              <a:buNone/>
+            </a:pPr>
+            <a:r>
+              <a:rPr lang="en-US" sz="700" dirty="0">
                 <a:solidFill>
                   <a:srgbClr val="56D364"/>
                 </a:solidFill>
@@ -14946,14 +14946,14 @@
               </a:rPr>
               <a:t>  COMMIT; SET resultado=CONCAT('OK: Transferencia de $',monto,' exitosa');</a:t>
             </a:r>
-            <a:endParaRPr lang="en-US" sz="950" dirty="0"/>
-          </a:p>
-          <a:p>
-            <a:pPr marL="0" indent="0">
-              <a:buNone/>
-            </a:pPr>
-            <a:r>
-              <a:rPr lang="en-US" sz="950" dirty="0">
+            <a:endParaRPr lang="en-US" sz="700" dirty="0"/>
+          </a:p>
+          <a:p>
+            <a:pPr marL="0" indent="0">
+              <a:buNone/>
+            </a:pPr>
+            <a:r>
+              <a:rPr lang="en-US" sz="700" dirty="0">
                 <a:solidFill>
                   <a:srgbClr val="56D364"/>
                 </a:solidFill>
@@ -14963,20 +14963,20 @@
               </a:rPr>
               <a:t>END //</a:t>
             </a:r>
-            <a:endParaRPr lang="en-US" sz="950" dirty="0"/>
-          </a:p>
-          <a:p>
-            <a:pPr marL="0" indent="0">
-              <a:buNone/>
-            </a:pPr>
-            <a:endParaRPr lang="en-US" sz="950" dirty="0"/>
-          </a:p>
-          <a:p>
-            <a:pPr marL="0" indent="0">
-              <a:buNone/>
-            </a:pPr>
-            <a:r>
-              <a:rPr lang="en-US" sz="950" dirty="0">
+            <a:endParaRPr lang="en-US" sz="700" dirty="0"/>
+          </a:p>
+          <a:p>
+            <a:pPr marL="0" indent="0">
+              <a:buNone/>
+            </a:pPr>
+            <a:endParaRPr lang="en-US" sz="700" dirty="0"/>
+          </a:p>
+          <a:p>
+            <a:pPr marL="0" indent="0">
+              <a:buNone/>
+            </a:pPr>
+            <a:r>
+              <a:rPr lang="en-US" sz="700" dirty="0">
                 <a:solidFill>
                   <a:srgbClr val="56D364"/>
                 </a:solidFill>
@@ -14986,14 +14986,14 @@
               </a:rPr>
               <a:t>-- ══ POLIMORFISMO: Trigger diferente por operación ══</a:t>
             </a:r>
-            <a:endParaRPr lang="en-US" sz="950" dirty="0"/>
-          </a:p>
-          <a:p>
-            <a:pPr marL="0" indent="0">
-              <a:buNone/>
-            </a:pPr>
-            <a:r>
-              <a:rPr lang="en-US" sz="950" dirty="0">
+            <a:endParaRPr lang="en-US" sz="700" dirty="0"/>
+          </a:p>
+          <a:p>
+            <a:pPr marL="0" indent="0">
+              <a:buNone/>
+            </a:pPr>
+            <a:r>
+              <a:rPr lang="en-US" sz="700" dirty="0">
                 <a:solidFill>
                   <a:srgbClr val="56D364"/>
                 </a:solidFill>
@@ -15003,14 +15003,14 @@
               </a:rPr>
               <a:t>CREATE TRIGGER tg_after_movimiento AFTER INSERT ON movimiento FOR EACH ROW</a:t>
             </a:r>
-            <a:endParaRPr lang="en-US" sz="950" dirty="0"/>
-          </a:p>
-          <a:p>
-            <a:pPr marL="0" indent="0">
-              <a:buNone/>
-            </a:pPr>
-            <a:r>
-              <a:rPr lang="en-US" sz="950" dirty="0">
+            <a:endParaRPr lang="en-US" sz="700" dirty="0"/>
+          </a:p>
+          <a:p>
+            <a:pPr marL="0" indent="0">
+              <a:buNone/>
+            </a:pPr>
+            <a:r>
+              <a:rPr lang="en-US" sz="700" dirty="0">
                 <a:solidFill>
                   <a:srgbClr val="56D364"/>
                 </a:solidFill>
@@ -15020,14 +15020,14 @@
               </a:rPr>
               <a:t>BEGIN</a:t>
             </a:r>
-            <a:endParaRPr lang="en-US" sz="950" dirty="0"/>
-          </a:p>
-          <a:p>
-            <a:pPr marL="0" indent="0">
-              <a:buNone/>
-            </a:pPr>
-            <a:r>
-              <a:rPr lang="en-US" sz="950" dirty="0">
+            <a:endParaRPr lang="en-US" sz="700" dirty="0"/>
+          </a:p>
+          <a:p>
+            <a:pPr marL="0" indent="0">
+              <a:buNone/>
+            </a:pPr>
+            <a:r>
+              <a:rPr lang="en-US" sz="700" dirty="0">
                 <a:solidFill>
                   <a:srgbClr val="56D364"/>
                 </a:solidFill>
@@ -15037,14 +15037,14 @@
               </a:rPr>
               <a:t>  CASE NEW.tipo</a:t>
             </a:r>
-            <a:endParaRPr lang="en-US" sz="950" dirty="0"/>
-          </a:p>
-          <a:p>
-            <a:pPr marL="0" indent="0">
-              <a:buNone/>
-            </a:pPr>
-            <a:r>
-              <a:rPr lang="en-US" sz="950" dirty="0">
+            <a:endParaRPr lang="en-US" sz="700" dirty="0"/>
+          </a:p>
+          <a:p>
+            <a:pPr marL="0" indent="0">
+              <a:buNone/>
+            </a:pPr>
+            <a:r>
+              <a:rPr lang="en-US" sz="700" dirty="0">
                 <a:solidFill>
                   <a:srgbClr val="56D364"/>
                 </a:solidFill>
@@ -15054,14 +15054,14 @@
               </a:rPr>
               <a:t>    WHEN 'deposito'       THEN UPDATE cuenta_base SET saldo=saldo+NEW.monto WHERE id_cuenta=NEW.id_destino;</a:t>
             </a:r>
-            <a:endParaRPr lang="en-US" sz="950" dirty="0"/>
-          </a:p>
-          <a:p>
-            <a:pPr marL="0" indent="0">
-              <a:buNone/>
-            </a:pPr>
-            <a:r>
-              <a:rPr lang="en-US" sz="950" dirty="0">
+            <a:endParaRPr lang="en-US" sz="700" dirty="0"/>
+          </a:p>
+          <a:p>
+            <a:pPr marL="0" indent="0">
+              <a:buNone/>
+            </a:pPr>
+            <a:r>
+              <a:rPr lang="en-US" sz="700" dirty="0">
                 <a:solidFill>
                   <a:srgbClr val="56D364"/>
                 </a:solidFill>
@@ -15071,14 +15071,14 @@
               </a:rPr>
               <a:t>    WHEN 'retiro'         THEN UPDATE cuenta_base SET saldo=saldo-NEW.monto WHERE id_cuenta=NEW.id_origen;</a:t>
             </a:r>
-            <a:endParaRPr lang="en-US" sz="950" dirty="0"/>
-          </a:p>
-          <a:p>
-            <a:pPr marL="0" indent="0">
-              <a:buNone/>
-            </a:pPr>
-            <a:r>
-              <a:rPr lang="en-US" sz="950" dirty="0">
+            <a:endParaRPr lang="en-US" sz="700" dirty="0"/>
+          </a:p>
+          <a:p>
+            <a:pPr marL="0" indent="0">
+              <a:buNone/>
+            </a:pPr>
+            <a:r>
+              <a:rPr lang="en-US" sz="700" dirty="0">
                 <a:solidFill>
                   <a:srgbClr val="56D364"/>
                 </a:solidFill>
@@ -15088,14 +15088,14 @@
               </a:rPr>
               <a:t>    WHEN 'transferencia'  THEN INSERT INTO notificacion(msg,id_cuenta) VALUES(CONCAT('Transferencia: $',NEW.monto),NEW.id_origen);</a:t>
             </a:r>
-            <a:endParaRPr lang="en-US" sz="950" dirty="0"/>
-          </a:p>
-          <a:p>
-            <a:pPr marL="0" indent="0">
-              <a:buNone/>
-            </a:pPr>
-            <a:r>
-              <a:rPr lang="en-US" sz="950" dirty="0">
+            <a:endParaRPr lang="en-US" sz="700" dirty="0"/>
+          </a:p>
+          <a:p>
+            <a:pPr marL="0" indent="0">
+              <a:buNone/>
+            </a:pPr>
+            <a:r>
+              <a:rPr lang="en-US" sz="700" dirty="0">
                 <a:solidFill>
                   <a:srgbClr val="56D364"/>
                 </a:solidFill>
@@ -15105,14 +15105,14 @@
               </a:rPr>
               <a:t>  END CASE;</a:t>
             </a:r>
-            <a:endParaRPr lang="en-US" sz="950" dirty="0"/>
-          </a:p>
-          <a:p>
-            <a:pPr marL="0" indent="0">
-              <a:buNone/>
-            </a:pPr>
-            <a:r>
-              <a:rPr lang="en-US" sz="950" dirty="0">
+            <a:endParaRPr lang="en-US" sz="700" dirty="0"/>
+          </a:p>
+          <a:p>
+            <a:pPr marL="0" indent="0">
+              <a:buNone/>
+            </a:pPr>
+            <a:r>
+              <a:rPr lang="en-US" sz="700" dirty="0">
                 <a:solidFill>
                   <a:srgbClr val="56D364"/>
                 </a:solidFill>
@@ -15122,14 +15122,14 @@
               </a:rPr>
               <a:t>END //</a:t>
             </a:r>
-            <a:endParaRPr lang="en-US" sz="950" dirty="0"/>
-          </a:p>
-          <a:p>
-            <a:pPr marL="0" indent="0">
-              <a:buNone/>
-            </a:pPr>
-            <a:r>
-              <a:rPr lang="en-US" sz="950" dirty="0">
+            <a:endParaRPr lang="en-US" sz="700" dirty="0"/>
+          </a:p>
+          <a:p>
+            <a:pPr marL="0" indent="0">
+              <a:buNone/>
+            </a:pPr>
+            <a:r>
+              <a:rPr lang="en-US" sz="700" dirty="0">
                 <a:solidFill>
                   <a:srgbClr val="56D364"/>
                 </a:solidFill>
@@ -15139,7 +15139,7 @@
               </a:rPr>
               <a:t>DELIMITER ;</a:t>
             </a:r>
-            <a:endParaRPr lang="en-US" sz="950" dirty="0"/>
+            <a:endParaRPr lang="en-US" sz="700" dirty="0"/>
           </a:p>
         </p:txBody>
       </p:sp>
@@ -15595,7 +15595,7 @@
               <a:buNone/>
             </a:pPr>
             <a:r>
-              <a:rPr lang="en-US" sz="950" dirty="0">
+              <a:rPr lang="en-US" sz="700" dirty="0">
                 <a:solidFill>
                   <a:srgbClr val="56D364"/>
                 </a:solidFill>
@@ -15605,14 +15605,14 @@
               </a:rPr>
               <a:t>-- Análisis puntual: ¿qué productos</a:t>
             </a:r>
-            <a:endParaRPr lang="en-US" sz="950" dirty="0"/>
-          </a:p>
-          <a:p>
-            <a:pPr marL="0" indent="0">
-              <a:buNone/>
-            </a:pPr>
-            <a:r>
-              <a:rPr lang="en-US" sz="950" dirty="0">
+            <a:endParaRPr lang="en-US" sz="700" dirty="0"/>
+          </a:p>
+          <a:p>
+            <a:pPr marL="0" indent="0">
+              <a:buNone/>
+            </a:pPr>
+            <a:r>
+              <a:rPr lang="en-US" sz="700" dirty="0">
                 <a:solidFill>
                   <a:srgbClr val="56D364"/>
                 </a:solidFill>
@@ -15622,14 +15622,14 @@
               </a:rPr>
               <a:t>-- tienen stock crítico?</a:t>
             </a:r>
-            <a:endParaRPr lang="en-US" sz="950" dirty="0"/>
-          </a:p>
-          <a:p>
-            <a:pPr marL="0" indent="0">
-              <a:buNone/>
-            </a:pPr>
-            <a:r>
-              <a:rPr lang="en-US" sz="950" dirty="0">
+            <a:endParaRPr lang="en-US" sz="700" dirty="0"/>
+          </a:p>
+          <a:p>
+            <a:pPr marL="0" indent="0">
+              <a:buNone/>
+            </a:pPr>
+            <a:r>
+              <a:rPr lang="en-US" sz="700" dirty="0">
                 <a:solidFill>
                   <a:srgbClr val="56D364"/>
                 </a:solidFill>
@@ -15639,14 +15639,14 @@
               </a:rPr>
               <a:t>SELECT p.nombre, p.stock,</a:t>
             </a:r>
-            <a:endParaRPr lang="en-US" sz="950" dirty="0"/>
-          </a:p>
-          <a:p>
-            <a:pPr marL="0" indent="0">
-              <a:buNone/>
-            </a:pPr>
-            <a:r>
-              <a:rPr lang="en-US" sz="950" dirty="0">
+            <a:endParaRPr lang="en-US" sz="700" dirty="0"/>
+          </a:p>
+          <a:p>
+            <a:pPr marL="0" indent="0">
+              <a:buNone/>
+            </a:pPr>
+            <a:r>
+              <a:rPr lang="en-US" sz="700" dirty="0">
                 <a:solidFill>
                   <a:srgbClr val="56D364"/>
                 </a:solidFill>
@@ -15656,14 +15656,14 @@
               </a:rPr>
               <a:t>       c.nombre AS categoria,</a:t>
             </a:r>
-            <a:endParaRPr lang="en-US" sz="950" dirty="0"/>
-          </a:p>
-          <a:p>
-            <a:pPr marL="0" indent="0">
-              <a:buNone/>
-            </a:pPr>
-            <a:r>
-              <a:rPr lang="en-US" sz="950" dirty="0">
+            <a:endParaRPr lang="en-US" sz="700" dirty="0"/>
+          </a:p>
+          <a:p>
+            <a:pPr marL="0" indent="0">
+              <a:buNone/>
+            </a:pPr>
+            <a:r>
+              <a:rPr lang="en-US" sz="700" dirty="0">
                 <a:solidFill>
                   <a:srgbClr val="56D364"/>
                 </a:solidFill>
@@ -15673,14 +15673,14 @@
               </a:rPr>
               <a:t>       p.precio</a:t>
             </a:r>
-            <a:endParaRPr lang="en-US" sz="950" dirty="0"/>
-          </a:p>
-          <a:p>
-            <a:pPr marL="0" indent="0">
-              <a:buNone/>
-            </a:pPr>
-            <a:r>
-              <a:rPr lang="en-US" sz="950" dirty="0">
+            <a:endParaRPr lang="en-US" sz="700" dirty="0"/>
+          </a:p>
+          <a:p>
+            <a:pPr marL="0" indent="0">
+              <a:buNone/>
+            </a:pPr>
+            <a:r>
+              <a:rPr lang="en-US" sz="700" dirty="0">
                 <a:solidFill>
                   <a:srgbClr val="56D364"/>
                 </a:solidFill>
@@ -15690,14 +15690,14 @@
               </a:rPr>
               <a:t>FROM producto p</a:t>
             </a:r>
-            <a:endParaRPr lang="en-US" sz="950" dirty="0"/>
-          </a:p>
-          <a:p>
-            <a:pPr marL="0" indent="0">
-              <a:buNone/>
-            </a:pPr>
-            <a:r>
-              <a:rPr lang="en-US" sz="950" dirty="0">
+            <a:endParaRPr lang="en-US" sz="700" dirty="0"/>
+          </a:p>
+          <a:p>
+            <a:pPr marL="0" indent="0">
+              <a:buNone/>
+            </a:pPr>
+            <a:r>
+              <a:rPr lang="en-US" sz="700" dirty="0">
                 <a:solidFill>
                   <a:srgbClr val="56D364"/>
                 </a:solidFill>
@@ -15707,14 +15707,14 @@
               </a:rPr>
               <a:t>JOIN categoria c </a:t>
             </a:r>
-            <a:endParaRPr lang="en-US" sz="950" dirty="0"/>
-          </a:p>
-          <a:p>
-            <a:pPr marL="0" indent="0">
-              <a:buNone/>
-            </a:pPr>
-            <a:r>
-              <a:rPr lang="en-US" sz="950" dirty="0">
+            <a:endParaRPr lang="en-US" sz="700" dirty="0"/>
+          </a:p>
+          <a:p>
+            <a:pPr marL="0" indent="0">
+              <a:buNone/>
+            </a:pPr>
+            <a:r>
+              <a:rPr lang="en-US" sz="700" dirty="0">
                 <a:solidFill>
                   <a:srgbClr val="56D364"/>
                 </a:solidFill>
@@ -15724,14 +15724,14 @@
               </a:rPr>
               <a:t>  ON p.id_categoria = c.id_categoria</a:t>
             </a:r>
-            <a:endParaRPr lang="en-US" sz="950" dirty="0"/>
-          </a:p>
-          <a:p>
-            <a:pPr marL="0" indent="0">
-              <a:buNone/>
-            </a:pPr>
-            <a:r>
-              <a:rPr lang="en-US" sz="950" dirty="0">
+            <a:endParaRPr lang="en-US" sz="700" dirty="0"/>
+          </a:p>
+          <a:p>
+            <a:pPr marL="0" indent="0">
+              <a:buNone/>
+            </a:pPr>
+            <a:r>
+              <a:rPr lang="en-US" sz="700" dirty="0">
                 <a:solidFill>
                   <a:srgbClr val="56D364"/>
                 </a:solidFill>
@@ -15741,14 +15741,14 @@
               </a:rPr>
               <a:t>WHERE p.stock &lt;= 10 AND p.activo = 1</a:t>
             </a:r>
-            <a:endParaRPr lang="en-US" sz="950" dirty="0"/>
-          </a:p>
-          <a:p>
-            <a:pPr marL="0" indent="0">
-              <a:buNone/>
-            </a:pPr>
-            <a:r>
-              <a:rPr lang="en-US" sz="950" dirty="0">
+            <a:endParaRPr lang="en-US" sz="700" dirty="0"/>
+          </a:p>
+          <a:p>
+            <a:pPr marL="0" indent="0">
+              <a:buNone/>
+            </a:pPr>
+            <a:r>
+              <a:rPr lang="en-US" sz="700" dirty="0">
                 <a:solidFill>
                   <a:srgbClr val="56D364"/>
                 </a:solidFill>
@@ -15758,20 +15758,20 @@
               </a:rPr>
               <a:t>ORDER BY p.stock ASC;</a:t>
             </a:r>
-            <a:endParaRPr lang="en-US" sz="950" dirty="0"/>
-          </a:p>
-          <a:p>
-            <a:pPr marL="0" indent="0">
-              <a:buNone/>
-            </a:pPr>
-            <a:endParaRPr lang="en-US" sz="950" dirty="0"/>
-          </a:p>
-          <a:p>
-            <a:pPr marL="0" indent="0">
-              <a:buNone/>
-            </a:pPr>
-            <a:r>
-              <a:rPr lang="en-US" sz="950" dirty="0">
+            <a:endParaRPr lang="en-US" sz="700" dirty="0"/>
+          </a:p>
+          <a:p>
+            <a:pPr marL="0" indent="0">
+              <a:buNone/>
+            </a:pPr>
+            <a:endParaRPr lang="en-US" sz="700" dirty="0"/>
+          </a:p>
+          <a:p>
+            <a:pPr marL="0" indent="0">
+              <a:buNone/>
+            </a:pPr>
+            <a:r>
+              <a:rPr lang="en-US" sz="700" dirty="0">
                 <a:solidFill>
                   <a:srgbClr val="56D364"/>
                 </a:solidFill>
@@ -15781,14 +15781,14 @@
               </a:rPr>
               <a:t>-- Resultado inmediato en pantalla:</a:t>
             </a:r>
-            <a:endParaRPr lang="en-US" sz="950" dirty="0"/>
-          </a:p>
-          <a:p>
-            <a:pPr marL="0" indent="0">
-              <a:buNone/>
-            </a:pPr>
-            <a:r>
-              <a:rPr lang="en-US" sz="950" dirty="0">
+            <a:endParaRPr lang="en-US" sz="700" dirty="0"/>
+          </a:p>
+          <a:p>
+            <a:pPr marL="0" indent="0">
+              <a:buNone/>
+            </a:pPr>
+            <a:r>
+              <a:rPr lang="en-US" sz="700" dirty="0">
                 <a:solidFill>
                   <a:srgbClr val="56D364"/>
                 </a:solidFill>
@@ -15798,14 +15798,14 @@
               </a:rPr>
               <a:t>-- | Café 500g | 3 | Bebidas | 18500 |</a:t>
             </a:r>
-            <a:endParaRPr lang="en-US" sz="950" dirty="0"/>
-          </a:p>
-          <a:p>
-            <a:pPr marL="0" indent="0">
-              <a:buNone/>
-            </a:pPr>
-            <a:r>
-              <a:rPr lang="en-US" sz="950" dirty="0">
+            <a:endParaRPr lang="en-US" sz="700" dirty="0"/>
+          </a:p>
+          <a:p>
+            <a:pPr marL="0" indent="0">
+              <a:buNone/>
+            </a:pPr>
+            <a:r>
+              <a:rPr lang="en-US" sz="700" dirty="0">
                 <a:solidFill>
                   <a:srgbClr val="56D364"/>
                 </a:solidFill>
@@ -15815,7 +15815,7 @@
               </a:rPr>
               <a:t>-- | Azúcar 1kg| 8 | Alim.   |  4800 |</a:t>
             </a:r>
-            <a:endParaRPr lang="en-US" sz="950" dirty="0"/>
+            <a:endParaRPr lang="en-US" sz="700" dirty="0"/>
           </a:p>
         </p:txBody>
       </p:sp>
@@ -15947,14 +15947,14 @@
           <a:ln/>
         </p:spPr>
         <p:txBody>
-          <a:bodyPr wrap="square" lIns="0" tIns="0" rIns="0" bIns="0" rtlCol="0" anchor="t"/>
-          <a:lstStyle/>
-          <a:p>
-            <a:pPr marL="0" indent="0">
-              <a:buNone/>
-            </a:pPr>
-            <a:r>
-              <a:rPr lang="en-US" sz="950" dirty="0">
+          <a:bodyPr wrap="square" lIns="0" tIns="0" rIns="0" bIns="0" numCol="2" rtlCol="0" anchor="t"/>
+          <a:lstStyle/>
+          <a:p>
+            <a:pPr marL="0" indent="0">
+              <a:buNone/>
+            </a:pPr>
+            <a:r>
+              <a:rPr lang="en-US" sz="800" dirty="0">
                 <a:solidFill>
                   <a:srgbClr val="56D364"/>
                 </a:solidFill>
@@ -15964,14 +15964,14 @@
               </a:rPr>
               <a:t>&lt;?php</a:t>
             </a:r>
-            <a:endParaRPr lang="en-US" sz="950" dirty="0"/>
-          </a:p>
-          <a:p>
-            <a:pPr marL="0" indent="0">
-              <a:buNone/>
-            </a:pPr>
-            <a:r>
-              <a:rPr lang="en-US" sz="950" dirty="0">
+            <a:endParaRPr lang="en-US" sz="800" dirty="0"/>
+          </a:p>
+          <a:p>
+            <a:pPr marL="0" indent="0">
+              <a:buNone/>
+            </a:pPr>
+            <a:r>
+              <a:rPr lang="en-US" sz="800" dirty="0">
                 <a:solidFill>
                   <a:srgbClr val="56D364"/>
                 </a:solidFill>
@@ -15981,14 +15981,14 @@
               </a:rPr>
               <a:t>// Búsqueda dinámica del usuario</a:t>
             </a:r>
-            <a:endParaRPr lang="en-US" sz="950" dirty="0"/>
-          </a:p>
-          <a:p>
-            <a:pPr marL="0" indent="0">
-              <a:buNone/>
-            </a:pPr>
-            <a:r>
-              <a:rPr lang="en-US" sz="950" dirty="0">
+            <a:endParaRPr lang="en-US" sz="800" dirty="0"/>
+          </a:p>
+          <a:p>
+            <a:pPr marL="0" indent="0">
+              <a:buNone/>
+            </a:pPr>
+            <a:r>
+              <a:rPr lang="en-US" sz="800" dirty="0">
                 <a:solidFill>
                   <a:srgbClr val="56D364"/>
                 </a:solidFill>
@@ -15998,14 +15998,14 @@
               </a:rPr>
               <a:t>$term = $_GET['q'] ?? '';</a:t>
             </a:r>
-            <a:endParaRPr lang="en-US" sz="950" dirty="0"/>
-          </a:p>
-          <a:p>
-            <a:pPr marL="0" indent="0">
-              <a:buNone/>
-            </a:pPr>
-            <a:r>
-              <a:rPr lang="en-US" sz="950" dirty="0">
+            <a:endParaRPr lang="en-US" sz="800" dirty="0"/>
+          </a:p>
+          <a:p>
+            <a:pPr marL="0" indent="0">
+              <a:buNone/>
+            </a:pPr>
+            <a:r>
+              <a:rPr lang="en-US" sz="800" dirty="0">
                 <a:solidFill>
                   <a:srgbClr val="56D364"/>
                 </a:solidFill>
@@ -16015,14 +16015,14 @@
               </a:rPr>
               <a:t>$stmt = $pdo-&gt;prepare(</a:t>
             </a:r>
-            <a:endParaRPr lang="en-US" sz="950" dirty="0"/>
-          </a:p>
-          <a:p>
-            <a:pPr marL="0" indent="0">
-              <a:buNone/>
-            </a:pPr>
-            <a:r>
-              <a:rPr lang="en-US" sz="950" dirty="0">
+            <a:endParaRPr lang="en-US" sz="800" dirty="0"/>
+          </a:p>
+          <a:p>
+            <a:pPr marL="0" indent="0">
+              <a:buNone/>
+            </a:pPr>
+            <a:r>
+              <a:rPr lang="en-US" sz="800" dirty="0">
                 <a:solidFill>
                   <a:srgbClr val="56D364"/>
                 </a:solidFill>
@@ -16032,14 +16032,14 @@
               </a:rPr>
               <a:t>  "SELECT p.nombre, p.stock, p.precio</a:t>
             </a:r>
-            <a:endParaRPr lang="en-US" sz="950" dirty="0"/>
-          </a:p>
-          <a:p>
-            <a:pPr marL="0" indent="0">
-              <a:buNone/>
-            </a:pPr>
-            <a:r>
-              <a:rPr lang="en-US" sz="950" dirty="0">
+            <a:endParaRPr lang="en-US" sz="800" dirty="0"/>
+          </a:p>
+          <a:p>
+            <a:pPr marL="0" indent="0">
+              <a:buNone/>
+            </a:pPr>
+            <a:r>
+              <a:rPr lang="en-US" sz="800" dirty="0">
                 <a:solidFill>
                   <a:srgbClr val="56D364"/>
                 </a:solidFill>
@@ -16049,14 +16049,14 @@
               </a:rPr>
               <a:t>   FROM producto p</a:t>
             </a:r>
-            <a:endParaRPr lang="en-US" sz="950" dirty="0"/>
-          </a:p>
-          <a:p>
-            <a:pPr marL="0" indent="0">
-              <a:buNone/>
-            </a:pPr>
-            <a:r>
-              <a:rPr lang="en-US" sz="950" dirty="0">
+            <a:endParaRPr lang="en-US" sz="800" dirty="0"/>
+          </a:p>
+          <a:p>
+            <a:pPr marL="0" indent="0">
+              <a:buNone/>
+            </a:pPr>
+            <a:r>
+              <a:rPr lang="en-US" sz="800" dirty="0">
                 <a:solidFill>
                   <a:srgbClr val="56D364"/>
                 </a:solidFill>
@@ -16066,14 +16066,14 @@
               </a:rPr>
               <a:t>   WHERE p.nombre LIKE :term</a:t>
             </a:r>
-            <a:endParaRPr lang="en-US" sz="950" dirty="0"/>
-          </a:p>
-          <a:p>
-            <a:pPr marL="0" indent="0">
-              <a:buNone/>
-            </a:pPr>
-            <a:r>
-              <a:rPr lang="en-US" sz="950" dirty="0">
+            <a:endParaRPr lang="en-US" sz="800" dirty="0"/>
+          </a:p>
+          <a:p>
+            <a:pPr marL="0" indent="0">
+              <a:buNone/>
+            </a:pPr>
+            <a:r>
+              <a:rPr lang="en-US" sz="800" dirty="0">
                 <a:solidFill>
                   <a:srgbClr val="56D364"/>
                 </a:solidFill>
@@ -16083,14 +16083,14 @@
               </a:rPr>
               <a:t>   AND p.activo = 1</a:t>
             </a:r>
-            <a:endParaRPr lang="en-US" sz="950" dirty="0"/>
-          </a:p>
-          <a:p>
-            <a:pPr marL="0" indent="0">
-              <a:buNone/>
-            </a:pPr>
-            <a:r>
-              <a:rPr lang="en-US" sz="950" dirty="0">
+            <a:endParaRPr lang="en-US" sz="800" dirty="0"/>
+          </a:p>
+          <a:p>
+            <a:pPr marL="0" indent="0">
+              <a:buNone/>
+            </a:pPr>
+            <a:r>
+              <a:rPr lang="en-US" sz="800" dirty="0">
                 <a:solidFill>
                   <a:srgbClr val="56D364"/>
                 </a:solidFill>
@@ -16100,14 +16100,14 @@
               </a:rPr>
               <a:t>   ORDER BY p.nombre</a:t>
             </a:r>
-            <a:endParaRPr lang="en-US" sz="950" dirty="0"/>
-          </a:p>
-          <a:p>
-            <a:pPr marL="0" indent="0">
-              <a:buNone/>
-            </a:pPr>
-            <a:r>
-              <a:rPr lang="en-US" sz="950" dirty="0">
+            <a:endParaRPr lang="en-US" sz="800" dirty="0"/>
+          </a:p>
+          <a:p>
+            <a:pPr marL="0" indent="0">
+              <a:buNone/>
+            </a:pPr>
+            <a:r>
+              <a:rPr lang="en-US" sz="800" dirty="0">
                 <a:solidFill>
                   <a:srgbClr val="56D364"/>
                 </a:solidFill>
@@ -16117,14 +16117,14 @@
               </a:rPr>
               <a:t>   LIMIT 20"</a:t>
             </a:r>
-            <a:endParaRPr lang="en-US" sz="950" dirty="0"/>
-          </a:p>
-          <a:p>
-            <a:pPr marL="0" indent="0">
-              <a:buNone/>
-            </a:pPr>
-            <a:r>
-              <a:rPr lang="en-US" sz="950" dirty="0">
+            <a:endParaRPr lang="en-US" sz="800" dirty="0"/>
+          </a:p>
+          <a:p>
+            <a:pPr marL="0" indent="0">
+              <a:buNone/>
+            </a:pPr>
+            <a:r>
+              <a:rPr lang="en-US" sz="800" dirty="0">
                 <a:solidFill>
                   <a:srgbClr val="56D364"/>
                 </a:solidFill>
@@ -16134,14 +16134,14 @@
               </a:rPr>
               <a:t>);</a:t>
             </a:r>
-            <a:endParaRPr lang="en-US" sz="950" dirty="0"/>
-          </a:p>
-          <a:p>
-            <a:pPr marL="0" indent="0">
-              <a:buNone/>
-            </a:pPr>
-            <a:r>
-              <a:rPr lang="en-US" sz="950" dirty="0">
+            <a:endParaRPr lang="en-US" sz="800" dirty="0"/>
+          </a:p>
+          <a:p>
+            <a:pPr marL="0" indent="0">
+              <a:buNone/>
+            </a:pPr>
+            <a:r>
+              <a:rPr lang="en-US" sz="800" dirty="0">
                 <a:solidFill>
                   <a:srgbClr val="56D364"/>
                 </a:solidFill>
@@ -16151,14 +16151,14 @@
               </a:rPr>
               <a:t>$stmt-&gt;execute([</a:t>
             </a:r>
-            <a:endParaRPr lang="en-US" sz="950" dirty="0"/>
-          </a:p>
-          <a:p>
-            <a:pPr marL="0" indent="0">
-              <a:buNone/>
-            </a:pPr>
-            <a:r>
-              <a:rPr lang="en-US" sz="950" dirty="0">
+            <a:endParaRPr lang="en-US" sz="800" dirty="0"/>
+          </a:p>
+          <a:p>
+            <a:pPr marL="0" indent="0">
+              <a:buNone/>
+            </a:pPr>
+            <a:r>
+              <a:rPr lang="en-US" sz="800" dirty="0">
                 <a:solidFill>
                   <a:srgbClr val="56D364"/>
                 </a:solidFill>
@@ -16168,14 +16168,14 @@
               </a:rPr>
               <a:t>    ':term' =&gt; '%'.$term.'%'</a:t>
             </a:r>
-            <a:endParaRPr lang="en-US" sz="950" dirty="0"/>
-          </a:p>
-          <a:p>
-            <a:pPr marL="0" indent="0">
-              <a:buNone/>
-            </a:pPr>
-            <a:r>
-              <a:rPr lang="en-US" sz="950" dirty="0">
+            <a:endParaRPr lang="en-US" sz="800" dirty="0"/>
+          </a:p>
+          <a:p>
+            <a:pPr marL="0" indent="0">
+              <a:buNone/>
+            </a:pPr>
+            <a:r>
+              <a:rPr lang="en-US" sz="800" dirty="0">
                 <a:solidFill>
                   <a:srgbClr val="56D364"/>
                 </a:solidFill>
@@ -16185,14 +16185,14 @@
               </a:rPr>
               <a:t>]);</a:t>
             </a:r>
-            <a:endParaRPr lang="en-US" sz="950" dirty="0"/>
-          </a:p>
-          <a:p>
-            <a:pPr marL="0" indent="0">
-              <a:buNone/>
-            </a:pPr>
-            <a:r>
-              <a:rPr lang="en-US" sz="950" dirty="0">
+            <a:endParaRPr lang="en-US" sz="800" dirty="0"/>
+          </a:p>
+          <a:p>
+            <a:pPr marL="0" indent="0">
+              <a:buNone/>
+            </a:pPr>
+            <a:r>
+              <a:rPr lang="en-US" sz="800" dirty="0">
                 <a:solidFill>
                   <a:srgbClr val="56D364"/>
                 </a:solidFill>
@@ -16202,14 +16202,14 @@
               </a:rPr>
               <a:t>$productos = $stmt-&gt;fetchAll();</a:t>
             </a:r>
-            <a:endParaRPr lang="en-US" sz="950" dirty="0"/>
-          </a:p>
-          <a:p>
-            <a:pPr marL="0" indent="0">
-              <a:buNone/>
-            </a:pPr>
-            <a:r>
-              <a:rPr lang="en-US" sz="950" dirty="0">
+            <a:endParaRPr lang="en-US" sz="800" dirty="0"/>
+          </a:p>
+          <a:p>
+            <a:pPr marL="0" indent="0">
+              <a:buNone/>
+            </a:pPr>
+            <a:r>
+              <a:rPr lang="en-US" sz="800" dirty="0">
                 <a:solidFill>
                   <a:srgbClr val="56D364"/>
                 </a:solidFill>
@@ -16219,14 +16219,14 @@
               </a:rPr>
               <a:t>// Resultado renderizado en HTML:</a:t>
             </a:r>
-            <a:endParaRPr lang="en-US" sz="950" dirty="0"/>
-          </a:p>
-          <a:p>
-            <a:pPr marL="0" indent="0">
-              <a:buNone/>
-            </a:pPr>
-            <a:r>
-              <a:rPr lang="en-US" sz="950" dirty="0">
+            <a:endParaRPr lang="en-US" sz="800" dirty="0"/>
+          </a:p>
+          <a:p>
+            <a:pPr marL="0" indent="0">
+              <a:buNone/>
+            </a:pPr>
+            <a:r>
+              <a:rPr lang="en-US" sz="800" dirty="0">
                 <a:solidFill>
                   <a:srgbClr val="56D364"/>
                 </a:solidFill>
@@ -16236,14 +16236,14 @@
               </a:rPr>
               <a:t>foreach($productos as $p) {</a:t>
             </a:r>
-            <a:endParaRPr lang="en-US" sz="950" dirty="0"/>
-          </a:p>
-          <a:p>
-            <a:pPr marL="0" indent="0">
-              <a:buNone/>
-            </a:pPr>
-            <a:r>
-              <a:rPr lang="en-US" sz="950" dirty="0">
+            <a:endParaRPr lang="en-US" sz="800" dirty="0"/>
+          </a:p>
+          <a:p>
+            <a:pPr marL="0" indent="0">
+              <a:buNone/>
+            </a:pPr>
+            <a:r>
+              <a:rPr lang="en-US" sz="800" dirty="0">
                 <a:solidFill>
                   <a:srgbClr val="56D364"/>
                 </a:solidFill>
@@ -16253,14 +16253,14 @@
               </a:rPr>
               <a:t>    echo "&lt;tr&gt;&lt;td&gt;{$p['nombre']}&lt;/td&gt;</a:t>
             </a:r>
-            <a:endParaRPr lang="en-US" sz="950" dirty="0"/>
-          </a:p>
-          <a:p>
-            <a:pPr marL="0" indent="0">
-              <a:buNone/>
-            </a:pPr>
-            <a:r>
-              <a:rPr lang="en-US" sz="950" dirty="0">
+            <a:endParaRPr lang="en-US" sz="800" dirty="0"/>
+          </a:p>
+          <a:p>
+            <a:pPr marL="0" indent="0">
+              <a:buNone/>
+            </a:pPr>
+            <a:r>
+              <a:rPr lang="en-US" sz="800" dirty="0">
                 <a:solidFill>
                   <a:srgbClr val="56D364"/>
                 </a:solidFill>
@@ -16270,14 +16270,14 @@
               </a:rPr>
               <a:t>    &lt;td&gt;{$p['precio']}&lt;/td&gt;&lt;/tr&gt;";</a:t>
             </a:r>
-            <a:endParaRPr lang="en-US" sz="950" dirty="0"/>
-          </a:p>
-          <a:p>
-            <a:pPr marL="0" indent="0">
-              <a:buNone/>
-            </a:pPr>
-            <a:r>
-              <a:rPr lang="en-US" sz="950" dirty="0">
+            <a:endParaRPr lang="en-US" sz="800" dirty="0"/>
+          </a:p>
+          <a:p>
+            <a:pPr marL="0" indent="0">
+              <a:buNone/>
+            </a:pPr>
+            <a:r>
+              <a:rPr lang="en-US" sz="800" dirty="0">
                 <a:solidFill>
                   <a:srgbClr val="56D364"/>
                 </a:solidFill>
@@ -16287,7 +16287,7 @@
               </a:rPr>
               <a:t>}</a:t>
             </a:r>
-            <a:endParaRPr lang="en-US" sz="950" dirty="0"/>
+            <a:endParaRPr lang="en-US" sz="800" dirty="0"/>
           </a:p>
         </p:txBody>
       </p:sp>
@@ -19071,7 +19071,7 @@
               <a:buNone/>
             </a:pPr>
             <a:r>
-              <a:rPr lang="en-US" sz="950" dirty="0">
+              <a:rPr lang="en-US" sz="800" dirty="0">
                 <a:solidFill>
                   <a:srgbClr val="56D364"/>
                 </a:solidFill>
@@ -19081,14 +19081,14 @@
               </a:rPr>
               <a:t>-- JSON nativo (MariaDB 10.2+): almacenar objetos estructurados</a:t>
             </a:r>
-            <a:endParaRPr lang="en-US" sz="950" dirty="0"/>
-          </a:p>
-          <a:p>
-            <a:pPr marL="0" indent="0">
-              <a:buNone/>
-            </a:pPr>
-            <a:r>
-              <a:rPr lang="en-US" sz="950" dirty="0">
+            <a:endParaRPr lang="en-US" sz="800" dirty="0"/>
+          </a:p>
+          <a:p>
+            <a:pPr marL="0" indent="0">
+              <a:buNone/>
+            </a:pPr>
+            <a:r>
+              <a:rPr lang="en-US" sz="800" dirty="0">
                 <a:solidFill>
                   <a:srgbClr val="56D364"/>
                 </a:solidFill>
@@ -19098,14 +19098,14 @@
               </a:rPr>
               <a:t>ALTER TABLE producto ADD COLUMN atributos JSON;</a:t>
             </a:r>
-            <a:endParaRPr lang="en-US" sz="950" dirty="0"/>
-          </a:p>
-          <a:p>
-            <a:pPr marL="0" indent="0">
-              <a:buNone/>
-            </a:pPr>
-            <a:r>
-              <a:rPr lang="en-US" sz="950" dirty="0">
+            <a:endParaRPr lang="en-US" sz="800" dirty="0"/>
+          </a:p>
+          <a:p>
+            <a:pPr marL="0" indent="0">
+              <a:buNone/>
+            </a:pPr>
+            <a:r>
+              <a:rPr lang="en-US" sz="800" dirty="0">
                 <a:solidFill>
                   <a:srgbClr val="56D364"/>
                 </a:solidFill>
@@ -19115,14 +19115,14 @@
               </a:rPr>
               <a:t>UPDATE producto SET atributos = '{"color":"rojo","talla":"M","material":"algodón"}' WHERE id_producto=1;</a:t>
             </a:r>
-            <a:endParaRPr lang="en-US" sz="950" dirty="0"/>
-          </a:p>
-          <a:p>
-            <a:pPr marL="0" indent="0">
-              <a:buNone/>
-            </a:pPr>
-            <a:r>
-              <a:rPr lang="en-US" sz="950" dirty="0">
+            <a:endParaRPr lang="en-US" sz="800" dirty="0"/>
+          </a:p>
+          <a:p>
+            <a:pPr marL="0" indent="0">
+              <a:buNone/>
+            </a:pPr>
+            <a:r>
+              <a:rPr lang="en-US" sz="800" dirty="0">
                 <a:solidFill>
                   <a:srgbClr val="56D364"/>
                 </a:solidFill>
@@ -19132,14 +19132,14 @@
               </a:rPr>
               <a:t>-- Consultar campo JSON con funciones nativas:</a:t>
             </a:r>
-            <a:endParaRPr lang="en-US" sz="950" dirty="0"/>
-          </a:p>
-          <a:p>
-            <a:pPr marL="0" indent="0">
-              <a:buNone/>
-            </a:pPr>
-            <a:r>
-              <a:rPr lang="en-US" sz="950" dirty="0">
+            <a:endParaRPr lang="en-US" sz="800" dirty="0"/>
+          </a:p>
+          <a:p>
+            <a:pPr marL="0" indent="0">
+              <a:buNone/>
+            </a:pPr>
+            <a:r>
+              <a:rPr lang="en-US" sz="800" dirty="0">
                 <a:solidFill>
                   <a:srgbClr val="56D364"/>
                 </a:solidFill>
@@ -19149,14 +19149,14 @@
               </a:rPr>
               <a:t>SELECT nombre, JSON_EXTRACT(atributos,'$.color') AS color,</a:t>
             </a:r>
-            <a:endParaRPr lang="en-US" sz="950" dirty="0"/>
-          </a:p>
-          <a:p>
-            <a:pPr marL="0" indent="0">
-              <a:buNone/>
-            </a:pPr>
-            <a:r>
-              <a:rPr lang="en-US" sz="950" dirty="0">
+            <a:endParaRPr lang="en-US" sz="800" dirty="0"/>
+          </a:p>
+          <a:p>
+            <a:pPr marL="0" indent="0">
+              <a:buNone/>
+            </a:pPr>
+            <a:r>
+              <a:rPr lang="en-US" sz="800" dirty="0">
                 <a:solidFill>
                   <a:srgbClr val="56D364"/>
                 </a:solidFill>
@@ -19166,7 +19166,7 @@
               </a:rPr>
               <a:t>       JSON_VALUE(atributos,'$.talla') AS talla FROM producto WHERE id_producto=1;</a:t>
             </a:r>
-            <a:endParaRPr lang="en-US" sz="950" dirty="0"/>
+            <a:endParaRPr lang="en-US" sz="800" dirty="0"/>
           </a:p>
         </p:txBody>
       </p:sp>
@@ -19273,7 +19273,7 @@
               <a:buNone/>
             </a:pPr>
             <a:r>
-              <a:rPr lang="en-US" sz="950" dirty="0">
+              <a:rPr lang="en-US" sz="700" dirty="0">
                 <a:solidFill>
                   <a:srgbClr val="56D364"/>
                 </a:solidFill>
@@ -19283,14 +19283,14 @@
               </a:rPr>
               <a:t>-- ENUM: Lista de valores válidos (similar a constantes de clase)</a:t>
             </a:r>
-            <a:endParaRPr lang="en-US" sz="950" dirty="0"/>
-          </a:p>
-          <a:p>
-            <a:pPr marL="0" indent="0">
-              <a:buNone/>
-            </a:pPr>
-            <a:r>
-              <a:rPr lang="en-US" sz="950" dirty="0">
+            <a:endParaRPr lang="en-US" sz="700" dirty="0"/>
+          </a:p>
+          <a:p>
+            <a:pPr marL="0" indent="0">
+              <a:buNone/>
+            </a:pPr>
+            <a:r>
+              <a:rPr lang="en-US" sz="700" dirty="0">
                 <a:solidFill>
                   <a:srgbClr val="56D364"/>
                 </a:solidFill>
@@ -19300,14 +19300,14 @@
               </a:rPr>
               <a:t>ALTER TABLE usuario ADD COLUMN rol ENUM('admin','editor','viewer','invitado') DEFAULT 'invitado';</a:t>
             </a:r>
-            <a:endParaRPr lang="en-US" sz="950" dirty="0"/>
-          </a:p>
-          <a:p>
-            <a:pPr marL="0" indent="0">
-              <a:buNone/>
-            </a:pPr>
-            <a:r>
-              <a:rPr lang="en-US" sz="950" dirty="0">
+            <a:endParaRPr lang="en-US" sz="700" dirty="0"/>
+          </a:p>
+          <a:p>
+            <a:pPr marL="0" indent="0">
+              <a:buNone/>
+            </a:pPr>
+            <a:r>
+              <a:rPr lang="en-US" sz="700" dirty="0">
                 <a:solidFill>
                   <a:srgbClr val="56D364"/>
                 </a:solidFill>
@@ -19317,14 +19317,14 @@
               </a:rPr>
               <a:t>-- SET: Múltiples valores (como un campo de bits)</a:t>
             </a:r>
-            <a:endParaRPr lang="en-US" sz="950" dirty="0"/>
-          </a:p>
-          <a:p>
-            <a:pPr marL="0" indent="0">
-              <a:buNone/>
-            </a:pPr>
-            <a:r>
-              <a:rPr lang="en-US" sz="950" dirty="0">
+            <a:endParaRPr lang="en-US" sz="700" dirty="0"/>
+          </a:p>
+          <a:p>
+            <a:pPr marL="0" indent="0">
+              <a:buNone/>
+            </a:pPr>
+            <a:r>
+              <a:rPr lang="en-US" sz="700" dirty="0">
                 <a:solidFill>
                   <a:srgbClr val="56D364"/>
                 </a:solidFill>
@@ -19334,14 +19334,14 @@
               </a:rPr>
               <a:t>ALTER TABLE empleado ADD COLUMN permisos SET('leer','escribir','borrar','administrar') DEFAULT 'leer';</a:t>
             </a:r>
-            <a:endParaRPr lang="en-US" sz="950" dirty="0"/>
-          </a:p>
-          <a:p>
-            <a:pPr marL="0" indent="0">
-              <a:buNone/>
-            </a:pPr>
-            <a:r>
-              <a:rPr lang="en-US" sz="950" dirty="0">
+            <a:endParaRPr lang="en-US" sz="700" dirty="0"/>
+          </a:p>
+          <a:p>
+            <a:pPr marL="0" indent="0">
+              <a:buNone/>
+            </a:pPr>
+            <a:r>
+              <a:rPr lang="en-US" sz="700" dirty="0">
                 <a:solidFill>
                   <a:srgbClr val="56D364"/>
                 </a:solidFill>
@@ -19351,7 +19351,7 @@
               </a:rPr>
               <a:t>SELECT nombre, permisos FROM empleado WHERE FIND_IN_SET('escribir', permisos);</a:t>
             </a:r>
-            <a:endParaRPr lang="en-US" sz="950" dirty="0"/>
+            <a:endParaRPr lang="en-US" sz="700" dirty="0"/>
           </a:p>
         </p:txBody>
       </p:sp>
@@ -19458,7 +19458,7 @@
               <a:buNone/>
             </a:pPr>
             <a:r>
-              <a:rPr lang="en-US" sz="950" dirty="0">
+              <a:rPr lang="en-US" sz="500" dirty="0">
                 <a:solidFill>
                   <a:srgbClr val="56D364"/>
                 </a:solidFill>
@@ -19468,14 +19468,14 @@
               </a:rPr>
               <a:t>-- VIRTUAL COLUMNS (columnas generadas automáticamente)</a:t>
             </a:r>
-            <a:endParaRPr lang="en-US" sz="950" dirty="0"/>
-          </a:p>
-          <a:p>
-            <a:pPr marL="0" indent="0">
-              <a:buNone/>
-            </a:pPr>
-            <a:r>
-              <a:rPr lang="en-US" sz="950" dirty="0">
+            <a:endParaRPr lang="en-US" sz="500" dirty="0"/>
+          </a:p>
+          <a:p>
+            <a:pPr marL="0" indent="0">
+              <a:buNone/>
+            </a:pPr>
+            <a:r>
+              <a:rPr lang="en-US" sz="500" dirty="0">
                 <a:solidFill>
                   <a:srgbClr val="56D364"/>
                 </a:solidFill>
@@ -19485,14 +19485,14 @@
               </a:rPr>
               <a:t>ALTER TABLE producto ADD COLUMN precio_iva DECIMAL(12,2)</a:t>
             </a:r>
-            <a:endParaRPr lang="en-US" sz="950" dirty="0"/>
-          </a:p>
-          <a:p>
-            <a:pPr marL="0" indent="0">
-              <a:buNone/>
-            </a:pPr>
-            <a:r>
-              <a:rPr lang="en-US" sz="950" dirty="0">
+            <a:endParaRPr lang="en-US" sz="500" dirty="0"/>
+          </a:p>
+          <a:p>
+            <a:pPr marL="0" indent="0">
+              <a:buNone/>
+            </a:pPr>
+            <a:r>
+              <a:rPr lang="en-US" sz="500" dirty="0">
                 <a:solidFill>
                   <a:srgbClr val="56D364"/>
                 </a:solidFill>
@@ -19502,14 +19502,14 @@
               </a:rPr>
               <a:t>    AS (ROUND(precio * 1.19, 2)) STORED;  -- STORED: calculada y guardada</a:t>
             </a:r>
-            <a:endParaRPr lang="en-US" sz="950" dirty="0"/>
-          </a:p>
-          <a:p>
-            <a:pPr marL="0" indent="0">
-              <a:buNone/>
-            </a:pPr>
-            <a:r>
-              <a:rPr lang="en-US" sz="950" dirty="0">
+            <a:endParaRPr lang="en-US" sz="500" dirty="0"/>
+          </a:p>
+          <a:p>
+            <a:pPr marL="0" indent="0">
+              <a:buNone/>
+            </a:pPr>
+            <a:r>
+              <a:rPr lang="en-US" sz="500" dirty="0">
                 <a:solidFill>
                   <a:srgbClr val="56D364"/>
                 </a:solidFill>
@@ -19519,14 +19519,14 @@
               </a:rPr>
               <a:t>ALTER TABLE persona ADD COLUMN nombre_completo VARCHAR(170)</a:t>
             </a:r>
-            <a:endParaRPr lang="en-US" sz="950" dirty="0"/>
-          </a:p>
-          <a:p>
-            <a:pPr marL="0" indent="0">
-              <a:buNone/>
-            </a:pPr>
-            <a:r>
-              <a:rPr lang="en-US" sz="950" dirty="0">
+            <a:endParaRPr lang="en-US" sz="500" dirty="0"/>
+          </a:p>
+          <a:p>
+            <a:pPr marL="0" indent="0">
+              <a:buNone/>
+            </a:pPr>
+            <a:r>
+              <a:rPr lang="en-US" sz="500" dirty="0">
                 <a:solidFill>
                   <a:srgbClr val="56D364"/>
                 </a:solidFill>
@@ -19536,14 +19536,14 @@
               </a:rPr>
               <a:t>    AS (CONCAT(nombre, ' ', apellido)) VIRTUAL;  -- VIRTUAL: calculada en consulta</a:t>
             </a:r>
-            <a:endParaRPr lang="en-US" sz="950" dirty="0"/>
-          </a:p>
-          <a:p>
-            <a:pPr marL="0" indent="0">
-              <a:buNone/>
-            </a:pPr>
-            <a:r>
-              <a:rPr lang="en-US" sz="950" dirty="0">
+            <a:endParaRPr lang="en-US" sz="500" dirty="0"/>
+          </a:p>
+          <a:p>
+            <a:pPr marL="0" indent="0">
+              <a:buNone/>
+            </a:pPr>
+            <a:r>
+              <a:rPr lang="en-US" sz="500" dirty="0">
                 <a:solidFill>
                   <a:srgbClr val="56D364"/>
                 </a:solidFill>
@@ -19553,7 +19553,7 @@
               </a:rPr>
               <a:t>SELECT nombre_completo, precio_iva FROM producto JOIN persona ...;</a:t>
             </a:r>
-            <a:endParaRPr lang="en-US" sz="950" dirty="0"/>
+            <a:endParaRPr lang="en-US" sz="500" dirty="0"/>
           </a:p>
         </p:txBody>
       </p:sp>
@@ -26752,7 +26752,7 @@
               <a:buNone/>
             </a:pPr>
             <a:r>
-              <a:rPr lang="en-US" sz="950" dirty="0">
+              <a:rPr lang="en-US" sz="600" dirty="0">
                 <a:solidFill>
                   <a:srgbClr val="56D364"/>
                 </a:solidFill>
@@ -26762,14 +26762,14 @@
               </a:rPr>
               <a:t>CREATE TABLE producto (</a:t>
             </a:r>
-            <a:endParaRPr lang="en-US" sz="950" dirty="0"/>
-          </a:p>
-          <a:p>
-            <a:pPr marL="0" indent="0">
-              <a:buNone/>
-            </a:pPr>
-            <a:r>
-              <a:rPr lang="en-US" sz="950" dirty="0">
+            <a:endParaRPr lang="en-US" sz="600" dirty="0"/>
+          </a:p>
+          <a:p>
+            <a:pPr marL="0" indent="0">
+              <a:buNone/>
+            </a:pPr>
+            <a:r>
+              <a:rPr lang="en-US" sz="600" dirty="0">
                 <a:solidFill>
                   <a:srgbClr val="56D364"/>
                 </a:solidFill>
@@ -26779,14 +26779,14 @@
               </a:rPr>
               <a:t>  id_producto  INT AUTO_INCREMENT PRIMARY KEY,</a:t>
             </a:r>
-            <a:endParaRPr lang="en-US" sz="950" dirty="0"/>
-          </a:p>
-          <a:p>
-            <a:pPr marL="0" indent="0">
-              <a:buNone/>
-            </a:pPr>
-            <a:r>
-              <a:rPr lang="en-US" sz="950" dirty="0">
+            <a:endParaRPr lang="en-US" sz="600" dirty="0"/>
+          </a:p>
+          <a:p>
+            <a:pPr marL="0" indent="0">
+              <a:buNone/>
+            </a:pPr>
+            <a:r>
+              <a:rPr lang="en-US" sz="600" dirty="0">
                 <a:solidFill>
                   <a:srgbClr val="56D364"/>
                 </a:solidFill>
@@ -26796,14 +26796,14 @@
               </a:rPr>
               <a:t>  nombre       VARCHAR(100) NOT NULL,</a:t>
             </a:r>
-            <a:endParaRPr lang="en-US" sz="950" dirty="0"/>
-          </a:p>
-          <a:p>
-            <a:pPr marL="0" indent="0">
-              <a:buNone/>
-            </a:pPr>
-            <a:r>
-              <a:rPr lang="en-US" sz="950" dirty="0">
+            <a:endParaRPr lang="en-US" sz="600" dirty="0"/>
+          </a:p>
+          <a:p>
+            <a:pPr marL="0" indent="0">
+              <a:buNone/>
+            </a:pPr>
+            <a:r>
+              <a:rPr lang="en-US" sz="600" dirty="0">
                 <a:solidFill>
                   <a:srgbClr val="56D364"/>
                 </a:solidFill>
@@ -26813,14 +26813,14 @@
               </a:rPr>
               <a:t>  precio       DECIMAL(12,2) NOT NULL,</a:t>
             </a:r>
-            <a:endParaRPr lang="en-US" sz="950" dirty="0"/>
-          </a:p>
-          <a:p>
-            <a:pPr marL="0" indent="0">
-              <a:buNone/>
-            </a:pPr>
-            <a:r>
-              <a:rPr lang="en-US" sz="950" dirty="0">
+            <a:endParaRPr lang="en-US" sz="600" dirty="0"/>
+          </a:p>
+          <a:p>
+            <a:pPr marL="0" indent="0">
+              <a:buNone/>
+            </a:pPr>
+            <a:r>
+              <a:rPr lang="en-US" sz="600" dirty="0">
                 <a:solidFill>
                   <a:srgbClr val="56D364"/>
                 </a:solidFill>
@@ -26830,14 +26830,14 @@
               </a:rPr>
               <a:t>  atributos    JSON,          -- Almacena características variables por categoría</a:t>
             </a:r>
-            <a:endParaRPr lang="en-US" sz="950" dirty="0"/>
-          </a:p>
-          <a:p>
-            <a:pPr marL="0" indent="0">
-              <a:buNone/>
-            </a:pPr>
-            <a:r>
-              <a:rPr lang="en-US" sz="950" dirty="0">
+            <a:endParaRPr lang="en-US" sz="600" dirty="0"/>
+          </a:p>
+          <a:p>
+            <a:pPr marL="0" indent="0">
+              <a:buNone/>
+            </a:pPr>
+            <a:r>
+              <a:rPr lang="en-US" sz="600" dirty="0">
                 <a:solidFill>
                   <a:srgbClr val="56D364"/>
                 </a:solidFill>
@@ -26847,14 +26847,14 @@
               </a:rPr>
               <a:t>  -- Columnas virtuales derivadas de JSON (para facilitar búsqueda y visualización):</a:t>
             </a:r>
-            <a:endParaRPr lang="en-US" sz="950" dirty="0"/>
-          </a:p>
-          <a:p>
-            <a:pPr marL="0" indent="0">
-              <a:buNone/>
-            </a:pPr>
-            <a:r>
-              <a:rPr lang="en-US" sz="950" dirty="0">
+            <a:endParaRPr lang="en-US" sz="600" dirty="0"/>
+          </a:p>
+          <a:p>
+            <a:pPr marL="0" indent="0">
+              <a:buNone/>
+            </a:pPr>
+            <a:r>
+              <a:rPr lang="en-US" sz="600" dirty="0">
                 <a:solidFill>
                   <a:srgbClr val="56D364"/>
                 </a:solidFill>
@@ -26864,14 +26864,14 @@
               </a:rPr>
               <a:t>  color        VARCHAR(30)  AS (JSON_UNQUOTE(JSON_EXTRACT(atributos,'$.color')))    VIRTUAL,</a:t>
             </a:r>
-            <a:endParaRPr lang="en-US" sz="950" dirty="0"/>
-          </a:p>
-          <a:p>
-            <a:pPr marL="0" indent="0">
-              <a:buNone/>
-            </a:pPr>
-            <a:r>
-              <a:rPr lang="en-US" sz="950" dirty="0">
+            <a:endParaRPr lang="en-US" sz="600" dirty="0"/>
+          </a:p>
+          <a:p>
+            <a:pPr marL="0" indent="0">
+              <a:buNone/>
+            </a:pPr>
+            <a:r>
+              <a:rPr lang="en-US" sz="600" dirty="0">
                 <a:solidFill>
                   <a:srgbClr val="56D364"/>
                 </a:solidFill>
@@ -26881,14 +26881,14 @@
               </a:rPr>
               <a:t>  talla        VARCHAR(10)  AS (JSON_UNQUOTE(JSON_EXTRACT(atributos,'$.talla')))    VIRTUAL,</a:t>
             </a:r>
-            <a:endParaRPr lang="en-US" sz="950" dirty="0"/>
-          </a:p>
-          <a:p>
-            <a:pPr marL="0" indent="0">
-              <a:buNone/>
-            </a:pPr>
-            <a:r>
-              <a:rPr lang="en-US" sz="950" dirty="0">
+            <a:endParaRPr lang="en-US" sz="600" dirty="0"/>
+          </a:p>
+          <a:p>
+            <a:pPr marL="0" indent="0">
+              <a:buNone/>
+            </a:pPr>
+            <a:r>
+              <a:rPr lang="en-US" sz="600" dirty="0">
                 <a:solidFill>
                   <a:srgbClr val="56D364"/>
                 </a:solidFill>
@@ -26898,14 +26898,14 @@
               </a:rPr>
               <a:t>  peso_kg      DECIMAL(8,2) AS (JSON_EXTRACT(atributos,'$.peso_kg'))                STORED,</a:t>
             </a:r>
-            <a:endParaRPr lang="en-US" sz="950" dirty="0"/>
-          </a:p>
-          <a:p>
-            <a:pPr marL="0" indent="0">
-              <a:buNone/>
-            </a:pPr>
-            <a:r>
-              <a:rPr lang="en-US" sz="950" dirty="0">
+            <a:endParaRPr lang="en-US" sz="600" dirty="0"/>
+          </a:p>
+          <a:p>
+            <a:pPr marL="0" indent="0">
+              <a:buNone/>
+            </a:pPr>
+            <a:r>
+              <a:rPr lang="en-US" sz="600" dirty="0">
                 <a:solidFill>
                   <a:srgbClr val="56D364"/>
                 </a:solidFill>
@@ -26915,14 +26915,14 @@
               </a:rPr>
               <a:t>  precio_iva   DECIMAL(12,2) AS (ROUND(precio * 1.19, 2))                          STORED</a:t>
             </a:r>
-            <a:endParaRPr lang="en-US" sz="950" dirty="0"/>
-          </a:p>
-          <a:p>
-            <a:pPr marL="0" indent="0">
-              <a:buNone/>
-            </a:pPr>
-            <a:r>
-              <a:rPr lang="en-US" sz="950" dirty="0">
+            <a:endParaRPr lang="en-US" sz="600" dirty="0"/>
+          </a:p>
+          <a:p>
+            <a:pPr marL="0" indent="0">
+              <a:buNone/>
+            </a:pPr>
+            <a:r>
+              <a:rPr lang="en-US" sz="600" dirty="0">
                 <a:solidFill>
                   <a:srgbClr val="56D364"/>
                 </a:solidFill>
@@ -26932,20 +26932,20 @@
               </a:rPr>
               <a:t>) ENGINE=InnoDB;</a:t>
             </a:r>
-            <a:endParaRPr lang="en-US" sz="950" dirty="0"/>
-          </a:p>
-          <a:p>
-            <a:pPr marL="0" indent="0">
-              <a:buNone/>
-            </a:pPr>
-            <a:endParaRPr lang="en-US" sz="950" dirty="0"/>
-          </a:p>
-          <a:p>
-            <a:pPr marL="0" indent="0">
-              <a:buNone/>
-            </a:pPr>
-            <a:r>
-              <a:rPr lang="en-US" sz="950" dirty="0">
+            <a:endParaRPr lang="en-US" sz="600" dirty="0"/>
+          </a:p>
+          <a:p>
+            <a:pPr marL="0" indent="0">
+              <a:buNone/>
+            </a:pPr>
+            <a:endParaRPr lang="en-US" sz="600" dirty="0"/>
+          </a:p>
+          <a:p>
+            <a:pPr marL="0" indent="0">
+              <a:buNone/>
+            </a:pPr>
+            <a:r>
+              <a:rPr lang="en-US" sz="600" dirty="0">
                 <a:solidFill>
                   <a:srgbClr val="56D364"/>
                 </a:solidFill>
@@ -26955,14 +26955,14 @@
               </a:rPr>
               <a:t>-- Crear índice en columna virtual STORED (para búsqueda rápida por color)</a:t>
             </a:r>
-            <a:endParaRPr lang="en-US" sz="950" dirty="0"/>
-          </a:p>
-          <a:p>
-            <a:pPr marL="0" indent="0">
-              <a:buNone/>
-            </a:pPr>
-            <a:r>
-              <a:rPr lang="en-US" sz="950" dirty="0">
+            <a:endParaRPr lang="en-US" sz="600" dirty="0"/>
+          </a:p>
+          <a:p>
+            <a:pPr marL="0" indent="0">
+              <a:buNone/>
+            </a:pPr>
+            <a:r>
+              <a:rPr lang="en-US" sz="600" dirty="0">
                 <a:solidFill>
                   <a:srgbClr val="56D364"/>
                 </a:solidFill>
@@ -26972,20 +26972,20 @@
               </a:rPr>
               <a:t>CREATE INDEX idx_color ON producto(color);</a:t>
             </a:r>
-            <a:endParaRPr lang="en-US" sz="950" dirty="0"/>
-          </a:p>
-          <a:p>
-            <a:pPr marL="0" indent="0">
-              <a:buNone/>
-            </a:pPr>
-            <a:endParaRPr lang="en-US" sz="950" dirty="0"/>
-          </a:p>
-          <a:p>
-            <a:pPr marL="0" indent="0">
-              <a:buNone/>
-            </a:pPr>
-            <a:r>
-              <a:rPr lang="en-US" sz="950" dirty="0">
+            <a:endParaRPr lang="en-US" sz="600" dirty="0"/>
+          </a:p>
+          <a:p>
+            <a:pPr marL="0" indent="0">
+              <a:buNone/>
+            </a:pPr>
+            <a:endParaRPr lang="en-US" sz="600" dirty="0"/>
+          </a:p>
+          <a:p>
+            <a:pPr marL="0" indent="0">
+              <a:buNone/>
+            </a:pPr>
+            <a:r>
+              <a:rPr lang="en-US" sz="600" dirty="0">
                 <a:solidFill>
                   <a:srgbClr val="56D364"/>
                 </a:solidFill>
@@ -26995,14 +26995,14 @@
               </a:rPr>
               <a:t>-- Insertar productos con atributos JSON por categoría</a:t>
             </a:r>
-            <a:endParaRPr lang="en-US" sz="950" dirty="0"/>
-          </a:p>
-          <a:p>
-            <a:pPr marL="0" indent="0">
-              <a:buNone/>
-            </a:pPr>
-            <a:r>
-              <a:rPr lang="en-US" sz="950" dirty="0">
+            <a:endParaRPr lang="en-US" sz="600" dirty="0"/>
+          </a:p>
+          <a:p>
+            <a:pPr marL="0" indent="0">
+              <a:buNone/>
+            </a:pPr>
+            <a:r>
+              <a:rPr lang="en-US" sz="600" dirty="0">
                 <a:solidFill>
                   <a:srgbClr val="56D364"/>
                 </a:solidFill>
@@ -27012,14 +27012,14 @@
               </a:rPr>
               <a:t>INSERT INTO producto (nombre, precio, atributos) VALUES</a:t>
             </a:r>
-            <a:endParaRPr lang="en-US" sz="950" dirty="0"/>
-          </a:p>
-          <a:p>
-            <a:pPr marL="0" indent="0">
-              <a:buNone/>
-            </a:pPr>
-            <a:r>
-              <a:rPr lang="en-US" sz="950" dirty="0">
+            <a:endParaRPr lang="en-US" sz="600" dirty="0"/>
+          </a:p>
+          <a:p>
+            <a:pPr marL="0" indent="0">
+              <a:buNone/>
+            </a:pPr>
+            <a:r>
+              <a:rPr lang="en-US" sz="600" dirty="0">
                 <a:solidFill>
                   <a:srgbClr val="56D364"/>
                 </a:solidFill>
@@ -27029,14 +27029,14 @@
               </a:rPr>
               <a:t>  ('Camisa Polo', 89000, '{"color":"azul","talla":"M","material":"algodón","peso_kg":0.3}'),</a:t>
             </a:r>
-            <a:endParaRPr lang="en-US" sz="950" dirty="0"/>
-          </a:p>
-          <a:p>
-            <a:pPr marL="0" indent="0">
-              <a:buNone/>
-            </a:pPr>
-            <a:r>
-              <a:rPr lang="en-US" sz="950" dirty="0">
+            <a:endParaRPr lang="en-US" sz="600" dirty="0"/>
+          </a:p>
+          <a:p>
+            <a:pPr marL="0" indent="0">
+              <a:buNone/>
+            </a:pPr>
+            <a:r>
+              <a:rPr lang="en-US" sz="600" dirty="0">
                 <a:solidFill>
                   <a:srgbClr val="56D364"/>
                 </a:solidFill>
@@ -27046,14 +27046,14 @@
               </a:rPr>
               <a:t>  ('Laptop HP',  2490000, '{"ram":"16GB","almacenamiento":"512GB SSD","peso_kg":1.8}'),</a:t>
             </a:r>
-            <a:endParaRPr lang="en-US" sz="950" dirty="0"/>
-          </a:p>
-          <a:p>
-            <a:pPr marL="0" indent="0">
-              <a:buNone/>
-            </a:pPr>
-            <a:r>
-              <a:rPr lang="en-US" sz="950" dirty="0">
+            <a:endParaRPr lang="en-US" sz="600" dirty="0"/>
+          </a:p>
+          <a:p>
+            <a:pPr marL="0" indent="0">
+              <a:buNone/>
+            </a:pPr>
+            <a:r>
+              <a:rPr lang="en-US" sz="600" dirty="0">
                 <a:solidFill>
                   <a:srgbClr val="56D364"/>
                 </a:solidFill>
@@ -27063,20 +27063,20 @@
               </a:rPr>
               <a:t>  ('Café 500g',   18500, '{"origen":"Colombia","tueste":"medio","peso_kg":0.5}');</a:t>
             </a:r>
-            <a:endParaRPr lang="en-US" sz="950" dirty="0"/>
-          </a:p>
-          <a:p>
-            <a:pPr marL="0" indent="0">
-              <a:buNone/>
-            </a:pPr>
-            <a:endParaRPr lang="en-US" sz="950" dirty="0"/>
-          </a:p>
-          <a:p>
-            <a:pPr marL="0" indent="0">
-              <a:buNone/>
-            </a:pPr>
-            <a:r>
-              <a:rPr lang="en-US" sz="950" dirty="0">
+            <a:endParaRPr lang="en-US" sz="600" dirty="0"/>
+          </a:p>
+          <a:p>
+            <a:pPr marL="0" indent="0">
+              <a:buNone/>
+            </a:pPr>
+            <a:endParaRPr lang="en-US" sz="600" dirty="0"/>
+          </a:p>
+          <a:p>
+            <a:pPr marL="0" indent="0">
+              <a:buNone/>
+            </a:pPr>
+            <a:r>
+              <a:rPr lang="en-US" sz="600" dirty="0">
                 <a:solidFill>
                   <a:srgbClr val="56D364"/>
                 </a:solidFill>
@@ -27086,14 +27086,14 @@
               </a:rPr>
               <a:t>-- Consultar por columna virtual (usa índice si es STORED):</a:t>
             </a:r>
-            <a:endParaRPr lang="en-US" sz="950" dirty="0"/>
-          </a:p>
-          <a:p>
-            <a:pPr marL="0" indent="0">
-              <a:buNone/>
-            </a:pPr>
-            <a:r>
-              <a:rPr lang="en-US" sz="950" dirty="0">
+            <a:endParaRPr lang="en-US" sz="600" dirty="0"/>
+          </a:p>
+          <a:p>
+            <a:pPr marL="0" indent="0">
+              <a:buNone/>
+            </a:pPr>
+            <a:r>
+              <a:rPr lang="en-US" sz="600" dirty="0">
                 <a:solidFill>
                   <a:srgbClr val="56D364"/>
                 </a:solidFill>
@@ -27103,14 +27103,14 @@
               </a:rPr>
               <a:t>SELECT nombre, precio, precio_iva, color, talla, peso_kg</a:t>
             </a:r>
-            <a:endParaRPr lang="en-US" sz="950" dirty="0"/>
-          </a:p>
-          <a:p>
-            <a:pPr marL="0" indent="0">
-              <a:buNone/>
-            </a:pPr>
-            <a:r>
-              <a:rPr lang="en-US" sz="950" dirty="0">
+            <a:endParaRPr lang="en-US" sz="600" dirty="0"/>
+          </a:p>
+          <a:p>
+            <a:pPr marL="0" indent="0">
+              <a:buNone/>
+            </a:pPr>
+            <a:r>
+              <a:rPr lang="en-US" sz="600" dirty="0">
                 <a:solidFill>
                   <a:srgbClr val="56D364"/>
                 </a:solidFill>
@@ -27120,20 +27120,20 @@
               </a:rPr>
               <a:t>FROM producto WHERE color = 'azul';</a:t>
             </a:r>
-            <a:endParaRPr lang="en-US" sz="950" dirty="0"/>
-          </a:p>
-          <a:p>
-            <a:pPr marL="0" indent="0">
-              <a:buNone/>
-            </a:pPr>
-            <a:endParaRPr lang="en-US" sz="950" dirty="0"/>
-          </a:p>
-          <a:p>
-            <a:pPr marL="0" indent="0">
-              <a:buNone/>
-            </a:pPr>
-            <a:r>
-              <a:rPr lang="en-US" sz="950" dirty="0">
+            <a:endParaRPr lang="en-US" sz="600" dirty="0"/>
+          </a:p>
+          <a:p>
+            <a:pPr marL="0" indent="0">
+              <a:buNone/>
+            </a:pPr>
+            <a:endParaRPr lang="en-US" sz="600" dirty="0"/>
+          </a:p>
+          <a:p>
+            <a:pPr marL="0" indent="0">
+              <a:buNone/>
+            </a:pPr>
+            <a:r>
+              <a:rPr lang="en-US" sz="600" dirty="0">
                 <a:solidFill>
                   <a:srgbClr val="56D364"/>
                 </a:solidFill>
@@ -27143,14 +27143,14 @@
               </a:rPr>
               <a:t>-- Buscar en JSON directamente:</a:t>
             </a:r>
-            <a:endParaRPr lang="en-US" sz="950" dirty="0"/>
-          </a:p>
-          <a:p>
-            <a:pPr marL="0" indent="0">
-              <a:buNone/>
-            </a:pPr>
-            <a:r>
-              <a:rPr lang="en-US" sz="950" dirty="0">
+            <a:endParaRPr lang="en-US" sz="600" dirty="0"/>
+          </a:p>
+          <a:p>
+            <a:pPr marL="0" indent="0">
+              <a:buNone/>
+            </a:pPr>
+            <a:r>
+              <a:rPr lang="en-US" sz="600" dirty="0">
                 <a:solidFill>
                   <a:srgbClr val="56D364"/>
                 </a:solidFill>
@@ -27160,14 +27160,14 @@
               </a:rPr>
               <a:t>SELECT nombre, JSON_VALUE(atributos, '$.ram') AS ram</a:t>
             </a:r>
-            <a:endParaRPr lang="en-US" sz="950" dirty="0"/>
-          </a:p>
-          <a:p>
-            <a:pPr marL="0" indent="0">
-              <a:buNone/>
-            </a:pPr>
-            <a:r>
-              <a:rPr lang="en-US" sz="950" dirty="0">
+            <a:endParaRPr lang="en-US" sz="600" dirty="0"/>
+          </a:p>
+          <a:p>
+            <a:pPr marL="0" indent="0">
+              <a:buNone/>
+            </a:pPr>
+            <a:r>
+              <a:rPr lang="en-US" sz="600" dirty="0">
                 <a:solidFill>
                   <a:srgbClr val="56D364"/>
                 </a:solidFill>
@@ -27177,20 +27177,20 @@
               </a:rPr>
               <a:t>FROM producto WHERE JSON_VALUE(atributos, '$.peso_kg') &gt; 1.0;</a:t>
             </a:r>
-            <a:endParaRPr lang="en-US" sz="950" dirty="0"/>
-          </a:p>
-          <a:p>
-            <a:pPr marL="0" indent="0">
-              <a:buNone/>
-            </a:pPr>
-            <a:endParaRPr lang="en-US" sz="950" dirty="0"/>
-          </a:p>
-          <a:p>
-            <a:pPr marL="0" indent="0">
-              <a:buNone/>
-            </a:pPr>
-            <a:r>
-              <a:rPr lang="en-US" sz="950" dirty="0">
+            <a:endParaRPr lang="en-US" sz="600" dirty="0"/>
+          </a:p>
+          <a:p>
+            <a:pPr marL="0" indent="0">
+              <a:buNone/>
+            </a:pPr>
+            <a:endParaRPr lang="en-US" sz="600" dirty="0"/>
+          </a:p>
+          <a:p>
+            <a:pPr marL="0" indent="0">
+              <a:buNone/>
+            </a:pPr>
+            <a:r>
+              <a:rPr lang="en-US" sz="600" dirty="0">
                 <a:solidFill>
                   <a:srgbClr val="56D364"/>
                 </a:solidFill>
@@ -27200,14 +27200,14 @@
               </a:rPr>
               <a:t>-- Actualizar un campo específico del JSON:</a:t>
             </a:r>
-            <a:endParaRPr lang="en-US" sz="950" dirty="0"/>
-          </a:p>
-          <a:p>
-            <a:pPr marL="0" indent="0">
-              <a:buNone/>
-            </a:pPr>
-            <a:r>
-              <a:rPr lang="en-US" sz="950" dirty="0">
+            <a:endParaRPr lang="en-US" sz="600" dirty="0"/>
+          </a:p>
+          <a:p>
+            <a:pPr marL="0" indent="0">
+              <a:buNone/>
+            </a:pPr>
+            <a:r>
+              <a:rPr lang="en-US" sz="600" dirty="0">
                 <a:solidFill>
                   <a:srgbClr val="56D364"/>
                 </a:solidFill>
@@ -27217,20 +27217,20 @@
               </a:rPr>
               <a:t>UPDATE producto SET atributos = JSON_SET(atributos, '$.color', 'rojo') WHERE id_producto = 1;</a:t>
             </a:r>
-            <a:endParaRPr lang="en-US" sz="950" dirty="0"/>
-          </a:p>
-          <a:p>
-            <a:pPr marL="0" indent="0">
-              <a:buNone/>
-            </a:pPr>
-            <a:endParaRPr lang="en-US" sz="950" dirty="0"/>
-          </a:p>
-          <a:p>
-            <a:pPr marL="0" indent="0">
-              <a:buNone/>
-            </a:pPr>
-            <a:r>
-              <a:rPr lang="en-US" sz="950" dirty="0">
+            <a:endParaRPr lang="en-US" sz="600" dirty="0"/>
+          </a:p>
+          <a:p>
+            <a:pPr marL="0" indent="0">
+              <a:buNone/>
+            </a:pPr>
+            <a:endParaRPr lang="en-US" sz="600" dirty="0"/>
+          </a:p>
+          <a:p>
+            <a:pPr marL="0" indent="0">
+              <a:buNone/>
+            </a:pPr>
+            <a:r>
+              <a:rPr lang="en-US" sz="600" dirty="0">
                 <a:solidFill>
                   <a:srgbClr val="56D364"/>
                 </a:solidFill>
@@ -27240,14 +27240,14 @@
               </a:rPr>
               <a:t>-- Verificar la estructura del JSON almacenado:</a:t>
             </a:r>
-            <a:endParaRPr lang="en-US" sz="950" dirty="0"/>
-          </a:p>
-          <a:p>
-            <a:pPr marL="0" indent="0">
-              <a:buNone/>
-            </a:pPr>
-            <a:r>
-              <a:rPr lang="en-US" sz="950" dirty="0">
+            <a:endParaRPr lang="en-US" sz="600" dirty="0"/>
+          </a:p>
+          <a:p>
+            <a:pPr marL="0" indent="0">
+              <a:buNone/>
+            </a:pPr>
+            <a:r>
+              <a:rPr lang="en-US" sz="600" dirty="0">
                 <a:solidFill>
                   <a:srgbClr val="56D364"/>
                 </a:solidFill>
@@ -27257,7 +27257,7 @@
               </a:rPr>
               <a:t>SELECT nombre, JSON_PRETTY(atributos) AS atributos_formateados FROM producto WHERE id_producto = 1;</a:t>
             </a:r>
-            <a:endParaRPr lang="en-US" sz="950" dirty="0"/>
+            <a:endParaRPr lang="en-US" sz="600" dirty="0"/>
           </a:p>
         </p:txBody>
       </p:sp>
